--- a/assets/OOH_Deck_Template.pptx
+++ b/assets/OOH_Deck_Template.pptx
@@ -7,21 +7,30 @@
   <p:sldIdLst>
     <p:sldId id="256" r:id="rId6"/>
     <p:sldId id="257" r:id="rId7"/>
+    <p:sldId id="258" r:id="rId8"/>
+    <p:sldId id="259" r:id="rId9"/>
+    <p:sldId id="260" r:id="rId10"/>
+    <p:sldId id="261" r:id="rId11"/>
+    <p:sldId id="262" r:id="rId12"/>
   </p:sldIdLst>
   <p:sldSz cx="18288000" cy="10287000"/>
   <p:notesSz cx="6858000" cy="9144000"/>
   <p:embeddedFontLst>
     <p:embeddedFont>
+      <p:font typeface="Lora" charset="1" panose="00000500000000000000"/>
+      <p:regular r:id="rId13"/>
+    </p:embeddedFont>
+    <p:embeddedFont>
       <p:font typeface="Lora Bold" charset="1" panose="00000800000000000000"/>
-      <p:regular r:id="rId8"/>
+      <p:regular r:id="rId14"/>
     </p:embeddedFont>
     <p:embeddedFont>
       <p:font typeface="Prata" charset="1" panose="00000500000000000000"/>
-      <p:regular r:id="rId9"/>
+      <p:regular r:id="rId15"/>
     </p:embeddedFont>
     <p:embeddedFont>
       <p:font typeface="Canva Sans Bold" charset="1" panose="020B0803030501040103"/>
-      <p:regular r:id="rId10"/>
+      <p:regular r:id="rId16"/>
     </p:embeddedFont>
   </p:embeddedFontLst>
   <p:defaultTextStyle>
@@ -3063,7 +3072,7 @@
     <p:bg>
       <p:bgPr>
         <a:solidFill>
-          <a:srgbClr val="F6F3ED"/>
+          <a:srgbClr val="F9F6F0"/>
         </a:solidFill>
       </p:bgPr>
     </p:bg>
@@ -3083,59 +3092,13 @@
       </p:grpSpPr>
       <p:sp>
         <p:nvSpPr>
-          <p:cNvPr name="Freeform 2" id="2"/>
-          <p:cNvSpPr/>
-          <p:nvPr/>
-        </p:nvSpPr>
-        <p:spPr>
-          <a:xfrm flipH="false" flipV="false" rot="0">
-            <a:off x="6766297" y="274082"/>
-            <a:ext cx="4334207" cy="1509237"/>
-          </a:xfrm>
-          <a:custGeom>
-            <a:avLst/>
-            <a:gdLst/>
-            <a:ahLst/>
-            <a:cxnLst/>
-            <a:rect r="r" b="b" t="t" l="l"/>
-            <a:pathLst>
-              <a:path h="1509237" w="4334207">
-                <a:moveTo>
-                  <a:pt x="0" y="0"/>
-                </a:moveTo>
-                <a:lnTo>
-                  <a:pt x="4334207" y="0"/>
-                </a:lnTo>
-                <a:lnTo>
-                  <a:pt x="4334207" y="1509236"/>
-                </a:lnTo>
-                <a:lnTo>
-                  <a:pt x="0" y="1509236"/>
-                </a:lnTo>
-                <a:lnTo>
-                  <a:pt x="0" y="0"/>
-                </a:lnTo>
-                <a:close/>
-              </a:path>
-            </a:pathLst>
-          </a:custGeom>
-          <a:blipFill>
-            <a:blip r:embed="rId2"/>
-            <a:stretch>
-              <a:fillRect l="0" t="-80206" r="0" b="-94049"/>
-            </a:stretch>
-          </a:blipFill>
-        </p:spPr>
-      </p:sp>
-      <p:sp>
-        <p:nvSpPr>
-          <p:cNvPr name="TextBox 3" id="3"/>
+          <p:cNvPr name="TextBox 2" id="2"/>
           <p:cNvSpPr txBox="true"/>
           <p:nvPr/>
         </p:nvSpPr>
         <p:spPr>
           <a:xfrm rot="0">
-            <a:off x="3339778" y="2993072"/>
+            <a:off x="3460550" y="2774232"/>
             <a:ext cx="11608445" cy="1533535"/>
           </a:xfrm>
           <a:prstGeom prst="rect">
@@ -3154,14 +3117,14 @@
               </a:lnSpc>
             </a:pPr>
             <a:r>
-              <a:rPr lang="en-US" sz="8999" b="true">
+              <a:rPr lang="en-US" sz="8999">
                 <a:solidFill>
                   <a:srgbClr val="000000"/>
                 </a:solidFill>
-                <a:latin typeface="Lora Bold"/>
-                <a:ea typeface="Lora Bold"/>
-                <a:cs typeface="Lora Bold"/>
-                <a:sym typeface="Lora Bold"/>
+                <a:latin typeface="Lora"/>
+                <a:ea typeface="Lora"/>
+                <a:cs typeface="Lora"/>
+                <a:sym typeface="Lora"/>
               </a:rPr>
               <a:t>Etihad Airways </a:t>
             </a:r>
@@ -3170,13 +3133,13 @@
       </p:sp>
       <p:sp>
         <p:nvSpPr>
-          <p:cNvPr name="TextBox 4" id="4"/>
+          <p:cNvPr name="TextBox 3" id="3"/>
           <p:cNvSpPr txBox="true"/>
           <p:nvPr/>
         </p:nvSpPr>
         <p:spPr>
           <a:xfrm rot="0">
-            <a:off x="3339778" y="4585652"/>
+            <a:off x="3219005" y="4231567"/>
             <a:ext cx="11608445" cy="620393"/>
           </a:xfrm>
           <a:prstGeom prst="rect">
@@ -3211,13 +3174,13 @@
       </p:sp>
       <p:sp>
         <p:nvSpPr>
-          <p:cNvPr name="TextBox 5" id="5"/>
+          <p:cNvPr name="TextBox 4" id="4"/>
           <p:cNvSpPr txBox="true"/>
           <p:nvPr/>
         </p:nvSpPr>
         <p:spPr>
           <a:xfrm rot="0">
-            <a:off x="-2064395" y="7977821"/>
+            <a:off x="-2172328" y="7572548"/>
             <a:ext cx="11608445" cy="688973"/>
           </a:xfrm>
           <a:prstGeom prst="rect">
@@ -3236,14 +3199,14 @@
               </a:lnSpc>
             </a:pPr>
             <a:r>
-              <a:rPr lang="en-US" sz="4000" b="true">
+              <a:rPr lang="en-US" sz="4000">
                 <a:solidFill>
                   <a:srgbClr val="000000"/>
                 </a:solidFill>
-                <a:latin typeface="Lora Bold"/>
-                <a:ea typeface="Lora Bold"/>
-                <a:cs typeface="Lora Bold"/>
-                <a:sym typeface="Lora Bold"/>
+                <a:latin typeface="Lora"/>
+                <a:ea typeface="Lora"/>
+                <a:cs typeface="Lora"/>
+                <a:sym typeface="Lora"/>
               </a:rPr>
               <a:t>Beyond Borders Campaign </a:t>
             </a:r>
@@ -3252,14 +3215,14 @@
       </p:sp>
       <p:sp>
         <p:nvSpPr>
-          <p:cNvPr name="TextBox 6" id="6"/>
+          <p:cNvPr name="TextBox 5" id="5"/>
           <p:cNvSpPr txBox="true"/>
           <p:nvPr/>
         </p:nvSpPr>
         <p:spPr>
           <a:xfrm rot="0">
-            <a:off x="-3037781" y="9578658"/>
-            <a:ext cx="11608445" cy="379727"/>
+            <a:off x="-2502066" y="8334018"/>
+            <a:ext cx="11608445" cy="389252"/>
           </a:xfrm>
           <a:prstGeom prst="rect">
             <a:avLst/>
@@ -3291,6 +3254,52 @@
           </a:p>
         </p:txBody>
       </p:sp>
+      <p:sp>
+        <p:nvSpPr>
+          <p:cNvPr name="Freeform 6" id="6"/>
+          <p:cNvSpPr/>
+          <p:nvPr/>
+        </p:nvSpPr>
+        <p:spPr>
+          <a:xfrm flipH="true" flipV="false" rot="0">
+            <a:off x="-674622" y="8799471"/>
+            <a:ext cx="19542952" cy="1819270"/>
+          </a:xfrm>
+          <a:custGeom>
+            <a:avLst/>
+            <a:gdLst/>
+            <a:ahLst/>
+            <a:cxnLst/>
+            <a:rect r="r" b="b" t="t" l="l"/>
+            <a:pathLst>
+              <a:path h="1819270" w="19542952">
+                <a:moveTo>
+                  <a:pt x="19542952" y="0"/>
+                </a:moveTo>
+                <a:lnTo>
+                  <a:pt x="0" y="0"/>
+                </a:lnTo>
+                <a:lnTo>
+                  <a:pt x="0" y="1819270"/>
+                </a:lnTo>
+                <a:lnTo>
+                  <a:pt x="19542952" y="1819270"/>
+                </a:lnTo>
+                <a:lnTo>
+                  <a:pt x="19542952" y="0"/>
+                </a:lnTo>
+                <a:close/>
+              </a:path>
+            </a:pathLst>
+          </a:custGeom>
+          <a:blipFill>
+            <a:blip r:embed="rId2"/>
+            <a:stretch>
+              <a:fillRect l="0" t="-504248" r="0" b="0"/>
+            </a:stretch>
+          </a:blipFill>
+        </p:spPr>
+      </p:sp>
     </p:spTree>
   </p:cSld>
   <p:clrMapOvr>
@@ -3300,6 +3309,125 @@
 </file>
 
 <file path=ppt/slides/slide2.xml><?xml version="1.0" encoding="utf-8"?>
+<p:sld xmlns:p="http://schemas.openxmlformats.org/presentationml/2006/main" xmlns:a="http://schemas.openxmlformats.org/drawingml/2006/main" xmlns:r="http://schemas.openxmlformats.org/officeDocument/2006/relationships">
+  <p:cSld>
+    <p:bg>
+      <p:bgPr>
+        <a:solidFill>
+          <a:srgbClr val="F9F6F0"/>
+        </a:solidFill>
+      </p:bgPr>
+    </p:bg>
+    <p:spTree>
+      <p:nvGrpSpPr>
+        <p:cNvPr id="1" name=""/>
+        <p:cNvGrpSpPr/>
+        <p:nvPr/>
+      </p:nvGrpSpPr>
+      <p:grpSpPr>
+        <a:xfrm>
+          <a:off x="0" y="0"/>
+          <a:ext cx="0" cy="0"/>
+          <a:chOff x="0" y="0"/>
+          <a:chExt cx="0" cy="0"/>
+        </a:xfrm>
+      </p:grpSpPr>
+      <p:sp>
+        <p:nvSpPr>
+          <p:cNvPr name="TextBox 2" id="2"/>
+          <p:cNvSpPr txBox="true"/>
+          <p:nvPr/>
+        </p:nvSpPr>
+        <p:spPr>
+          <a:xfrm rot="0">
+            <a:off x="2454570" y="3479017"/>
+            <a:ext cx="12562107" cy="1664483"/>
+          </a:xfrm>
+          <a:prstGeom prst="rect">
+            <a:avLst/>
+          </a:prstGeom>
+        </p:spPr>
+        <p:txBody>
+          <a:bodyPr anchor="t" rtlCol="false" tIns="0" lIns="0" bIns="0" rIns="0">
+            <a:spAutoFit/>
+          </a:bodyPr>
+          <a:lstStyle/>
+          <a:p>
+            <a:pPr algn="ctr">
+              <a:lnSpc>
+                <a:spcPts val="13634"/>
+              </a:lnSpc>
+            </a:pPr>
+            <a:r>
+              <a:rPr lang="en-US" sz="9738">
+                <a:solidFill>
+                  <a:srgbClr val="000000"/>
+                </a:solidFill>
+                <a:latin typeface="Lora"/>
+                <a:ea typeface="Lora"/>
+                <a:cs typeface="Lora"/>
+                <a:sym typeface="Lora"/>
+              </a:rPr>
+              <a:t>United States</a:t>
+            </a:r>
+          </a:p>
+        </p:txBody>
+      </p:sp>
+      <p:sp>
+        <p:nvSpPr>
+          <p:cNvPr name="Freeform 3" id="3"/>
+          <p:cNvSpPr/>
+          <p:nvPr/>
+        </p:nvSpPr>
+        <p:spPr>
+          <a:xfrm flipH="true" flipV="false" rot="0">
+            <a:off x="-674622" y="8799471"/>
+            <a:ext cx="19542952" cy="1819270"/>
+          </a:xfrm>
+          <a:custGeom>
+            <a:avLst/>
+            <a:gdLst/>
+            <a:ahLst/>
+            <a:cxnLst/>
+            <a:rect r="r" b="b" t="t" l="l"/>
+            <a:pathLst>
+              <a:path h="1819270" w="19542952">
+                <a:moveTo>
+                  <a:pt x="19542952" y="0"/>
+                </a:moveTo>
+                <a:lnTo>
+                  <a:pt x="0" y="0"/>
+                </a:lnTo>
+                <a:lnTo>
+                  <a:pt x="0" y="1819270"/>
+                </a:lnTo>
+                <a:lnTo>
+                  <a:pt x="19542952" y="1819270"/>
+                </a:lnTo>
+                <a:lnTo>
+                  <a:pt x="19542952" y="0"/>
+                </a:lnTo>
+                <a:close/>
+              </a:path>
+            </a:pathLst>
+          </a:custGeom>
+          <a:blipFill>
+            <a:blip r:embed="rId2"/>
+            <a:stretch>
+              <a:fillRect l="0" t="-504248" r="0" b="0"/>
+            </a:stretch>
+          </a:blipFill>
+        </p:spPr>
+      </p:sp>
+    </p:spTree>
+  </p:cSld>
+  <p:clrMapOvr>
+    <a:masterClrMapping/>
+  </p:clrMapOvr>
+</p:sld>
+</file>
+
+<file path=ppt/slides/slide3.xml><?xml version="1.0" encoding="utf-8"?>
 <p:sld xmlns:p="http://schemas.openxmlformats.org/presentationml/2006/main" xmlns:a="http://schemas.openxmlformats.org/drawingml/2006/main" xmlns:r="http://schemas.openxmlformats.org/officeDocument/2006/relationships">
   <p:cSld>
     <p:bg>
@@ -3355,8 +3483,8 @@
         </p:nvSpPr>
         <p:spPr>
           <a:xfrm flipH="false" flipV="false" rot="0">
-            <a:off x="285905" y="1536381"/>
-            <a:ext cx="9625609" cy="4282883"/>
+            <a:off x="8291038" y="247015"/>
+            <a:ext cx="9996962" cy="7183492"/>
           </a:xfrm>
           <a:custGeom>
             <a:avLst/>
@@ -3365,18 +3493,18 @@
             <a:cxnLst/>
             <a:rect r="r" b="b" t="t" l="l"/>
             <a:pathLst>
-              <a:path h="4282883" w="9625609">
+              <a:path h="7183492" w="9996962">
                 <a:moveTo>
                   <a:pt x="0" y="0"/>
                 </a:moveTo>
                 <a:lnTo>
-                  <a:pt x="9625609" y="0"/>
+                  <a:pt x="9996962" y="0"/>
                 </a:lnTo>
                 <a:lnTo>
-                  <a:pt x="9625609" y="4282883"/>
+                  <a:pt x="9996962" y="7183492"/>
                 </a:lnTo>
                 <a:lnTo>
-                  <a:pt x="0" y="4282883"/>
+                  <a:pt x="0" y="7183492"/>
                 </a:lnTo>
                 <a:lnTo>
                   <a:pt x="0" y="0"/>
@@ -3388,7 +3516,7 @@
           <a:blipFill>
             <a:blip r:embed="rId2"/>
             <a:stretch>
-              <a:fillRect l="0" t="-22568" r="0" b="-30089"/>
+              <a:fillRect l="0" t="-22318" r="-32788" b="-3203"/>
             </a:stretch>
           </a:blipFill>
         </p:spPr>
@@ -3400,9 +3528,9 @@
           <p:nvPr/>
         </p:nvSpPr>
         <p:spPr>
-          <a:xfrm flipH="false" flipV="false" rot="0">
-            <a:off x="102579" y="6019289"/>
-            <a:ext cx="9625609" cy="1528065"/>
+          <a:xfrm flipH="true" flipV="false" rot="0">
+            <a:off x="-694355" y="9438672"/>
+            <a:ext cx="19542952" cy="1140581"/>
           </a:xfrm>
           <a:custGeom>
             <a:avLst/>
@@ -3411,21 +3539,21 @@
             <a:cxnLst/>
             <a:rect r="r" b="b" t="t" l="l"/>
             <a:pathLst>
-              <a:path h="1528065" w="9625609">
+              <a:path h="1140581" w="19542952">
                 <a:moveTo>
-                  <a:pt x="0" y="0"/>
+                  <a:pt x="19542952" y="0"/>
                 </a:moveTo>
                 <a:lnTo>
-                  <a:pt x="9625609" y="0"/>
+                  <a:pt x="0" y="0"/>
                 </a:lnTo>
                 <a:lnTo>
-                  <a:pt x="9625609" y="1528066"/>
+                  <a:pt x="0" y="1140581"/>
                 </a:lnTo>
                 <a:lnTo>
-                  <a:pt x="0" y="1528066"/>
+                  <a:pt x="19542952" y="1140581"/>
                 </a:lnTo>
                 <a:lnTo>
-                  <a:pt x="0" y="0"/>
+                  <a:pt x="19542952" y="0"/>
                 </a:lnTo>
                 <a:close/>
               </a:path>
@@ -3434,181 +3562,20 @@
           <a:blipFill>
             <a:blip r:embed="rId3"/>
             <a:stretch>
-              <a:fillRect l="0" t="0" r="0" b="0"/>
+              <a:fillRect l="0" t="-863799" r="0" b="0"/>
             </a:stretch>
           </a:blipFill>
         </p:spPr>
       </p:sp>
       <p:sp>
         <p:nvSpPr>
-          <p:cNvPr name="TextBox 5" id="5"/>
-          <p:cNvSpPr txBox="true"/>
-          <p:nvPr/>
-        </p:nvSpPr>
-        <p:spPr>
-          <a:xfrm rot="0">
-            <a:off x="7489493" y="347027"/>
-            <a:ext cx="3467276" cy="313689"/>
-          </a:xfrm>
-          <a:prstGeom prst="rect">
-            <a:avLst/>
-          </a:prstGeom>
-        </p:spPr>
-        <p:txBody>
-          <a:bodyPr anchor="t" rtlCol="false" tIns="0" lIns="0" bIns="0" rIns="0">
-            <a:spAutoFit/>
-          </a:bodyPr>
-          <a:lstStyle/>
-          <a:p>
-            <a:pPr algn="ctr">
-              <a:lnSpc>
-                <a:spcPts val="2660"/>
-              </a:lnSpc>
-            </a:pPr>
-            <a:r>
-              <a:rPr lang="en-US" b="true" sz="1900">
-                <a:solidFill>
-                  <a:srgbClr val="A12C2B"/>
-                </a:solidFill>
-                <a:latin typeface="Lora Bold"/>
-                <a:ea typeface="Lora Bold"/>
-                <a:cs typeface="Lora Bold"/>
-                <a:sym typeface="Lora Bold"/>
-              </a:rPr>
-              <a:t>Why this Site for X client</a:t>
-            </a:r>
-          </a:p>
-        </p:txBody>
-      </p:sp>
-      <p:sp>
-        <p:nvSpPr>
-          <p:cNvPr name="AutoShape 6" id="6"/>
+          <p:cNvPr name="AutoShape 5" id="5"/>
           <p:cNvSpPr/>
           <p:nvPr/>
         </p:nvSpPr>
         <p:spPr>
-          <a:xfrm flipH="true" flipV="true">
-            <a:off x="7651418" y="0"/>
-            <a:ext cx="4762" cy="1536381"/>
-          </a:xfrm>
-          <a:prstGeom prst="line">
-            <a:avLst/>
-          </a:prstGeom>
-          <a:ln cap="flat" w="9525">
-            <a:solidFill>
-              <a:srgbClr val="000000"/>
-            </a:solidFill>
-            <a:prstDash val="solid"/>
-            <a:headEnd type="none" len="sm" w="sm"/>
-            <a:tailEnd type="none" len="sm" w="sm"/>
-          </a:ln>
-        </p:spPr>
-      </p:sp>
-      <p:sp>
-        <p:nvSpPr>
-          <p:cNvPr name="AutoShape 7" id="7"/>
-          <p:cNvSpPr/>
-          <p:nvPr/>
-        </p:nvSpPr>
-        <p:spPr>
           <a:xfrm flipV="true">
-            <a:off x="331228" y="8213492"/>
-            <a:ext cx="0" cy="1918166"/>
-          </a:xfrm>
-          <a:prstGeom prst="line">
-            <a:avLst/>
-          </a:prstGeom>
-          <a:ln cap="flat" w="9525">
-            <a:solidFill>
-              <a:srgbClr val="998D89"/>
-            </a:solidFill>
-            <a:prstDash val="solid"/>
-            <a:headEnd type="none" len="sm" w="sm"/>
-            <a:tailEnd type="none" len="sm" w="sm"/>
-          </a:ln>
-        </p:spPr>
-      </p:sp>
-      <p:sp>
-        <p:nvSpPr>
-          <p:cNvPr name="AutoShape 8" id="8"/>
-          <p:cNvSpPr/>
-          <p:nvPr/>
-        </p:nvSpPr>
-        <p:spPr>
-          <a:xfrm flipV="true">
-            <a:off x="8153371" y="8213492"/>
-            <a:ext cx="0" cy="1918166"/>
-          </a:xfrm>
-          <a:prstGeom prst="line">
-            <a:avLst/>
-          </a:prstGeom>
-          <a:ln cap="flat" w="9525">
-            <a:solidFill>
-              <a:srgbClr val="998D89"/>
-            </a:solidFill>
-            <a:prstDash val="solid"/>
-            <a:headEnd type="none" len="sm" w="sm"/>
-            <a:tailEnd type="none" len="sm" w="sm"/>
-          </a:ln>
-        </p:spPr>
-      </p:sp>
-      <p:sp>
-        <p:nvSpPr>
-          <p:cNvPr name="AutoShape 9" id="9"/>
-          <p:cNvSpPr/>
-          <p:nvPr/>
-        </p:nvSpPr>
-        <p:spPr>
-          <a:xfrm flipH="true" flipV="true">
-            <a:off x="315327" y="8200116"/>
-            <a:ext cx="7842806" cy="13376"/>
-          </a:xfrm>
-          <a:prstGeom prst="line">
-            <a:avLst/>
-          </a:prstGeom>
-          <a:ln cap="flat" w="9525">
-            <a:solidFill>
-              <a:srgbClr val="998D89"/>
-            </a:solidFill>
-            <a:prstDash val="solid"/>
-            <a:headEnd type="none" len="sm" w="sm"/>
-            <a:tailEnd type="none" len="sm" w="sm"/>
-          </a:ln>
-        </p:spPr>
-      </p:sp>
-      <p:sp>
-        <p:nvSpPr>
-          <p:cNvPr name="AutoShape 10" id="10"/>
-          <p:cNvSpPr/>
-          <p:nvPr/>
-        </p:nvSpPr>
-        <p:spPr>
-          <a:xfrm flipH="true" flipV="true">
-            <a:off x="321706" y="10122133"/>
-            <a:ext cx="7836427" cy="9525"/>
-          </a:xfrm>
-          <a:prstGeom prst="line">
-            <a:avLst/>
-          </a:prstGeom>
-          <a:ln cap="flat" w="9525">
-            <a:solidFill>
-              <a:srgbClr val="998D89"/>
-            </a:solidFill>
-            <a:prstDash val="solid"/>
-            <a:headEnd type="none" len="sm" w="sm"/>
-            <a:tailEnd type="none" len="sm" w="sm"/>
-          </a:ln>
-        </p:spPr>
-      </p:sp>
-      <p:sp>
-        <p:nvSpPr>
-          <p:cNvPr name="AutoShape 11" id="11"/>
-          <p:cNvSpPr/>
-          <p:nvPr/>
-        </p:nvSpPr>
-        <p:spPr>
-          <a:xfrm flipH="true" flipV="true">
-            <a:off x="4277703" y="8900287"/>
+            <a:off x="2578156" y="8269006"/>
             <a:ext cx="0" cy="1040620"/>
           </a:xfrm>
           <a:prstGeom prst="line">
@@ -3626,62 +3593,14 @@
       </p:sp>
       <p:sp>
         <p:nvSpPr>
-          <p:cNvPr name="AutoShape 12" id="12"/>
-          <p:cNvSpPr/>
-          <p:nvPr/>
-        </p:nvSpPr>
-        <p:spPr>
-          <a:xfrm flipH="true">
-            <a:off x="9416486" y="8213492"/>
-            <a:ext cx="5886665" cy="4762"/>
-          </a:xfrm>
-          <a:prstGeom prst="line">
-            <a:avLst/>
-          </a:prstGeom>
-          <a:ln cap="flat" w="9525">
-            <a:solidFill>
-              <a:srgbClr val="998D89"/>
-            </a:solidFill>
-            <a:prstDash val="solid"/>
-            <a:headEnd type="none" len="sm" w="sm"/>
-            <a:tailEnd type="none" len="sm" w="sm"/>
-          </a:ln>
-        </p:spPr>
-      </p:sp>
-      <p:sp>
-        <p:nvSpPr>
-          <p:cNvPr name="AutoShape 13" id="13"/>
-          <p:cNvSpPr/>
-          <p:nvPr/>
-        </p:nvSpPr>
-        <p:spPr>
-          <a:xfrm flipH="true">
-            <a:off x="9422864" y="10131658"/>
-            <a:ext cx="5880286" cy="8613"/>
-          </a:xfrm>
-          <a:prstGeom prst="line">
-            <a:avLst/>
-          </a:prstGeom>
-          <a:ln cap="flat" w="9525">
-            <a:solidFill>
-              <a:srgbClr val="998D89"/>
-            </a:solidFill>
-            <a:prstDash val="solid"/>
-            <a:headEnd type="none" len="sm" w="sm"/>
-            <a:tailEnd type="none" len="sm" w="sm"/>
-          </a:ln>
-        </p:spPr>
-      </p:sp>
-      <p:sp>
-        <p:nvSpPr>
-          <p:cNvPr name="TextBox 14" id="14"/>
+          <p:cNvPr name="TextBox 6" id="6"/>
           <p:cNvSpPr txBox="true"/>
           <p:nvPr/>
         </p:nvSpPr>
         <p:spPr>
           <a:xfrm rot="0">
-            <a:off x="8393848" y="8334173"/>
-            <a:ext cx="4628806" cy="257174"/>
+            <a:off x="71369" y="7545114"/>
+            <a:ext cx="4628806" cy="306704"/>
           </a:xfrm>
           <a:prstGeom prst="rect">
             <a:avLst/>
@@ -3695,11 +3614,11 @@
           <a:p>
             <a:pPr algn="ctr">
               <a:lnSpc>
-                <a:spcPts val="2100"/>
+                <a:spcPts val="2520"/>
               </a:lnSpc>
             </a:pPr>
             <a:r>
-              <a:rPr lang="en-US" sz="1500" b="true">
+              <a:rPr lang="en-US" b="true" sz="1800">
                 <a:solidFill>
                   <a:srgbClr val="A12C2B"/>
                 </a:solidFill>
@@ -3708,353 +3627,769 @@
                 <a:cs typeface="Lora Bold"/>
                 <a:sym typeface="Lora Bold"/>
               </a:rPr>
-              <a:t>NEARBY LANDMARKS </a:t>
+              <a:t>TECHNICAL SPECIFICATIONS</a:t>
             </a:r>
           </a:p>
         </p:txBody>
       </p:sp>
-      <p:sp>
-        <p:nvSpPr>
-          <p:cNvPr name="TextBox 15" id="15"/>
-          <p:cNvSpPr txBox="true"/>
+      <p:grpSp>
+        <p:nvGrpSpPr>
+          <p:cNvPr name="Group 7" id="7"/>
+          <p:cNvGrpSpPr/>
           <p:nvPr/>
-        </p:nvSpPr>
-        <p:spPr>
+        </p:nvGrpSpPr>
+        <p:grpSpPr>
           <a:xfrm rot="0">
-            <a:off x="9981419" y="9272587"/>
-            <a:ext cx="5425471" cy="240664"/>
+            <a:off x="754572" y="8230306"/>
+            <a:ext cx="1771196" cy="1169666"/>
+            <a:chOff x="0" y="0"/>
+            <a:chExt cx="2361594" cy="1559555"/>
           </a:xfrm>
-          <a:prstGeom prst="rect">
-            <a:avLst/>
-          </a:prstGeom>
-        </p:spPr>
-        <p:txBody>
-          <a:bodyPr anchor="t" rtlCol="false" tIns="0" lIns="0" bIns="0" rIns="0">
-            <a:spAutoFit/>
-          </a:bodyPr>
-          <a:lstStyle/>
-          <a:p>
-            <a:pPr algn="l">
-              <a:lnSpc>
-                <a:spcPts val="1960"/>
-              </a:lnSpc>
-            </a:pPr>
-            <a:r>
-              <a:rPr lang="en-US" sz="1400" b="true">
-                <a:solidFill>
-                  <a:srgbClr val="000000"/>
-                </a:solidFill>
-                <a:latin typeface="Lora Bold"/>
-                <a:ea typeface="Lora Bold"/>
-                <a:cs typeface="Lora Bold"/>
-                <a:sym typeface="Lora Bold"/>
-              </a:rPr>
-              <a:t>Broadway - 100m </a:t>
-            </a:r>
-          </a:p>
-        </p:txBody>
-      </p:sp>
-      <p:sp>
-        <p:nvSpPr>
-          <p:cNvPr name="AutoShape 16" id="16"/>
-          <p:cNvSpPr/>
+        </p:grpSpPr>
+        <p:sp>
+          <p:nvSpPr>
+            <p:cNvPr name="TextBox 8" id="8"/>
+            <p:cNvSpPr txBox="true"/>
+            <p:nvPr/>
+          </p:nvSpPr>
+          <p:spPr>
+            <a:xfrm rot="0">
+              <a:off x="0" y="-28575"/>
+              <a:ext cx="2256628" cy="311360"/>
+            </a:xfrm>
+            <a:prstGeom prst="rect">
+              <a:avLst/>
+            </a:prstGeom>
+          </p:spPr>
+          <p:txBody>
+            <a:bodyPr anchor="t" rtlCol="false" tIns="0" lIns="0" bIns="0" rIns="0">
+              <a:spAutoFit/>
+            </a:bodyPr>
+            <a:lstStyle/>
+            <a:p>
+              <a:pPr algn="l">
+                <a:lnSpc>
+                  <a:spcPts val="1960"/>
+                </a:lnSpc>
+              </a:pPr>
+              <a:r>
+                <a:rPr lang="en-US" sz="1400" b="true">
+                  <a:solidFill>
+                    <a:srgbClr val="000000"/>
+                  </a:solidFill>
+                  <a:latin typeface="Lora Bold"/>
+                  <a:ea typeface="Lora Bold"/>
+                  <a:cs typeface="Lora Bold"/>
+                  <a:sym typeface="Lora Bold"/>
+                </a:rPr>
+                <a:t>FORMAT : Digital </a:t>
+              </a:r>
+            </a:p>
+          </p:txBody>
+        </p:sp>
+        <p:sp>
+          <p:nvSpPr>
+            <p:cNvPr name="TextBox 9" id="9"/>
+            <p:cNvSpPr txBox="true"/>
+            <p:nvPr/>
+          </p:nvSpPr>
+          <p:spPr>
+            <a:xfrm rot="0">
+              <a:off x="0" y="558210"/>
+              <a:ext cx="2361594" cy="311360"/>
+            </a:xfrm>
+            <a:prstGeom prst="rect">
+              <a:avLst/>
+            </a:prstGeom>
+          </p:spPr>
+          <p:txBody>
+            <a:bodyPr anchor="t" rtlCol="false" tIns="0" lIns="0" bIns="0" rIns="0">
+              <a:spAutoFit/>
+            </a:bodyPr>
+            <a:lstStyle/>
+            <a:p>
+              <a:pPr algn="l">
+                <a:lnSpc>
+                  <a:spcPts val="1960"/>
+                </a:lnSpc>
+              </a:pPr>
+              <a:r>
+                <a:rPr lang="en-US" sz="1400" b="true">
+                  <a:solidFill>
+                    <a:srgbClr val="000000"/>
+                  </a:solidFill>
+                  <a:latin typeface="Lora Bold"/>
+                  <a:ea typeface="Lora Bold"/>
+                  <a:cs typeface="Lora Bold"/>
+                  <a:sym typeface="Lora Bold"/>
+                </a:rPr>
+                <a:t>SIZE : 8 x 4 m </a:t>
+              </a:r>
+            </a:p>
+          </p:txBody>
+        </p:sp>
+        <p:sp>
+          <p:nvSpPr>
+            <p:cNvPr name="TextBox 10" id="10"/>
+            <p:cNvSpPr txBox="true"/>
+            <p:nvPr/>
+          </p:nvSpPr>
+          <p:spPr>
+            <a:xfrm rot="0">
+              <a:off x="0" y="1248195"/>
+              <a:ext cx="2221590" cy="311360"/>
+            </a:xfrm>
+            <a:prstGeom prst="rect">
+              <a:avLst/>
+            </a:prstGeom>
+          </p:spPr>
+          <p:txBody>
+            <a:bodyPr anchor="t" rtlCol="false" tIns="0" lIns="0" bIns="0" rIns="0">
+              <a:spAutoFit/>
+            </a:bodyPr>
+            <a:lstStyle/>
+            <a:p>
+              <a:pPr algn="l">
+                <a:lnSpc>
+                  <a:spcPts val="1960"/>
+                </a:lnSpc>
+              </a:pPr>
+              <a:r>
+                <a:rPr lang="en-US" sz="1400" b="true">
+                  <a:solidFill>
+                    <a:srgbClr val="000000"/>
+                  </a:solidFill>
+                  <a:latin typeface="Lora Bold"/>
+                  <a:ea typeface="Lora Bold"/>
+                  <a:cs typeface="Lora Bold"/>
+                  <a:sym typeface="Lora Bold"/>
+                </a:rPr>
+                <a:t>UNITS : 4 </a:t>
+              </a:r>
+            </a:p>
+          </p:txBody>
+        </p:sp>
+      </p:grpSp>
+      <p:grpSp>
+        <p:nvGrpSpPr>
+          <p:cNvPr name="Group 11" id="11"/>
+          <p:cNvGrpSpPr/>
           <p:nvPr/>
-        </p:nvSpPr>
-        <p:spPr>
-          <a:xfrm flipV="true">
-            <a:off x="9436680" y="8200116"/>
-            <a:ext cx="0" cy="1918166"/>
+        </p:nvGrpSpPr>
+        <p:grpSpPr>
+          <a:xfrm rot="0">
+            <a:off x="2844997" y="8259550"/>
+            <a:ext cx="3710357" cy="1111178"/>
+            <a:chOff x="0" y="0"/>
+            <a:chExt cx="4947143" cy="1481571"/>
           </a:xfrm>
-          <a:prstGeom prst="line">
-            <a:avLst/>
-          </a:prstGeom>
-          <a:ln cap="flat" w="9525">
-            <a:solidFill>
-              <a:srgbClr val="998D89"/>
-            </a:solidFill>
-            <a:prstDash val="solid"/>
-            <a:headEnd type="none" len="sm" w="sm"/>
-            <a:tailEnd type="none" len="sm" w="sm"/>
-          </a:ln>
-        </p:spPr>
-      </p:sp>
-      <p:sp>
-        <p:nvSpPr>
-          <p:cNvPr name="AutoShape 17" id="17"/>
-          <p:cNvSpPr/>
+        </p:grpSpPr>
+        <p:sp>
+          <p:nvSpPr>
+            <p:cNvPr name="TextBox 12" id="12"/>
+            <p:cNvSpPr txBox="true"/>
+            <p:nvPr/>
+          </p:nvSpPr>
+          <p:spPr>
+            <a:xfrm rot="0">
+              <a:off x="10044" y="-28575"/>
+              <a:ext cx="4668564" cy="311360"/>
+            </a:xfrm>
+            <a:prstGeom prst="rect">
+              <a:avLst/>
+            </a:prstGeom>
+          </p:spPr>
+          <p:txBody>
+            <a:bodyPr anchor="t" rtlCol="false" tIns="0" lIns="0" bIns="0" rIns="0">
+              <a:spAutoFit/>
+            </a:bodyPr>
+            <a:lstStyle/>
+            <a:p>
+              <a:pPr algn="l">
+                <a:lnSpc>
+                  <a:spcPts val="1960"/>
+                </a:lnSpc>
+              </a:pPr>
+              <a:r>
+                <a:rPr lang="en-US" sz="1400" b="true">
+                  <a:solidFill>
+                    <a:srgbClr val="000000"/>
+                  </a:solidFill>
+                  <a:latin typeface="Lora Bold"/>
+                  <a:ea typeface="Lora Bold"/>
+                  <a:cs typeface="Lora Bold"/>
+                  <a:sym typeface="Lora Bold"/>
+                </a:rPr>
+                <a:t>SPOT LENGTH : 10 seconds </a:t>
+              </a:r>
+            </a:p>
+          </p:txBody>
+        </p:sp>
+        <p:sp>
+          <p:nvSpPr>
+            <p:cNvPr name="TextBox 13" id="13"/>
+            <p:cNvSpPr txBox="true"/>
+            <p:nvPr/>
+          </p:nvSpPr>
+          <p:spPr>
+            <a:xfrm rot="0">
+              <a:off x="0" y="569926"/>
+              <a:ext cx="4688651" cy="311360"/>
+            </a:xfrm>
+            <a:prstGeom prst="rect">
+              <a:avLst/>
+            </a:prstGeom>
+          </p:spPr>
+          <p:txBody>
+            <a:bodyPr anchor="t" rtlCol="false" tIns="0" lIns="0" bIns="0" rIns="0">
+              <a:spAutoFit/>
+            </a:bodyPr>
+            <a:lstStyle/>
+            <a:p>
+              <a:pPr algn="l">
+                <a:lnSpc>
+                  <a:spcPts val="1960"/>
+                </a:lnSpc>
+              </a:pPr>
+              <a:r>
+                <a:rPr lang="en-US" sz="1400" b="true">
+                  <a:solidFill>
+                    <a:srgbClr val="000000"/>
+                  </a:solidFill>
+                  <a:latin typeface="Lora Bold"/>
+                  <a:ea typeface="Lora Bold"/>
+                  <a:cs typeface="Lora Bold"/>
+                  <a:sym typeface="Lora Bold"/>
+                </a:rPr>
+                <a:t>FREQUENCY : 20%</a:t>
+              </a:r>
+            </a:p>
+          </p:txBody>
+        </p:sp>
+        <p:sp>
+          <p:nvSpPr>
+            <p:cNvPr name="TextBox 14" id="14"/>
+            <p:cNvSpPr txBox="true"/>
+            <p:nvPr/>
+          </p:nvSpPr>
+          <p:spPr>
+            <a:xfrm rot="0">
+              <a:off x="0" y="1170211"/>
+              <a:ext cx="4947143" cy="311360"/>
+            </a:xfrm>
+            <a:prstGeom prst="rect">
+              <a:avLst/>
+            </a:prstGeom>
+          </p:spPr>
+          <p:txBody>
+            <a:bodyPr anchor="t" rtlCol="false" tIns="0" lIns="0" bIns="0" rIns="0">
+              <a:spAutoFit/>
+            </a:bodyPr>
+            <a:lstStyle/>
+            <a:p>
+              <a:pPr algn="l">
+                <a:lnSpc>
+                  <a:spcPts val="1960"/>
+                </a:lnSpc>
+              </a:pPr>
+              <a:r>
+                <a:rPr lang="en-US" sz="1400" b="true">
+                  <a:solidFill>
+                    <a:srgbClr val="000000"/>
+                  </a:solidFill>
+                  <a:latin typeface="Lora Bold"/>
+                  <a:ea typeface="Lora Bold"/>
+                  <a:cs typeface="Lora Bold"/>
+                  <a:sym typeface="Lora Bold"/>
+                </a:rPr>
+                <a:t>TRAFFIC : 2,000,000 monthly </a:t>
+              </a:r>
+            </a:p>
+          </p:txBody>
+        </p:sp>
+      </p:grpSp>
+      <p:grpSp>
+        <p:nvGrpSpPr>
+          <p:cNvPr name="Group 15" id="15"/>
+          <p:cNvGrpSpPr/>
           <p:nvPr/>
-        </p:nvSpPr>
-        <p:spPr>
-          <a:xfrm flipV="true">
-            <a:off x="15303150" y="8213492"/>
-            <a:ext cx="0" cy="1918166"/>
+        </p:nvGrpSpPr>
+        <p:grpSpPr>
+          <a:xfrm rot="0">
+            <a:off x="11531521" y="7851818"/>
+            <a:ext cx="7013042" cy="1949680"/>
+            <a:chOff x="0" y="0"/>
+            <a:chExt cx="9350723" cy="2599574"/>
           </a:xfrm>
-          <a:prstGeom prst="line">
-            <a:avLst/>
-          </a:prstGeom>
-          <a:ln cap="flat" w="9525">
-            <a:solidFill>
-              <a:srgbClr val="998D89"/>
-            </a:solidFill>
-            <a:prstDash val="solid"/>
-            <a:headEnd type="none" len="sm" w="sm"/>
-            <a:tailEnd type="none" len="sm" w="sm"/>
-          </a:ln>
-        </p:spPr>
-      </p:sp>
-      <p:sp>
-        <p:nvSpPr>
-          <p:cNvPr name="Freeform 18" id="18"/>
-          <p:cNvSpPr/>
-          <p:nvPr/>
-        </p:nvSpPr>
-        <p:spPr>
-          <a:xfrm flipH="false" flipV="false" rot="0">
-            <a:off x="9575290" y="8800897"/>
-            <a:ext cx="216126" cy="311534"/>
-          </a:xfrm>
-          <a:custGeom>
-            <a:avLst/>
-            <a:gdLst/>
-            <a:ahLst/>
-            <a:cxnLst/>
-            <a:rect r="r" b="b" t="t" l="l"/>
-            <a:pathLst>
-              <a:path h="311534" w="216126">
-                <a:moveTo>
-                  <a:pt x="0" y="0"/>
-                </a:moveTo>
-                <a:lnTo>
-                  <a:pt x="216127" y="0"/>
-                </a:lnTo>
-                <a:lnTo>
-                  <a:pt x="216127" y="311533"/>
-                </a:lnTo>
-                <a:lnTo>
-                  <a:pt x="0" y="311533"/>
-                </a:lnTo>
-                <a:lnTo>
-                  <a:pt x="0" y="0"/>
-                </a:lnTo>
-                <a:close/>
-              </a:path>
-            </a:pathLst>
-          </a:custGeom>
-          <a:blipFill>
-            <a:blip r:embed="rId4">
-              <a:extLst>
-                <a:ext uri="{96DAC541-7B7A-43D3-8B79-37D633B846F1}">
-                  <asvg:svgBlip xmlns:asvg="http://schemas.microsoft.com/office/drawing/2016/SVG/main" r:embed="rId5"/>
-                </a:ext>
-              </a:extLst>
-            </a:blip>
-            <a:stretch>
-              <a:fillRect l="0" t="0" r="0" b="0"/>
-            </a:stretch>
-          </a:blipFill>
-        </p:spPr>
-      </p:sp>
-      <p:sp>
-        <p:nvSpPr>
-          <p:cNvPr name="Freeform 19" id="19"/>
-          <p:cNvSpPr/>
-          <p:nvPr/>
-        </p:nvSpPr>
-        <p:spPr>
-          <a:xfrm flipH="false" flipV="false" rot="0">
-            <a:off x="9603368" y="9310068"/>
-            <a:ext cx="216126" cy="311534"/>
-          </a:xfrm>
-          <a:custGeom>
-            <a:avLst/>
-            <a:gdLst/>
-            <a:ahLst/>
-            <a:cxnLst/>
-            <a:rect r="r" b="b" t="t" l="l"/>
-            <a:pathLst>
-              <a:path h="311534" w="216126">
-                <a:moveTo>
-                  <a:pt x="0" y="0"/>
-                </a:moveTo>
-                <a:lnTo>
-                  <a:pt x="216126" y="0"/>
-                </a:lnTo>
-                <a:lnTo>
-                  <a:pt x="216126" y="311534"/>
-                </a:lnTo>
-                <a:lnTo>
-                  <a:pt x="0" y="311534"/>
-                </a:lnTo>
-                <a:lnTo>
-                  <a:pt x="0" y="0"/>
-                </a:lnTo>
-                <a:close/>
-              </a:path>
-            </a:pathLst>
-          </a:custGeom>
-          <a:blipFill>
-            <a:blip r:embed="rId4">
-              <a:extLst>
-                <a:ext uri="{96DAC541-7B7A-43D3-8B79-37D633B846F1}">
-                  <asvg:svgBlip xmlns:asvg="http://schemas.microsoft.com/office/drawing/2016/SVG/main" r:embed="rId5"/>
-                </a:ext>
-              </a:extLst>
-            </a:blip>
-            <a:stretch>
-              <a:fillRect l="0" t="0" r="0" b="0"/>
-            </a:stretch>
-          </a:blipFill>
-        </p:spPr>
-      </p:sp>
-      <p:sp>
-        <p:nvSpPr>
-          <p:cNvPr name="Freeform 20" id="20"/>
-          <p:cNvSpPr/>
-          <p:nvPr/>
-        </p:nvSpPr>
-        <p:spPr>
-          <a:xfrm flipH="false" flipV="false" rot="0">
-            <a:off x="9656253" y="9785141"/>
-            <a:ext cx="216126" cy="311534"/>
-          </a:xfrm>
-          <a:custGeom>
-            <a:avLst/>
-            <a:gdLst/>
-            <a:ahLst/>
-            <a:cxnLst/>
-            <a:rect r="r" b="b" t="t" l="l"/>
-            <a:pathLst>
-              <a:path h="311534" w="216126">
-                <a:moveTo>
-                  <a:pt x="0" y="0"/>
-                </a:moveTo>
-                <a:lnTo>
-                  <a:pt x="216126" y="0"/>
-                </a:lnTo>
-                <a:lnTo>
-                  <a:pt x="216126" y="311533"/>
-                </a:lnTo>
-                <a:lnTo>
-                  <a:pt x="0" y="311533"/>
-                </a:lnTo>
-                <a:lnTo>
-                  <a:pt x="0" y="0"/>
-                </a:lnTo>
-                <a:close/>
-              </a:path>
-            </a:pathLst>
-          </a:custGeom>
-          <a:blipFill>
-            <a:blip r:embed="rId4">
-              <a:extLst>
-                <a:ext uri="{96DAC541-7B7A-43D3-8B79-37D633B846F1}">
-                  <asvg:svgBlip xmlns:asvg="http://schemas.microsoft.com/office/drawing/2016/SVG/main" r:embed="rId5"/>
-                </a:ext>
-              </a:extLst>
-            </a:blip>
-            <a:stretch>
-              <a:fillRect l="0" t="0" r="0" b="0"/>
-            </a:stretch>
-          </a:blipFill>
-        </p:spPr>
-      </p:sp>
-      <p:sp>
-        <p:nvSpPr>
-          <p:cNvPr name="AutoShape 21" id="21"/>
-          <p:cNvSpPr/>
-          <p:nvPr/>
-        </p:nvSpPr>
-        <p:spPr>
-          <a:xfrm flipH="true" flipV="true">
-            <a:off x="9944322" y="9153954"/>
-            <a:ext cx="5358828" cy="18621"/>
-          </a:xfrm>
-          <a:prstGeom prst="line">
-            <a:avLst/>
-          </a:prstGeom>
-          <a:ln cap="flat" w="9525">
-            <a:solidFill>
-              <a:srgbClr val="998D89"/>
-            </a:solidFill>
-            <a:prstDash val="solid"/>
-            <a:headEnd type="none" len="sm" w="sm"/>
-            <a:tailEnd type="none" len="sm" w="sm"/>
-          </a:ln>
-        </p:spPr>
-      </p:sp>
-      <p:sp>
-        <p:nvSpPr>
-          <p:cNvPr name="AutoShape 22" id="22"/>
-          <p:cNvSpPr/>
-          <p:nvPr/>
-        </p:nvSpPr>
-        <p:spPr>
-          <a:xfrm flipH="true" flipV="true">
-            <a:off x="9931862" y="9667868"/>
-            <a:ext cx="5358828" cy="18621"/>
-          </a:xfrm>
-          <a:prstGeom prst="line">
-            <a:avLst/>
-          </a:prstGeom>
-          <a:ln cap="flat" w="9525">
-            <a:solidFill>
-              <a:srgbClr val="998D89"/>
-            </a:solidFill>
-            <a:prstDash val="solid"/>
-            <a:headEnd type="none" len="sm" w="sm"/>
-            <a:tailEnd type="none" len="sm" w="sm"/>
-          </a:ln>
-        </p:spPr>
-      </p:sp>
-      <p:sp>
-        <p:nvSpPr>
-          <p:cNvPr name="Freeform 23" id="23"/>
-          <p:cNvSpPr/>
-          <p:nvPr/>
-        </p:nvSpPr>
-        <p:spPr>
-          <a:xfrm flipH="false" flipV="false" rot="0">
-            <a:off x="15809583" y="-672071"/>
-            <a:ext cx="2708934" cy="2587032"/>
-          </a:xfrm>
-          <a:custGeom>
-            <a:avLst/>
-            <a:gdLst/>
-            <a:ahLst/>
-            <a:cxnLst/>
-            <a:rect r="r" b="b" t="t" l="l"/>
-            <a:pathLst>
-              <a:path h="2587032" w="2708934">
-                <a:moveTo>
-                  <a:pt x="0" y="0"/>
-                </a:moveTo>
-                <a:lnTo>
-                  <a:pt x="2708934" y="0"/>
-                </a:lnTo>
-                <a:lnTo>
-                  <a:pt x="2708934" y="2587033"/>
-                </a:lnTo>
-                <a:lnTo>
-                  <a:pt x="0" y="2587033"/>
-                </a:lnTo>
-                <a:lnTo>
-                  <a:pt x="0" y="0"/>
-                </a:lnTo>
-                <a:close/>
-              </a:path>
-            </a:pathLst>
-          </a:custGeom>
-          <a:blipFill>
-            <a:blip r:embed="rId6"/>
-            <a:stretch>
-              <a:fillRect l="0" t="0" r="0" b="0"/>
-            </a:stretch>
-          </a:blipFill>
-        </p:spPr>
-      </p:sp>
-      <p:sp>
-        <p:nvSpPr>
-          <p:cNvPr name="TextBox 24" id="24"/>
+        </p:grpSpPr>
+        <p:sp>
+          <p:nvSpPr>
+            <p:cNvPr name="AutoShape 16" id="16"/>
+            <p:cNvSpPr/>
+            <p:nvPr/>
+          </p:nvSpPr>
+          <p:spPr>
+            <a:xfrm flipH="true" flipV="true">
+              <a:off x="1363517" y="24184"/>
+              <a:ext cx="4634722" cy="11484"/>
+            </a:xfrm>
+            <a:prstGeom prst="line">
+              <a:avLst/>
+            </a:prstGeom>
+            <a:ln cap="flat" w="12700">
+              <a:solidFill>
+                <a:srgbClr val="998D89"/>
+              </a:solidFill>
+              <a:prstDash val="solid"/>
+              <a:headEnd type="none" len="sm" w="sm"/>
+              <a:tailEnd type="none" len="sm" w="sm"/>
+            </a:ln>
+          </p:spPr>
+        </p:sp>
+        <p:sp>
+          <p:nvSpPr>
+            <p:cNvPr name="AutoShape 17" id="17"/>
+            <p:cNvSpPr/>
+            <p:nvPr/>
+          </p:nvSpPr>
+          <p:spPr>
+            <a:xfrm flipH="true" flipV="true">
+              <a:off x="1372021" y="2586874"/>
+              <a:ext cx="4626217" cy="6350"/>
+            </a:xfrm>
+            <a:prstGeom prst="line">
+              <a:avLst/>
+            </a:prstGeom>
+            <a:ln cap="flat" w="12700">
+              <a:solidFill>
+                <a:srgbClr val="998D89"/>
+              </a:solidFill>
+              <a:prstDash val="solid"/>
+              <a:headEnd type="none" len="sm" w="sm"/>
+              <a:tailEnd type="none" len="sm" w="sm"/>
+            </a:ln>
+          </p:spPr>
+        </p:sp>
+        <p:sp>
+          <p:nvSpPr>
+            <p:cNvPr name="TextBox 18" id="18"/>
+            <p:cNvSpPr txBox="true"/>
+            <p:nvPr/>
+          </p:nvSpPr>
+          <p:spPr>
+            <a:xfrm rot="0">
+              <a:off x="0" y="188267"/>
+              <a:ext cx="6171741" cy="333373"/>
+            </a:xfrm>
+            <a:prstGeom prst="rect">
+              <a:avLst/>
+            </a:prstGeom>
+          </p:spPr>
+          <p:txBody>
+            <a:bodyPr anchor="t" rtlCol="false" tIns="0" lIns="0" bIns="0" rIns="0">
+              <a:spAutoFit/>
+            </a:bodyPr>
+            <a:lstStyle/>
+            <a:p>
+              <a:pPr algn="ctr">
+                <a:lnSpc>
+                  <a:spcPts val="2100"/>
+                </a:lnSpc>
+              </a:pPr>
+              <a:r>
+                <a:rPr lang="en-US" sz="1500" b="true">
+                  <a:solidFill>
+                    <a:srgbClr val="A12C2B"/>
+                  </a:solidFill>
+                  <a:latin typeface="Lora Bold"/>
+                  <a:ea typeface="Lora Bold"/>
+                  <a:cs typeface="Lora Bold"/>
+                  <a:sym typeface="Lora Bold"/>
+                </a:rPr>
+                <a:t>NEARBY LANDMARKS </a:t>
+              </a:r>
+            </a:p>
+          </p:txBody>
+        </p:sp>
+        <p:sp>
+          <p:nvSpPr>
+            <p:cNvPr name="TextBox 19" id="19"/>
+            <p:cNvSpPr txBox="true"/>
+            <p:nvPr/>
+          </p:nvSpPr>
+          <p:spPr>
+            <a:xfrm rot="0">
+              <a:off x="2116761" y="1439487"/>
+              <a:ext cx="7233962" cy="311360"/>
+            </a:xfrm>
+            <a:prstGeom prst="rect">
+              <a:avLst/>
+            </a:prstGeom>
+          </p:spPr>
+          <p:txBody>
+            <a:bodyPr anchor="t" rtlCol="false" tIns="0" lIns="0" bIns="0" rIns="0">
+              <a:spAutoFit/>
+            </a:bodyPr>
+            <a:lstStyle/>
+            <a:p>
+              <a:pPr algn="l">
+                <a:lnSpc>
+                  <a:spcPts val="1960"/>
+                </a:lnSpc>
+              </a:pPr>
+              <a:r>
+                <a:rPr lang="en-US" sz="1400" b="true">
+                  <a:solidFill>
+                    <a:srgbClr val="000000"/>
+                  </a:solidFill>
+                  <a:latin typeface="Lora Bold"/>
+                  <a:ea typeface="Lora Bold"/>
+                  <a:cs typeface="Lora Bold"/>
+                  <a:sym typeface="Lora Bold"/>
+                </a:rPr>
+                <a:t>Broadway - 100m </a:t>
+              </a:r>
+            </a:p>
+          </p:txBody>
+        </p:sp>
+        <p:sp>
+          <p:nvSpPr>
+            <p:cNvPr name="AutoShape 20" id="20"/>
+            <p:cNvSpPr/>
+            <p:nvPr/>
+          </p:nvSpPr>
+          <p:spPr>
+            <a:xfrm flipV="true">
+              <a:off x="1390443" y="0"/>
+              <a:ext cx="0" cy="2557555"/>
+            </a:xfrm>
+            <a:prstGeom prst="line">
+              <a:avLst/>
+            </a:prstGeom>
+            <a:ln cap="flat" w="12700">
+              <a:solidFill>
+                <a:srgbClr val="998D89"/>
+              </a:solidFill>
+              <a:prstDash val="solid"/>
+              <a:headEnd type="none" len="sm" w="sm"/>
+              <a:tailEnd type="none" len="sm" w="sm"/>
+            </a:ln>
+          </p:spPr>
+        </p:sp>
+        <p:sp>
+          <p:nvSpPr>
+            <p:cNvPr name="AutoShape 21" id="21"/>
+            <p:cNvSpPr/>
+            <p:nvPr/>
+          </p:nvSpPr>
+          <p:spPr>
+            <a:xfrm flipV="true">
+              <a:off x="5998238" y="35669"/>
+              <a:ext cx="0" cy="2557555"/>
+            </a:xfrm>
+            <a:prstGeom prst="line">
+              <a:avLst/>
+            </a:prstGeom>
+            <a:ln cap="flat" w="12700">
+              <a:solidFill>
+                <a:srgbClr val="998D89"/>
+              </a:solidFill>
+              <a:prstDash val="solid"/>
+              <a:headEnd type="none" len="sm" w="sm"/>
+              <a:tailEnd type="none" len="sm" w="sm"/>
+            </a:ln>
+          </p:spPr>
+        </p:sp>
+        <p:sp>
+          <p:nvSpPr>
+            <p:cNvPr name="Freeform 22" id="22"/>
+            <p:cNvSpPr/>
+            <p:nvPr/>
+          </p:nvSpPr>
+          <p:spPr>
+            <a:xfrm flipH="false" flipV="false" rot="0">
+              <a:off x="1575256" y="801041"/>
+              <a:ext cx="288169" cy="415378"/>
+            </a:xfrm>
+            <a:custGeom>
+              <a:avLst/>
+              <a:gdLst/>
+              <a:ahLst/>
+              <a:cxnLst/>
+              <a:rect r="r" b="b" t="t" l="l"/>
+              <a:pathLst>
+                <a:path h="415378" w="288169">
+                  <a:moveTo>
+                    <a:pt x="0" y="0"/>
+                  </a:moveTo>
+                  <a:lnTo>
+                    <a:pt x="288168" y="0"/>
+                  </a:lnTo>
+                  <a:lnTo>
+                    <a:pt x="288168" y="415378"/>
+                  </a:lnTo>
+                  <a:lnTo>
+                    <a:pt x="0" y="415378"/>
+                  </a:lnTo>
+                  <a:lnTo>
+                    <a:pt x="0" y="0"/>
+                  </a:lnTo>
+                  <a:close/>
+                </a:path>
+              </a:pathLst>
+            </a:custGeom>
+            <a:blipFill>
+              <a:blip r:embed="rId4">
+                <a:extLst>
+                  <a:ext uri="{96DAC541-7B7A-43D3-8B79-37D633B846F1}">
+                    <asvg:svgBlip xmlns:asvg="http://schemas.microsoft.com/office/drawing/2016/SVG/main" r:embed="rId5"/>
+                  </a:ext>
+                </a:extLst>
+              </a:blip>
+              <a:stretch>
+                <a:fillRect l="0" t="0" r="0" b="0"/>
+              </a:stretch>
+            </a:blipFill>
+          </p:spPr>
+        </p:sp>
+        <p:sp>
+          <p:nvSpPr>
+            <p:cNvPr name="Freeform 23" id="23"/>
+            <p:cNvSpPr/>
+            <p:nvPr/>
+          </p:nvSpPr>
+          <p:spPr>
+            <a:xfrm flipH="false" flipV="false" rot="0">
+              <a:off x="1612693" y="1444503"/>
+              <a:ext cx="288169" cy="415378"/>
+            </a:xfrm>
+            <a:custGeom>
+              <a:avLst/>
+              <a:gdLst/>
+              <a:ahLst/>
+              <a:cxnLst/>
+              <a:rect r="r" b="b" t="t" l="l"/>
+              <a:pathLst>
+                <a:path h="415378" w="288169">
+                  <a:moveTo>
+                    <a:pt x="0" y="0"/>
+                  </a:moveTo>
+                  <a:lnTo>
+                    <a:pt x="288168" y="0"/>
+                  </a:lnTo>
+                  <a:lnTo>
+                    <a:pt x="288168" y="415378"/>
+                  </a:lnTo>
+                  <a:lnTo>
+                    <a:pt x="0" y="415378"/>
+                  </a:lnTo>
+                  <a:lnTo>
+                    <a:pt x="0" y="0"/>
+                  </a:lnTo>
+                  <a:close/>
+                </a:path>
+              </a:pathLst>
+            </a:custGeom>
+            <a:blipFill>
+              <a:blip r:embed="rId4">
+                <a:extLst>
+                  <a:ext uri="{96DAC541-7B7A-43D3-8B79-37D633B846F1}">
+                    <asvg:svgBlip xmlns:asvg="http://schemas.microsoft.com/office/drawing/2016/SVG/main" r:embed="rId5"/>
+                  </a:ext>
+                </a:extLst>
+              </a:blip>
+              <a:stretch>
+                <a:fillRect l="0" t="0" r="0" b="0"/>
+              </a:stretch>
+            </a:blipFill>
+          </p:spPr>
+        </p:sp>
+        <p:sp>
+          <p:nvSpPr>
+            <p:cNvPr name="Freeform 24" id="24"/>
+            <p:cNvSpPr/>
+            <p:nvPr/>
+          </p:nvSpPr>
+          <p:spPr>
+            <a:xfrm flipH="false" flipV="false" rot="0">
+              <a:off x="1645106" y="2113366"/>
+              <a:ext cx="288169" cy="415378"/>
+            </a:xfrm>
+            <a:custGeom>
+              <a:avLst/>
+              <a:gdLst/>
+              <a:ahLst/>
+              <a:cxnLst/>
+              <a:rect r="r" b="b" t="t" l="l"/>
+              <a:pathLst>
+                <a:path h="415378" w="288169">
+                  <a:moveTo>
+                    <a:pt x="0" y="0"/>
+                  </a:moveTo>
+                  <a:lnTo>
+                    <a:pt x="288168" y="0"/>
+                  </a:lnTo>
+                  <a:lnTo>
+                    <a:pt x="288168" y="415378"/>
+                  </a:lnTo>
+                  <a:lnTo>
+                    <a:pt x="0" y="415378"/>
+                  </a:lnTo>
+                  <a:lnTo>
+                    <a:pt x="0" y="0"/>
+                  </a:lnTo>
+                  <a:close/>
+                </a:path>
+              </a:pathLst>
+            </a:custGeom>
+            <a:blipFill>
+              <a:blip r:embed="rId4">
+                <a:extLst>
+                  <a:ext uri="{96DAC541-7B7A-43D3-8B79-37D633B846F1}">
+                    <asvg:svgBlip xmlns:asvg="http://schemas.microsoft.com/office/drawing/2016/SVG/main" r:embed="rId5"/>
+                  </a:ext>
+                </a:extLst>
+              </a:blip>
+              <a:stretch>
+                <a:fillRect l="0" t="0" r="0" b="0"/>
+              </a:stretch>
+            </a:blipFill>
+          </p:spPr>
+        </p:sp>
+        <p:sp>
+          <p:nvSpPr>
+            <p:cNvPr name="AutoShape 25" id="25"/>
+            <p:cNvSpPr/>
+            <p:nvPr/>
+          </p:nvSpPr>
+          <p:spPr>
+            <a:xfrm flipH="true">
+              <a:off x="2067299" y="1271784"/>
+              <a:ext cx="3990464" cy="0"/>
+            </a:xfrm>
+            <a:prstGeom prst="line">
+              <a:avLst/>
+            </a:prstGeom>
+            <a:ln cap="flat" w="12700">
+              <a:solidFill>
+                <a:srgbClr val="998D89"/>
+              </a:solidFill>
+              <a:prstDash val="solid"/>
+              <a:headEnd type="none" len="sm" w="sm"/>
+              <a:tailEnd type="none" len="sm" w="sm"/>
+            </a:ln>
+          </p:spPr>
+        </p:sp>
+        <p:sp>
+          <p:nvSpPr>
+            <p:cNvPr name="AutoShape 26" id="26"/>
+            <p:cNvSpPr/>
+            <p:nvPr/>
+          </p:nvSpPr>
+          <p:spPr>
+            <a:xfrm flipH="true" flipV="true">
+              <a:off x="2050685" y="1957003"/>
+              <a:ext cx="3947554" cy="0"/>
+            </a:xfrm>
+            <a:prstGeom prst="line">
+              <a:avLst/>
+            </a:prstGeom>
+            <a:ln cap="flat" w="12700">
+              <a:solidFill>
+                <a:srgbClr val="998D89"/>
+              </a:solidFill>
+              <a:prstDash val="solid"/>
+              <a:headEnd type="none" len="sm" w="sm"/>
+              <a:tailEnd type="none" len="sm" w="sm"/>
+            </a:ln>
+          </p:spPr>
+        </p:sp>
+        <p:sp>
+          <p:nvSpPr>
+            <p:cNvPr name="TextBox 27" id="27"/>
+            <p:cNvSpPr txBox="true"/>
+            <p:nvPr/>
+          </p:nvSpPr>
+          <p:spPr>
+            <a:xfrm rot="0">
+              <a:off x="2067288" y="763666"/>
+              <a:ext cx="5756269" cy="311360"/>
+            </a:xfrm>
+            <a:prstGeom prst="rect">
+              <a:avLst/>
+            </a:prstGeom>
+          </p:spPr>
+          <p:txBody>
+            <a:bodyPr anchor="t" rtlCol="false" tIns="0" lIns="0" bIns="0" rIns="0">
+              <a:spAutoFit/>
+            </a:bodyPr>
+            <a:lstStyle/>
+            <a:p>
+              <a:pPr algn="l">
+                <a:lnSpc>
+                  <a:spcPts val="1960"/>
+                </a:lnSpc>
+              </a:pPr>
+              <a:r>
+                <a:rPr lang="en-US" sz="1400" b="true">
+                  <a:solidFill>
+                    <a:srgbClr val="000000"/>
+                  </a:solidFill>
+                  <a:latin typeface="Lora Bold"/>
+                  <a:ea typeface="Lora Bold"/>
+                  <a:cs typeface="Lora Bold"/>
+                  <a:sym typeface="Lora Bold"/>
+                </a:rPr>
+                <a:t>Broadway - 100m </a:t>
+              </a:r>
+            </a:p>
+          </p:txBody>
+        </p:sp>
+        <p:sp>
+          <p:nvSpPr>
+            <p:cNvPr name="TextBox 28" id="28"/>
+            <p:cNvSpPr txBox="true"/>
+            <p:nvPr/>
+          </p:nvSpPr>
+          <p:spPr>
+            <a:xfrm rot="0">
+              <a:off x="2161874" y="2095339"/>
+              <a:ext cx="6229889" cy="311360"/>
+            </a:xfrm>
+            <a:prstGeom prst="rect">
+              <a:avLst/>
+            </a:prstGeom>
+          </p:spPr>
+          <p:txBody>
+            <a:bodyPr anchor="t" rtlCol="false" tIns="0" lIns="0" bIns="0" rIns="0">
+              <a:spAutoFit/>
+            </a:bodyPr>
+            <a:lstStyle/>
+            <a:p>
+              <a:pPr algn="l">
+                <a:lnSpc>
+                  <a:spcPts val="1960"/>
+                </a:lnSpc>
+              </a:pPr>
+              <a:r>
+                <a:rPr lang="en-US" sz="1400" b="true">
+                  <a:solidFill>
+                    <a:srgbClr val="000000"/>
+                  </a:solidFill>
+                  <a:latin typeface="Lora Bold"/>
+                  <a:ea typeface="Lora Bold"/>
+                  <a:cs typeface="Lora Bold"/>
+                  <a:sym typeface="Lora Bold"/>
+                </a:rPr>
+                <a:t>Broadway - 100 m </a:t>
+              </a:r>
+            </a:p>
+          </p:txBody>
+        </p:sp>
+      </p:grpSp>
+      <p:sp>
+        <p:nvSpPr>
+          <p:cNvPr name="TextBox 29" id="29"/>
           <p:cNvSpPr txBox="true"/>
           <p:nvPr/>
         </p:nvSpPr>
@@ -4093,16 +4428,503 @@
           </a:p>
         </p:txBody>
       </p:sp>
-      <p:sp>
-        <p:nvSpPr>
-          <p:cNvPr name="TextBox 25" id="25"/>
+      <p:grpSp>
+        <p:nvGrpSpPr>
+          <p:cNvPr name="Group 30" id="30"/>
+          <p:cNvGrpSpPr/>
+          <p:nvPr/>
+        </p:nvGrpSpPr>
+        <p:grpSpPr>
+          <a:xfrm rot="0">
+            <a:off x="0" y="2469086"/>
+            <a:ext cx="6465193" cy="4282883"/>
+            <a:chOff x="0" y="0"/>
+            <a:chExt cx="8620257" cy="5710511"/>
+          </a:xfrm>
+        </p:grpSpPr>
+        <p:sp>
+          <p:nvSpPr>
+            <p:cNvPr name="TextBox 31" id="31"/>
+            <p:cNvSpPr txBox="true"/>
+            <p:nvPr/>
+          </p:nvSpPr>
+          <p:spPr>
+            <a:xfrm rot="0">
+              <a:off x="0" y="-38100"/>
+              <a:ext cx="4226472" cy="491479"/>
+            </a:xfrm>
+            <a:prstGeom prst="rect">
+              <a:avLst/>
+            </a:prstGeom>
+          </p:spPr>
+          <p:txBody>
+            <a:bodyPr anchor="t" rtlCol="false" tIns="0" lIns="0" bIns="0" rIns="0">
+              <a:spAutoFit/>
+            </a:bodyPr>
+            <a:lstStyle/>
+            <a:p>
+              <a:pPr algn="ctr">
+                <a:lnSpc>
+                  <a:spcPts val="3156"/>
+                </a:lnSpc>
+              </a:pPr>
+              <a:r>
+                <a:rPr lang="en-US" b="true" sz="2254">
+                  <a:solidFill>
+                    <a:srgbClr val="A12C2B"/>
+                  </a:solidFill>
+                  <a:latin typeface="Lora Bold"/>
+                  <a:ea typeface="Lora Bold"/>
+                  <a:cs typeface="Lora Bold"/>
+                  <a:sym typeface="Lora Bold"/>
+                </a:rPr>
+                <a:t>LOCATION </a:t>
+              </a:r>
+            </a:p>
+          </p:txBody>
+        </p:sp>
+        <p:sp>
+          <p:nvSpPr>
+            <p:cNvPr name="TextBox 32" id="32"/>
+            <p:cNvSpPr txBox="true"/>
+            <p:nvPr/>
+          </p:nvSpPr>
+          <p:spPr>
+            <a:xfrm rot="0">
+              <a:off x="1016505" y="2041618"/>
+              <a:ext cx="2049839" cy="967767"/>
+            </a:xfrm>
+            <a:prstGeom prst="rect">
+              <a:avLst/>
+            </a:prstGeom>
+          </p:spPr>
+          <p:txBody>
+            <a:bodyPr anchor="t" rtlCol="false" tIns="0" lIns="0" bIns="0" rIns="0">
+              <a:spAutoFit/>
+            </a:bodyPr>
+            <a:lstStyle/>
+            <a:p>
+              <a:pPr algn="ctr">
+                <a:lnSpc>
+                  <a:spcPts val="2998"/>
+                </a:lnSpc>
+              </a:pPr>
+              <a:r>
+                <a:rPr lang="en-US" b="true" sz="2141">
+                  <a:solidFill>
+                    <a:srgbClr val="A12C2B"/>
+                  </a:solidFill>
+                  <a:latin typeface="Lora Bold"/>
+                  <a:ea typeface="Lora Bold"/>
+                  <a:cs typeface="Lora Bold"/>
+                  <a:sym typeface="Lora Bold"/>
+                </a:rPr>
+                <a:t>VISIBILITY </a:t>
+              </a:r>
+            </a:p>
+          </p:txBody>
+        </p:sp>
+        <p:sp>
+          <p:nvSpPr>
+            <p:cNvPr name="TextBox 33" id="33"/>
+            <p:cNvSpPr txBox="true"/>
+            <p:nvPr/>
+          </p:nvSpPr>
+          <p:spPr>
+            <a:xfrm rot="0">
+              <a:off x="940858" y="4062197"/>
+              <a:ext cx="2283510" cy="466662"/>
+            </a:xfrm>
+            <a:prstGeom prst="rect">
+              <a:avLst/>
+            </a:prstGeom>
+          </p:spPr>
+          <p:txBody>
+            <a:bodyPr anchor="t" rtlCol="false" tIns="0" lIns="0" bIns="0" rIns="0">
+              <a:spAutoFit/>
+            </a:bodyPr>
+            <a:lstStyle/>
+            <a:p>
+              <a:pPr algn="ctr">
+                <a:lnSpc>
+                  <a:spcPts val="2998"/>
+                </a:lnSpc>
+              </a:pPr>
+              <a:r>
+                <a:rPr lang="en-US" b="true" sz="2141">
+                  <a:solidFill>
+                    <a:srgbClr val="A12C2B"/>
+                  </a:solidFill>
+                  <a:latin typeface="Lora Bold"/>
+                  <a:ea typeface="Lora Bold"/>
+                  <a:cs typeface="Lora Bold"/>
+                  <a:sym typeface="Lora Bold"/>
+                </a:rPr>
+                <a:t>AUDIENCE</a:t>
+              </a:r>
+            </a:p>
+          </p:txBody>
+        </p:sp>
+        <p:sp>
+          <p:nvSpPr>
+            <p:cNvPr name="TextBox 34" id="34"/>
+            <p:cNvSpPr txBox="true"/>
+            <p:nvPr/>
+          </p:nvSpPr>
+          <p:spPr>
+            <a:xfrm rot="0">
+              <a:off x="1092619" y="610929"/>
+              <a:ext cx="7375877" cy="1353398"/>
+            </a:xfrm>
+            <a:prstGeom prst="rect">
+              <a:avLst/>
+            </a:prstGeom>
+          </p:spPr>
+          <p:txBody>
+            <a:bodyPr anchor="t" rtlCol="false" tIns="0" lIns="0" bIns="0" rIns="0">
+              <a:spAutoFit/>
+            </a:bodyPr>
+            <a:lstStyle/>
+            <a:p>
+              <a:pPr algn="l">
+                <a:lnSpc>
+                  <a:spcPts val="2051"/>
+                </a:lnSpc>
+              </a:pPr>
+              <a:r>
+                <a:rPr lang="en-US" sz="1465" b="true">
+                  <a:solidFill>
+                    <a:srgbClr val="000000"/>
+                  </a:solidFill>
+                  <a:latin typeface="Canva Sans Bold"/>
+                  <a:ea typeface="Canva Sans Bold"/>
+                  <a:cs typeface="Canva Sans Bold"/>
+                  <a:sym typeface="Canva Sans Bold"/>
+                </a:rPr>
+                <a:t>Positioned in the heart of Downtown Atlanta, this dual digital spectacular is located within one of the city’s busiestcommercial and commuter corridors.</a:t>
+              </a:r>
+            </a:p>
+            <a:p>
+              <a:pPr algn="l">
+                <a:lnSpc>
+                  <a:spcPts val="2051"/>
+                </a:lnSpc>
+              </a:pPr>
+            </a:p>
+          </p:txBody>
+        </p:sp>
+        <p:sp>
+          <p:nvSpPr>
+            <p:cNvPr name="TextBox 35" id="35"/>
+            <p:cNvSpPr txBox="true"/>
+            <p:nvPr/>
+          </p:nvSpPr>
+          <p:spPr>
+            <a:xfrm rot="0">
+              <a:off x="1186135" y="2694465"/>
+              <a:ext cx="7375877" cy="1353398"/>
+            </a:xfrm>
+            <a:prstGeom prst="rect">
+              <a:avLst/>
+            </a:prstGeom>
+          </p:spPr>
+          <p:txBody>
+            <a:bodyPr anchor="t" rtlCol="false" tIns="0" lIns="0" bIns="0" rIns="0">
+              <a:spAutoFit/>
+            </a:bodyPr>
+            <a:lstStyle/>
+            <a:p>
+              <a:pPr algn="l">
+                <a:lnSpc>
+                  <a:spcPts val="2051"/>
+                </a:lnSpc>
+              </a:pPr>
+              <a:r>
+                <a:rPr lang="en-US" sz="1465" b="true">
+                  <a:solidFill>
+                    <a:srgbClr val="000000"/>
+                  </a:solidFill>
+                  <a:latin typeface="Canva Sans Bold"/>
+                  <a:ea typeface="Canva Sans Bold"/>
+                  <a:cs typeface="Canva Sans Bold"/>
+                  <a:sym typeface="Canva Sans Bold"/>
+                </a:rPr>
+                <a:t>The large-format digital screens offer dominant visibility at a high-traffic intersection, benefiting from extended dwelltime due to traffic signals and congestion.</a:t>
+              </a:r>
+            </a:p>
+            <a:p>
+              <a:pPr algn="l">
+                <a:lnSpc>
+                  <a:spcPts val="2051"/>
+                </a:lnSpc>
+              </a:pPr>
+            </a:p>
+          </p:txBody>
+        </p:sp>
+        <p:sp>
+          <p:nvSpPr>
+            <p:cNvPr name="TextBox 36" id="36"/>
+            <p:cNvSpPr txBox="true"/>
+            <p:nvPr/>
+          </p:nvSpPr>
+          <p:spPr>
+            <a:xfrm rot="0">
+              <a:off x="1244380" y="4700727"/>
+              <a:ext cx="7375877" cy="1009784"/>
+            </a:xfrm>
+            <a:prstGeom prst="rect">
+              <a:avLst/>
+            </a:prstGeom>
+          </p:spPr>
+          <p:txBody>
+            <a:bodyPr anchor="t" rtlCol="false" tIns="0" lIns="0" bIns="0" rIns="0">
+              <a:spAutoFit/>
+            </a:bodyPr>
+            <a:lstStyle/>
+            <a:p>
+              <a:pPr algn="l">
+                <a:lnSpc>
+                  <a:spcPts val="2051"/>
+                </a:lnSpc>
+              </a:pPr>
+              <a:r>
+                <a:rPr lang="en-US" sz="1465" b="true">
+                  <a:solidFill>
+                    <a:srgbClr val="000000"/>
+                  </a:solidFill>
+                  <a:latin typeface="Canva Sans Bold"/>
+                  <a:ea typeface="Canva Sans Bold"/>
+                  <a:cs typeface="Canva Sans Bold"/>
+                  <a:sym typeface="Canva Sans Bold"/>
+                </a:rPr>
+                <a:t>Engages a high-density flow of ISC professionals, consultants, and international business travelers moving throughAtlanta’s core, </a:t>
+              </a:r>
+            </a:p>
+          </p:txBody>
+        </p:sp>
+        <p:sp>
+          <p:nvSpPr>
+            <p:cNvPr name="TextBox 37" id="37"/>
+            <p:cNvSpPr txBox="true"/>
+            <p:nvPr/>
+          </p:nvSpPr>
+          <p:spPr>
+            <a:xfrm rot="0">
+              <a:off x="3253377" y="-25400"/>
+              <a:ext cx="1297781" cy="395716"/>
+            </a:xfrm>
+            <a:prstGeom prst="rect">
+              <a:avLst/>
+            </a:prstGeom>
+          </p:spPr>
+          <p:txBody>
+            <a:bodyPr anchor="t" rtlCol="false" tIns="0" lIns="0" bIns="0" rIns="0">
+              <a:spAutoFit/>
+            </a:bodyPr>
+            <a:lstStyle/>
+            <a:p>
+              <a:pPr algn="ctr">
+                <a:lnSpc>
+                  <a:spcPts val="2541"/>
+                </a:lnSpc>
+              </a:pPr>
+              <a:r>
+                <a:rPr lang="en-US" b="true" sz="1815" u="sng">
+                  <a:solidFill>
+                    <a:srgbClr val="60605E"/>
+                  </a:solidFill>
+                  <a:latin typeface="Lora Bold"/>
+                  <a:ea typeface="Lora Bold"/>
+                  <a:cs typeface="Lora Bold"/>
+                  <a:sym typeface="Lora Bold"/>
+                  <a:hlinkClick r:id="rId6" tooltip="https://maps.app.goo.gl/8bjmv966vMDHqreV6"/>
+                </a:rPr>
+                <a:t>Map link</a:t>
+              </a:r>
+            </a:p>
+          </p:txBody>
+        </p:sp>
+      </p:grpSp>
+    </p:spTree>
+  </p:cSld>
+  <p:clrMapOvr>
+    <a:masterClrMapping/>
+  </p:clrMapOvr>
+</p:sld>
+</file>
+
+<file path=ppt/slides/slide4.xml><?xml version="1.0" encoding="utf-8"?>
+<p:sld xmlns:p="http://schemas.openxmlformats.org/presentationml/2006/main" xmlns:a="http://schemas.openxmlformats.org/drawingml/2006/main" xmlns:r="http://schemas.openxmlformats.org/officeDocument/2006/relationships">
+  <p:cSld>
+    <p:bg>
+      <p:bgPr>
+        <a:solidFill>
+          <a:srgbClr val="F6F3ED"/>
+        </a:solidFill>
+      </p:bgPr>
+    </p:bg>
+    <p:spTree>
+      <p:nvGrpSpPr>
+        <p:cNvPr id="1" name=""/>
+        <p:cNvGrpSpPr/>
+        <p:nvPr/>
+      </p:nvGrpSpPr>
+      <p:grpSpPr>
+        <a:xfrm>
+          <a:off x="0" y="0"/>
+          <a:ext cx="0" cy="0"/>
+          <a:chOff x="0" y="0"/>
+          <a:chExt cx="0" cy="0"/>
+        </a:xfrm>
+      </p:grpSpPr>
+      <p:sp>
+        <p:nvSpPr>
+          <p:cNvPr name="Freeform 2" id="2"/>
+          <p:cNvSpPr/>
+          <p:nvPr/>
+        </p:nvSpPr>
+        <p:spPr>
+          <a:xfrm flipH="false" flipV="false" rot="0">
+            <a:off x="312529" y="1487498"/>
+            <a:ext cx="8226400" cy="7770802"/>
+          </a:xfrm>
+          <a:custGeom>
+            <a:avLst/>
+            <a:gdLst/>
+            <a:ahLst/>
+            <a:cxnLst/>
+            <a:rect r="r" b="b" t="t" l="l"/>
+            <a:pathLst>
+              <a:path h="7770802" w="8226400">
+                <a:moveTo>
+                  <a:pt x="0" y="0"/>
+                </a:moveTo>
+                <a:lnTo>
+                  <a:pt x="8226400" y="0"/>
+                </a:lnTo>
+                <a:lnTo>
+                  <a:pt x="8226400" y="7770802"/>
+                </a:lnTo>
+                <a:lnTo>
+                  <a:pt x="0" y="7770802"/>
+                </a:lnTo>
+                <a:lnTo>
+                  <a:pt x="0" y="0"/>
+                </a:lnTo>
+                <a:close/>
+              </a:path>
+            </a:pathLst>
+          </a:custGeom>
+          <a:blipFill>
+            <a:blip r:embed="rId2"/>
+            <a:stretch>
+              <a:fillRect l="0" t="0" r="-48964" b="-7009"/>
+            </a:stretch>
+          </a:blipFill>
+        </p:spPr>
+      </p:sp>
+      <p:sp>
+        <p:nvSpPr>
+          <p:cNvPr name="Freeform 3" id="3"/>
+          <p:cNvSpPr/>
+          <p:nvPr/>
+        </p:nvSpPr>
+        <p:spPr>
+          <a:xfrm flipH="false" flipV="false" rot="0">
+            <a:off x="9283128" y="1487498"/>
+            <a:ext cx="8506392" cy="7770802"/>
+          </a:xfrm>
+          <a:custGeom>
+            <a:avLst/>
+            <a:gdLst/>
+            <a:ahLst/>
+            <a:cxnLst/>
+            <a:rect r="r" b="b" t="t" l="l"/>
+            <a:pathLst>
+              <a:path h="7770802" w="8506392">
+                <a:moveTo>
+                  <a:pt x="0" y="0"/>
+                </a:moveTo>
+                <a:lnTo>
+                  <a:pt x="8506392" y="0"/>
+                </a:lnTo>
+                <a:lnTo>
+                  <a:pt x="8506392" y="7770802"/>
+                </a:lnTo>
+                <a:lnTo>
+                  <a:pt x="0" y="7770802"/>
+                </a:lnTo>
+                <a:lnTo>
+                  <a:pt x="0" y="0"/>
+                </a:lnTo>
+                <a:close/>
+              </a:path>
+            </a:pathLst>
+          </a:custGeom>
+          <a:blipFill>
+            <a:blip r:embed="rId3"/>
+            <a:stretch>
+              <a:fillRect l="0" t="-5394" r="-60911" b="-14131"/>
+            </a:stretch>
+          </a:blipFill>
+        </p:spPr>
+      </p:sp>
+      <p:sp>
+        <p:nvSpPr>
+          <p:cNvPr name="Freeform 4" id="4"/>
+          <p:cNvSpPr/>
+          <p:nvPr/>
+        </p:nvSpPr>
+        <p:spPr>
+          <a:xfrm flipH="true" flipV="false" rot="0">
+            <a:off x="-694355" y="9438672"/>
+            <a:ext cx="19542952" cy="1140581"/>
+          </a:xfrm>
+          <a:custGeom>
+            <a:avLst/>
+            <a:gdLst/>
+            <a:ahLst/>
+            <a:cxnLst/>
+            <a:rect r="r" b="b" t="t" l="l"/>
+            <a:pathLst>
+              <a:path h="1140581" w="19542952">
+                <a:moveTo>
+                  <a:pt x="19542952" y="0"/>
+                </a:moveTo>
+                <a:lnTo>
+                  <a:pt x="0" y="0"/>
+                </a:lnTo>
+                <a:lnTo>
+                  <a:pt x="0" y="1140581"/>
+                </a:lnTo>
+                <a:lnTo>
+                  <a:pt x="19542952" y="1140581"/>
+                </a:lnTo>
+                <a:lnTo>
+                  <a:pt x="19542952" y="0"/>
+                </a:lnTo>
+                <a:close/>
+              </a:path>
+            </a:pathLst>
+          </a:custGeom>
+          <a:blipFill>
+            <a:blip r:embed="rId4"/>
+            <a:stretch>
+              <a:fillRect l="0" t="-863799" r="0" b="0"/>
+            </a:stretch>
+          </a:blipFill>
+        </p:spPr>
+      </p:sp>
+      <p:sp>
+        <p:nvSpPr>
+          <p:cNvPr name="TextBox 5" id="5"/>
           <p:cNvSpPr txBox="true"/>
           <p:nvPr/>
         </p:nvSpPr>
         <p:spPr>
           <a:xfrm rot="0">
-            <a:off x="-2164022" y="1148398"/>
-            <a:ext cx="8452207" cy="264159"/>
+            <a:off x="312529" y="132080"/>
+            <a:ext cx="7291536" cy="896620"/>
           </a:xfrm>
           <a:prstGeom prst="rect">
             <a:avLst/>
@@ -4116,34 +4938,685 @@
           <a:p>
             <a:pPr algn="ctr">
               <a:lnSpc>
-                <a:spcPts val="2240"/>
+                <a:spcPts val="7279"/>
               </a:lnSpc>
             </a:pPr>
             <a:r>
-              <a:rPr lang="en-US" b="true" sz="1600">
+              <a:rPr lang="en-US" sz="5199">
                 <a:solidFill>
-                  <a:srgbClr val="A12C2B"/>
+                  <a:srgbClr val="000000"/>
                 </a:solidFill>
-                <a:latin typeface="Canva Sans Bold"/>
-                <a:ea typeface="Canva Sans Bold"/>
-                <a:cs typeface="Canva Sans Bold"/>
-                <a:sym typeface="Canva Sans Bold"/>
+                <a:latin typeface="Prata"/>
+                <a:ea typeface="Prata"/>
+                <a:cs typeface="Prata"/>
+                <a:sym typeface="Prata"/>
               </a:rPr>
-              <a:t>NEW YORK  |  THE BALL DROP TOWER</a:t>
+              <a:t>ONE TIMES SQUARE </a:t>
             </a:r>
           </a:p>
         </p:txBody>
       </p:sp>
-      <p:sp>
-        <p:nvSpPr>
-          <p:cNvPr name="TextBox 26" id="26"/>
+    </p:spTree>
+  </p:cSld>
+  <p:clrMapOvr>
+    <a:masterClrMapping/>
+  </p:clrMapOvr>
+</p:sld>
+</file>
+
+<file path=ppt/slides/slide5.xml><?xml version="1.0" encoding="utf-8"?>
+<p:sld xmlns:p="http://schemas.openxmlformats.org/presentationml/2006/main" xmlns:a="http://schemas.openxmlformats.org/drawingml/2006/main" xmlns:r="http://schemas.openxmlformats.org/officeDocument/2006/relationships">
+  <p:cSld>
+    <p:bg>
+      <p:bgPr>
+        <a:solidFill>
+          <a:srgbClr val="F6F3ED"/>
+        </a:solidFill>
+      </p:bgPr>
+    </p:bg>
+    <p:spTree>
+      <p:nvGrpSpPr>
+        <p:cNvPr id="1" name=""/>
+        <p:cNvGrpSpPr/>
+        <p:nvPr/>
+      </p:nvGrpSpPr>
+      <p:grpSpPr>
+        <a:xfrm>
+          <a:off x="0" y="0"/>
+          <a:ext cx="0" cy="0"/>
+          <a:chOff x="0" y="0"/>
+          <a:chExt cx="0" cy="0"/>
+        </a:xfrm>
+      </p:grpSpPr>
+      <p:sp>
+        <p:nvSpPr>
+          <p:cNvPr name="AutoShape 2" id="2"/>
+          <p:cNvSpPr/>
+          <p:nvPr/>
+        </p:nvSpPr>
+        <p:spPr>
+          <a:xfrm>
+            <a:off x="-322177" y="247015"/>
+            <a:ext cx="18610177" cy="0"/>
+          </a:xfrm>
+          <a:prstGeom prst="line">
+            <a:avLst/>
+          </a:prstGeom>
+          <a:ln cap="flat" w="9525">
+            <a:solidFill>
+              <a:srgbClr val="000000"/>
+            </a:solidFill>
+            <a:prstDash val="solid"/>
+            <a:headEnd type="none" len="sm" w="sm"/>
+            <a:tailEnd type="none" len="sm" w="sm"/>
+          </a:ln>
+        </p:spPr>
+      </p:sp>
+      <p:sp>
+        <p:nvSpPr>
+          <p:cNvPr name="Freeform 3" id="3"/>
+          <p:cNvSpPr/>
+          <p:nvPr/>
+        </p:nvSpPr>
+        <p:spPr>
+          <a:xfrm flipH="true" flipV="false" rot="0">
+            <a:off x="-694355" y="9438672"/>
+            <a:ext cx="19542952" cy="1140581"/>
+          </a:xfrm>
+          <a:custGeom>
+            <a:avLst/>
+            <a:gdLst/>
+            <a:ahLst/>
+            <a:cxnLst/>
+            <a:rect r="r" b="b" t="t" l="l"/>
+            <a:pathLst>
+              <a:path h="1140581" w="19542952">
+                <a:moveTo>
+                  <a:pt x="19542952" y="0"/>
+                </a:moveTo>
+                <a:lnTo>
+                  <a:pt x="0" y="0"/>
+                </a:lnTo>
+                <a:lnTo>
+                  <a:pt x="0" y="1140581"/>
+                </a:lnTo>
+                <a:lnTo>
+                  <a:pt x="19542952" y="1140581"/>
+                </a:lnTo>
+                <a:lnTo>
+                  <a:pt x="19542952" y="0"/>
+                </a:lnTo>
+                <a:close/>
+              </a:path>
+            </a:pathLst>
+          </a:custGeom>
+          <a:blipFill>
+            <a:blip r:embed="rId2"/>
+            <a:stretch>
+              <a:fillRect l="0" t="-863799" r="0" b="0"/>
+            </a:stretch>
+          </a:blipFill>
+        </p:spPr>
+      </p:sp>
+      <p:sp>
+        <p:nvSpPr>
+          <p:cNvPr name="AutoShape 4" id="4"/>
+          <p:cNvSpPr/>
+          <p:nvPr/>
+        </p:nvSpPr>
+        <p:spPr>
+          <a:xfrm flipV="true">
+            <a:off x="2578156" y="8269006"/>
+            <a:ext cx="0" cy="1040620"/>
+          </a:xfrm>
+          <a:prstGeom prst="line">
+            <a:avLst/>
+          </a:prstGeom>
+          <a:ln cap="flat" w="9525">
+            <a:solidFill>
+              <a:srgbClr val="998D89"/>
+            </a:solidFill>
+            <a:prstDash val="solid"/>
+            <a:headEnd type="none" len="sm" w="sm"/>
+            <a:tailEnd type="none" len="sm" w="sm"/>
+          </a:ln>
+        </p:spPr>
+      </p:sp>
+      <p:grpSp>
+        <p:nvGrpSpPr>
+          <p:cNvPr name="Group 5" id="5"/>
+          <p:cNvGrpSpPr/>
+          <p:nvPr/>
+        </p:nvGrpSpPr>
+        <p:grpSpPr>
+          <a:xfrm rot="0">
+            <a:off x="11531521" y="7851818"/>
+            <a:ext cx="7013042" cy="1949680"/>
+            <a:chOff x="0" y="0"/>
+            <a:chExt cx="9350723" cy="2599574"/>
+          </a:xfrm>
+        </p:grpSpPr>
+        <p:sp>
+          <p:nvSpPr>
+            <p:cNvPr name="AutoShape 6" id="6"/>
+            <p:cNvSpPr/>
+            <p:nvPr/>
+          </p:nvSpPr>
+          <p:spPr>
+            <a:xfrm flipH="true" flipV="true">
+              <a:off x="1363517" y="24184"/>
+              <a:ext cx="4634722" cy="11484"/>
+            </a:xfrm>
+            <a:prstGeom prst="line">
+              <a:avLst/>
+            </a:prstGeom>
+            <a:ln cap="flat" w="12700">
+              <a:solidFill>
+                <a:srgbClr val="998D89"/>
+              </a:solidFill>
+              <a:prstDash val="solid"/>
+              <a:headEnd type="none" len="sm" w="sm"/>
+              <a:tailEnd type="none" len="sm" w="sm"/>
+            </a:ln>
+          </p:spPr>
+        </p:sp>
+        <p:sp>
+          <p:nvSpPr>
+            <p:cNvPr name="AutoShape 7" id="7"/>
+            <p:cNvSpPr/>
+            <p:nvPr/>
+          </p:nvSpPr>
+          <p:spPr>
+            <a:xfrm flipH="true" flipV="true">
+              <a:off x="1372021" y="2586874"/>
+              <a:ext cx="4626217" cy="6350"/>
+            </a:xfrm>
+            <a:prstGeom prst="line">
+              <a:avLst/>
+            </a:prstGeom>
+            <a:ln cap="flat" w="12700">
+              <a:solidFill>
+                <a:srgbClr val="998D89"/>
+              </a:solidFill>
+              <a:prstDash val="solid"/>
+              <a:headEnd type="none" len="sm" w="sm"/>
+              <a:tailEnd type="none" len="sm" w="sm"/>
+            </a:ln>
+          </p:spPr>
+        </p:sp>
+        <p:sp>
+          <p:nvSpPr>
+            <p:cNvPr name="TextBox 8" id="8"/>
+            <p:cNvSpPr txBox="true"/>
+            <p:nvPr/>
+          </p:nvSpPr>
+          <p:spPr>
+            <a:xfrm rot="0">
+              <a:off x="0" y="188267"/>
+              <a:ext cx="6171741" cy="333373"/>
+            </a:xfrm>
+            <a:prstGeom prst="rect">
+              <a:avLst/>
+            </a:prstGeom>
+          </p:spPr>
+          <p:txBody>
+            <a:bodyPr anchor="t" rtlCol="false" tIns="0" lIns="0" bIns="0" rIns="0">
+              <a:spAutoFit/>
+            </a:bodyPr>
+            <a:lstStyle/>
+            <a:p>
+              <a:pPr algn="ctr">
+                <a:lnSpc>
+                  <a:spcPts val="2100"/>
+                </a:lnSpc>
+              </a:pPr>
+              <a:r>
+                <a:rPr lang="en-US" sz="1500" b="true">
+                  <a:solidFill>
+                    <a:srgbClr val="A12C2B"/>
+                  </a:solidFill>
+                  <a:latin typeface="Lora Bold"/>
+                  <a:ea typeface="Lora Bold"/>
+                  <a:cs typeface="Lora Bold"/>
+                  <a:sym typeface="Lora Bold"/>
+                </a:rPr>
+                <a:t>NEARBY LANDMARKS </a:t>
+              </a:r>
+            </a:p>
+          </p:txBody>
+        </p:sp>
+        <p:sp>
+          <p:nvSpPr>
+            <p:cNvPr name="TextBox 9" id="9"/>
+            <p:cNvSpPr txBox="true"/>
+            <p:nvPr/>
+          </p:nvSpPr>
+          <p:spPr>
+            <a:xfrm rot="0">
+              <a:off x="2116761" y="1439487"/>
+              <a:ext cx="7233962" cy="311360"/>
+            </a:xfrm>
+            <a:prstGeom prst="rect">
+              <a:avLst/>
+            </a:prstGeom>
+          </p:spPr>
+          <p:txBody>
+            <a:bodyPr anchor="t" rtlCol="false" tIns="0" lIns="0" bIns="0" rIns="0">
+              <a:spAutoFit/>
+            </a:bodyPr>
+            <a:lstStyle/>
+            <a:p>
+              <a:pPr algn="l">
+                <a:lnSpc>
+                  <a:spcPts val="1960"/>
+                </a:lnSpc>
+              </a:pPr>
+              <a:r>
+                <a:rPr lang="en-US" sz="1400" b="true">
+                  <a:solidFill>
+                    <a:srgbClr val="000000"/>
+                  </a:solidFill>
+                  <a:latin typeface="Lora Bold"/>
+                  <a:ea typeface="Lora Bold"/>
+                  <a:cs typeface="Lora Bold"/>
+                  <a:sym typeface="Lora Bold"/>
+                </a:rPr>
+                <a:t>Broadway - 100m </a:t>
+              </a:r>
+            </a:p>
+          </p:txBody>
+        </p:sp>
+        <p:sp>
+          <p:nvSpPr>
+            <p:cNvPr name="AutoShape 10" id="10"/>
+            <p:cNvSpPr/>
+            <p:nvPr/>
+          </p:nvSpPr>
+          <p:spPr>
+            <a:xfrm flipV="true">
+              <a:off x="1390443" y="0"/>
+              <a:ext cx="0" cy="2557555"/>
+            </a:xfrm>
+            <a:prstGeom prst="line">
+              <a:avLst/>
+            </a:prstGeom>
+            <a:ln cap="flat" w="12700">
+              <a:solidFill>
+                <a:srgbClr val="998D89"/>
+              </a:solidFill>
+              <a:prstDash val="solid"/>
+              <a:headEnd type="none" len="sm" w="sm"/>
+              <a:tailEnd type="none" len="sm" w="sm"/>
+            </a:ln>
+          </p:spPr>
+        </p:sp>
+        <p:sp>
+          <p:nvSpPr>
+            <p:cNvPr name="AutoShape 11" id="11"/>
+            <p:cNvSpPr/>
+            <p:nvPr/>
+          </p:nvSpPr>
+          <p:spPr>
+            <a:xfrm flipV="true">
+              <a:off x="5998238" y="35669"/>
+              <a:ext cx="0" cy="2557555"/>
+            </a:xfrm>
+            <a:prstGeom prst="line">
+              <a:avLst/>
+            </a:prstGeom>
+            <a:ln cap="flat" w="12700">
+              <a:solidFill>
+                <a:srgbClr val="998D89"/>
+              </a:solidFill>
+              <a:prstDash val="solid"/>
+              <a:headEnd type="none" len="sm" w="sm"/>
+              <a:tailEnd type="none" len="sm" w="sm"/>
+            </a:ln>
+          </p:spPr>
+        </p:sp>
+        <p:sp>
+          <p:nvSpPr>
+            <p:cNvPr name="Freeform 12" id="12"/>
+            <p:cNvSpPr/>
+            <p:nvPr/>
+          </p:nvSpPr>
+          <p:spPr>
+            <a:xfrm flipH="false" flipV="false" rot="0">
+              <a:off x="1575256" y="801041"/>
+              <a:ext cx="288169" cy="415378"/>
+            </a:xfrm>
+            <a:custGeom>
+              <a:avLst/>
+              <a:gdLst/>
+              <a:ahLst/>
+              <a:cxnLst/>
+              <a:rect r="r" b="b" t="t" l="l"/>
+              <a:pathLst>
+                <a:path h="415378" w="288169">
+                  <a:moveTo>
+                    <a:pt x="0" y="0"/>
+                  </a:moveTo>
+                  <a:lnTo>
+                    <a:pt x="288168" y="0"/>
+                  </a:lnTo>
+                  <a:lnTo>
+                    <a:pt x="288168" y="415378"/>
+                  </a:lnTo>
+                  <a:lnTo>
+                    <a:pt x="0" y="415378"/>
+                  </a:lnTo>
+                  <a:lnTo>
+                    <a:pt x="0" y="0"/>
+                  </a:lnTo>
+                  <a:close/>
+                </a:path>
+              </a:pathLst>
+            </a:custGeom>
+            <a:blipFill>
+              <a:blip r:embed="rId3">
+                <a:extLst>
+                  <a:ext uri="{96DAC541-7B7A-43D3-8B79-37D633B846F1}">
+                    <asvg:svgBlip xmlns:asvg="http://schemas.microsoft.com/office/drawing/2016/SVG/main" r:embed="rId4"/>
+                  </a:ext>
+                </a:extLst>
+              </a:blip>
+              <a:stretch>
+                <a:fillRect l="0" t="0" r="0" b="0"/>
+              </a:stretch>
+            </a:blipFill>
+          </p:spPr>
+        </p:sp>
+        <p:sp>
+          <p:nvSpPr>
+            <p:cNvPr name="Freeform 13" id="13"/>
+            <p:cNvSpPr/>
+            <p:nvPr/>
+          </p:nvSpPr>
+          <p:spPr>
+            <a:xfrm flipH="false" flipV="false" rot="0">
+              <a:off x="1612693" y="1444503"/>
+              <a:ext cx="288169" cy="415378"/>
+            </a:xfrm>
+            <a:custGeom>
+              <a:avLst/>
+              <a:gdLst/>
+              <a:ahLst/>
+              <a:cxnLst/>
+              <a:rect r="r" b="b" t="t" l="l"/>
+              <a:pathLst>
+                <a:path h="415378" w="288169">
+                  <a:moveTo>
+                    <a:pt x="0" y="0"/>
+                  </a:moveTo>
+                  <a:lnTo>
+                    <a:pt x="288168" y="0"/>
+                  </a:lnTo>
+                  <a:lnTo>
+                    <a:pt x="288168" y="415378"/>
+                  </a:lnTo>
+                  <a:lnTo>
+                    <a:pt x="0" y="415378"/>
+                  </a:lnTo>
+                  <a:lnTo>
+                    <a:pt x="0" y="0"/>
+                  </a:lnTo>
+                  <a:close/>
+                </a:path>
+              </a:pathLst>
+            </a:custGeom>
+            <a:blipFill>
+              <a:blip r:embed="rId3">
+                <a:extLst>
+                  <a:ext uri="{96DAC541-7B7A-43D3-8B79-37D633B846F1}">
+                    <asvg:svgBlip xmlns:asvg="http://schemas.microsoft.com/office/drawing/2016/SVG/main" r:embed="rId4"/>
+                  </a:ext>
+                </a:extLst>
+              </a:blip>
+              <a:stretch>
+                <a:fillRect l="0" t="0" r="0" b="0"/>
+              </a:stretch>
+            </a:blipFill>
+          </p:spPr>
+        </p:sp>
+        <p:sp>
+          <p:nvSpPr>
+            <p:cNvPr name="Freeform 14" id="14"/>
+            <p:cNvSpPr/>
+            <p:nvPr/>
+          </p:nvSpPr>
+          <p:spPr>
+            <a:xfrm flipH="false" flipV="false" rot="0">
+              <a:off x="1645106" y="2113366"/>
+              <a:ext cx="288169" cy="415378"/>
+            </a:xfrm>
+            <a:custGeom>
+              <a:avLst/>
+              <a:gdLst/>
+              <a:ahLst/>
+              <a:cxnLst/>
+              <a:rect r="r" b="b" t="t" l="l"/>
+              <a:pathLst>
+                <a:path h="415378" w="288169">
+                  <a:moveTo>
+                    <a:pt x="0" y="0"/>
+                  </a:moveTo>
+                  <a:lnTo>
+                    <a:pt x="288168" y="0"/>
+                  </a:lnTo>
+                  <a:lnTo>
+                    <a:pt x="288168" y="415378"/>
+                  </a:lnTo>
+                  <a:lnTo>
+                    <a:pt x="0" y="415378"/>
+                  </a:lnTo>
+                  <a:lnTo>
+                    <a:pt x="0" y="0"/>
+                  </a:lnTo>
+                  <a:close/>
+                </a:path>
+              </a:pathLst>
+            </a:custGeom>
+            <a:blipFill>
+              <a:blip r:embed="rId3">
+                <a:extLst>
+                  <a:ext uri="{96DAC541-7B7A-43D3-8B79-37D633B846F1}">
+                    <asvg:svgBlip xmlns:asvg="http://schemas.microsoft.com/office/drawing/2016/SVG/main" r:embed="rId4"/>
+                  </a:ext>
+                </a:extLst>
+              </a:blip>
+              <a:stretch>
+                <a:fillRect l="0" t="0" r="0" b="0"/>
+              </a:stretch>
+            </a:blipFill>
+          </p:spPr>
+        </p:sp>
+        <p:sp>
+          <p:nvSpPr>
+            <p:cNvPr name="AutoShape 15" id="15"/>
+            <p:cNvSpPr/>
+            <p:nvPr/>
+          </p:nvSpPr>
+          <p:spPr>
+            <a:xfrm flipH="true">
+              <a:off x="2067299" y="1271784"/>
+              <a:ext cx="3990464" cy="0"/>
+            </a:xfrm>
+            <a:prstGeom prst="line">
+              <a:avLst/>
+            </a:prstGeom>
+            <a:ln cap="flat" w="12700">
+              <a:solidFill>
+                <a:srgbClr val="998D89"/>
+              </a:solidFill>
+              <a:prstDash val="solid"/>
+              <a:headEnd type="none" len="sm" w="sm"/>
+              <a:tailEnd type="none" len="sm" w="sm"/>
+            </a:ln>
+          </p:spPr>
+        </p:sp>
+        <p:sp>
+          <p:nvSpPr>
+            <p:cNvPr name="AutoShape 16" id="16"/>
+            <p:cNvSpPr/>
+            <p:nvPr/>
+          </p:nvSpPr>
+          <p:spPr>
+            <a:xfrm flipH="true" flipV="true">
+              <a:off x="2050685" y="1957003"/>
+              <a:ext cx="3947554" cy="0"/>
+            </a:xfrm>
+            <a:prstGeom prst="line">
+              <a:avLst/>
+            </a:prstGeom>
+            <a:ln cap="flat" w="12700">
+              <a:solidFill>
+                <a:srgbClr val="998D89"/>
+              </a:solidFill>
+              <a:prstDash val="solid"/>
+              <a:headEnd type="none" len="sm" w="sm"/>
+              <a:tailEnd type="none" len="sm" w="sm"/>
+            </a:ln>
+          </p:spPr>
+        </p:sp>
+        <p:sp>
+          <p:nvSpPr>
+            <p:cNvPr name="TextBox 17" id="17"/>
+            <p:cNvSpPr txBox="true"/>
+            <p:nvPr/>
+          </p:nvSpPr>
+          <p:spPr>
+            <a:xfrm rot="0">
+              <a:off x="2067288" y="763666"/>
+              <a:ext cx="5756269" cy="311360"/>
+            </a:xfrm>
+            <a:prstGeom prst="rect">
+              <a:avLst/>
+            </a:prstGeom>
+          </p:spPr>
+          <p:txBody>
+            <a:bodyPr anchor="t" rtlCol="false" tIns="0" lIns="0" bIns="0" rIns="0">
+              <a:spAutoFit/>
+            </a:bodyPr>
+            <a:lstStyle/>
+            <a:p>
+              <a:pPr algn="l">
+                <a:lnSpc>
+                  <a:spcPts val="1960"/>
+                </a:lnSpc>
+              </a:pPr>
+              <a:r>
+                <a:rPr lang="en-US" sz="1400" b="true">
+                  <a:solidFill>
+                    <a:srgbClr val="000000"/>
+                  </a:solidFill>
+                  <a:latin typeface="Lora Bold"/>
+                  <a:ea typeface="Lora Bold"/>
+                  <a:cs typeface="Lora Bold"/>
+                  <a:sym typeface="Lora Bold"/>
+                </a:rPr>
+                <a:t>Broadway - 100m </a:t>
+              </a:r>
+            </a:p>
+          </p:txBody>
+        </p:sp>
+        <p:sp>
+          <p:nvSpPr>
+            <p:cNvPr name="TextBox 18" id="18"/>
+            <p:cNvSpPr txBox="true"/>
+            <p:nvPr/>
+          </p:nvSpPr>
+          <p:spPr>
+            <a:xfrm rot="0">
+              <a:off x="2161874" y="2095339"/>
+              <a:ext cx="6229889" cy="311360"/>
+            </a:xfrm>
+            <a:prstGeom prst="rect">
+              <a:avLst/>
+            </a:prstGeom>
+          </p:spPr>
+          <p:txBody>
+            <a:bodyPr anchor="t" rtlCol="false" tIns="0" lIns="0" bIns="0" rIns="0">
+              <a:spAutoFit/>
+            </a:bodyPr>
+            <a:lstStyle/>
+            <a:p>
+              <a:pPr algn="l">
+                <a:lnSpc>
+                  <a:spcPts val="1960"/>
+                </a:lnSpc>
+              </a:pPr>
+              <a:r>
+                <a:rPr lang="en-US" sz="1400" b="true">
+                  <a:solidFill>
+                    <a:srgbClr val="000000"/>
+                  </a:solidFill>
+                  <a:latin typeface="Lora Bold"/>
+                  <a:ea typeface="Lora Bold"/>
+                  <a:cs typeface="Lora Bold"/>
+                  <a:sym typeface="Lora Bold"/>
+                </a:rPr>
+                <a:t>Broadway - 100 m </a:t>
+              </a:r>
+            </a:p>
+          </p:txBody>
+        </p:sp>
+      </p:grpSp>
+      <p:sp>
+        <p:nvSpPr>
+          <p:cNvPr name="Freeform 19" id="19"/>
+          <p:cNvSpPr/>
+          <p:nvPr/>
+        </p:nvSpPr>
+        <p:spPr>
+          <a:xfrm flipH="false" flipV="false" rot="0">
+            <a:off x="8244086" y="247015"/>
+            <a:ext cx="10043914" cy="7336199"/>
+          </a:xfrm>
+          <a:custGeom>
+            <a:avLst/>
+            <a:gdLst/>
+            <a:ahLst/>
+            <a:cxnLst/>
+            <a:rect r="r" b="b" t="t" l="l"/>
+            <a:pathLst>
+              <a:path h="7336199" w="10043914">
+                <a:moveTo>
+                  <a:pt x="0" y="0"/>
+                </a:moveTo>
+                <a:lnTo>
+                  <a:pt x="10043914" y="0"/>
+                </a:lnTo>
+                <a:lnTo>
+                  <a:pt x="10043914" y="7336199"/>
+                </a:lnTo>
+                <a:lnTo>
+                  <a:pt x="0" y="7336199"/>
+                </a:lnTo>
+                <a:lnTo>
+                  <a:pt x="0" y="0"/>
+                </a:lnTo>
+                <a:close/>
+              </a:path>
+            </a:pathLst>
+          </a:custGeom>
+          <a:blipFill>
+            <a:blip r:embed="rId5"/>
+            <a:stretch>
+              <a:fillRect l="0" t="-2914" r="-12924" b="-2914"/>
+            </a:stretch>
+          </a:blipFill>
+        </p:spPr>
+      </p:sp>
+      <p:sp>
+        <p:nvSpPr>
+          <p:cNvPr name="TextBox 20" id="20"/>
           <p:cNvSpPr txBox="true"/>
           <p:nvPr/>
         </p:nvSpPr>
         <p:spPr>
           <a:xfrm rot="0">
-            <a:off x="9144000" y="2080062"/>
-            <a:ext cx="3467276" cy="339724"/>
+            <a:off x="71369" y="7545114"/>
+            <a:ext cx="4628806" cy="306704"/>
           </a:xfrm>
           <a:prstGeom prst="rect">
             <a:avLst/>
@@ -4157,11 +5630,1716 @@
           <a:p>
             <a:pPr algn="ctr">
               <a:lnSpc>
-                <a:spcPts val="2800"/>
+                <a:spcPts val="2520"/>
               </a:lnSpc>
             </a:pPr>
             <a:r>
-              <a:rPr lang="en-US" b="true" sz="2000">
+              <a:rPr lang="en-US" b="true" sz="1800">
+                <a:solidFill>
+                  <a:srgbClr val="A12C2B"/>
+                </a:solidFill>
+                <a:latin typeface="Lora Bold"/>
+                <a:ea typeface="Lora Bold"/>
+                <a:cs typeface="Lora Bold"/>
+                <a:sym typeface="Lora Bold"/>
+              </a:rPr>
+              <a:t>TECHNICAL SPECIFICATIONS</a:t>
+            </a:r>
+          </a:p>
+        </p:txBody>
+      </p:sp>
+      <p:grpSp>
+        <p:nvGrpSpPr>
+          <p:cNvPr name="Group 21" id="21"/>
+          <p:cNvGrpSpPr/>
+          <p:nvPr/>
+        </p:nvGrpSpPr>
+        <p:grpSpPr>
+          <a:xfrm rot="0">
+            <a:off x="754572" y="8230306"/>
+            <a:ext cx="1771196" cy="1169666"/>
+            <a:chOff x="0" y="0"/>
+            <a:chExt cx="2361594" cy="1559555"/>
+          </a:xfrm>
+        </p:grpSpPr>
+        <p:sp>
+          <p:nvSpPr>
+            <p:cNvPr name="TextBox 22" id="22"/>
+            <p:cNvSpPr txBox="true"/>
+            <p:nvPr/>
+          </p:nvSpPr>
+          <p:spPr>
+            <a:xfrm rot="0">
+              <a:off x="0" y="-28575"/>
+              <a:ext cx="2256628" cy="311360"/>
+            </a:xfrm>
+            <a:prstGeom prst="rect">
+              <a:avLst/>
+            </a:prstGeom>
+          </p:spPr>
+          <p:txBody>
+            <a:bodyPr anchor="t" rtlCol="false" tIns="0" lIns="0" bIns="0" rIns="0">
+              <a:spAutoFit/>
+            </a:bodyPr>
+            <a:lstStyle/>
+            <a:p>
+              <a:pPr algn="l">
+                <a:lnSpc>
+                  <a:spcPts val="1960"/>
+                </a:lnSpc>
+              </a:pPr>
+              <a:r>
+                <a:rPr lang="en-US" sz="1400" b="true">
+                  <a:solidFill>
+                    <a:srgbClr val="000000"/>
+                  </a:solidFill>
+                  <a:latin typeface="Lora Bold"/>
+                  <a:ea typeface="Lora Bold"/>
+                  <a:cs typeface="Lora Bold"/>
+                  <a:sym typeface="Lora Bold"/>
+                </a:rPr>
+                <a:t>FORMAT : Static  </a:t>
+              </a:r>
+            </a:p>
+          </p:txBody>
+        </p:sp>
+        <p:sp>
+          <p:nvSpPr>
+            <p:cNvPr name="TextBox 23" id="23"/>
+            <p:cNvSpPr txBox="true"/>
+            <p:nvPr/>
+          </p:nvSpPr>
+          <p:spPr>
+            <a:xfrm rot="0">
+              <a:off x="0" y="558210"/>
+              <a:ext cx="2361594" cy="311360"/>
+            </a:xfrm>
+            <a:prstGeom prst="rect">
+              <a:avLst/>
+            </a:prstGeom>
+          </p:spPr>
+          <p:txBody>
+            <a:bodyPr anchor="t" rtlCol="false" tIns="0" lIns="0" bIns="0" rIns="0">
+              <a:spAutoFit/>
+            </a:bodyPr>
+            <a:lstStyle/>
+            <a:p>
+              <a:pPr algn="l">
+                <a:lnSpc>
+                  <a:spcPts val="1960"/>
+                </a:lnSpc>
+              </a:pPr>
+              <a:r>
+                <a:rPr lang="en-US" sz="1400" b="true">
+                  <a:solidFill>
+                    <a:srgbClr val="000000"/>
+                  </a:solidFill>
+                  <a:latin typeface="Lora Bold"/>
+                  <a:ea typeface="Lora Bold"/>
+                  <a:cs typeface="Lora Bold"/>
+                  <a:sym typeface="Lora Bold"/>
+                </a:rPr>
+                <a:t>SIZE : 16 x 70 </a:t>
+              </a:r>
+            </a:p>
+          </p:txBody>
+        </p:sp>
+        <p:sp>
+          <p:nvSpPr>
+            <p:cNvPr name="TextBox 24" id="24"/>
+            <p:cNvSpPr txBox="true"/>
+            <p:nvPr/>
+          </p:nvSpPr>
+          <p:spPr>
+            <a:xfrm rot="0">
+              <a:off x="0" y="1248195"/>
+              <a:ext cx="2221590" cy="311360"/>
+            </a:xfrm>
+            <a:prstGeom prst="rect">
+              <a:avLst/>
+            </a:prstGeom>
+          </p:spPr>
+          <p:txBody>
+            <a:bodyPr anchor="t" rtlCol="false" tIns="0" lIns="0" bIns="0" rIns="0">
+              <a:spAutoFit/>
+            </a:bodyPr>
+            <a:lstStyle/>
+            <a:p>
+              <a:pPr algn="l">
+                <a:lnSpc>
+                  <a:spcPts val="1960"/>
+                </a:lnSpc>
+              </a:pPr>
+              <a:r>
+                <a:rPr lang="en-US" sz="1400" b="true">
+                  <a:solidFill>
+                    <a:srgbClr val="000000"/>
+                  </a:solidFill>
+                  <a:latin typeface="Lora Bold"/>
+                  <a:ea typeface="Lora Bold"/>
+                  <a:cs typeface="Lora Bold"/>
+                  <a:sym typeface="Lora Bold"/>
+                </a:rPr>
+                <a:t>UNITS : 1</a:t>
+              </a:r>
+            </a:p>
+          </p:txBody>
+        </p:sp>
+      </p:grpSp>
+      <p:grpSp>
+        <p:nvGrpSpPr>
+          <p:cNvPr name="Group 25" id="25"/>
+          <p:cNvGrpSpPr/>
+          <p:nvPr/>
+        </p:nvGrpSpPr>
+        <p:grpSpPr>
+          <a:xfrm rot="0">
+            <a:off x="2844997" y="8259550"/>
+            <a:ext cx="3710357" cy="1111178"/>
+            <a:chOff x="0" y="0"/>
+            <a:chExt cx="4947143" cy="1481571"/>
+          </a:xfrm>
+        </p:grpSpPr>
+        <p:sp>
+          <p:nvSpPr>
+            <p:cNvPr name="TextBox 26" id="26"/>
+            <p:cNvSpPr txBox="true"/>
+            <p:nvPr/>
+          </p:nvSpPr>
+          <p:spPr>
+            <a:xfrm rot="0">
+              <a:off x="10044" y="-28575"/>
+              <a:ext cx="4668564" cy="311360"/>
+            </a:xfrm>
+            <a:prstGeom prst="rect">
+              <a:avLst/>
+            </a:prstGeom>
+          </p:spPr>
+          <p:txBody>
+            <a:bodyPr anchor="t" rtlCol="false" tIns="0" lIns="0" bIns="0" rIns="0">
+              <a:spAutoFit/>
+            </a:bodyPr>
+            <a:lstStyle/>
+            <a:p>
+              <a:pPr algn="l">
+                <a:lnSpc>
+                  <a:spcPts val="1960"/>
+                </a:lnSpc>
+              </a:pPr>
+              <a:r>
+                <a:rPr lang="en-US" sz="1400" b="true">
+                  <a:solidFill>
+                    <a:srgbClr val="000000"/>
+                  </a:solidFill>
+                  <a:latin typeface="Lora Bold"/>
+                  <a:ea typeface="Lora Bold"/>
+                  <a:cs typeface="Lora Bold"/>
+                  <a:sym typeface="Lora Bold"/>
+                </a:rPr>
+                <a:t>SPOT LENGTH : 10 seconds </a:t>
+              </a:r>
+            </a:p>
+          </p:txBody>
+        </p:sp>
+        <p:sp>
+          <p:nvSpPr>
+            <p:cNvPr name="TextBox 27" id="27"/>
+            <p:cNvSpPr txBox="true"/>
+            <p:nvPr/>
+          </p:nvSpPr>
+          <p:spPr>
+            <a:xfrm rot="0">
+              <a:off x="0" y="569926"/>
+              <a:ext cx="4688651" cy="311360"/>
+            </a:xfrm>
+            <a:prstGeom prst="rect">
+              <a:avLst/>
+            </a:prstGeom>
+          </p:spPr>
+          <p:txBody>
+            <a:bodyPr anchor="t" rtlCol="false" tIns="0" lIns="0" bIns="0" rIns="0">
+              <a:spAutoFit/>
+            </a:bodyPr>
+            <a:lstStyle/>
+            <a:p>
+              <a:pPr algn="l">
+                <a:lnSpc>
+                  <a:spcPts val="1960"/>
+                </a:lnSpc>
+              </a:pPr>
+              <a:r>
+                <a:rPr lang="en-US" sz="1400" b="true">
+                  <a:solidFill>
+                    <a:srgbClr val="000000"/>
+                  </a:solidFill>
+                  <a:latin typeface="Lora Bold"/>
+                  <a:ea typeface="Lora Bold"/>
+                  <a:cs typeface="Lora Bold"/>
+                  <a:sym typeface="Lora Bold"/>
+                </a:rPr>
+                <a:t>FREQUENCY : 10%</a:t>
+              </a:r>
+            </a:p>
+          </p:txBody>
+        </p:sp>
+        <p:sp>
+          <p:nvSpPr>
+            <p:cNvPr name="TextBox 28" id="28"/>
+            <p:cNvSpPr txBox="true"/>
+            <p:nvPr/>
+          </p:nvSpPr>
+          <p:spPr>
+            <a:xfrm rot="0">
+              <a:off x="0" y="1170211"/>
+              <a:ext cx="4947143" cy="311360"/>
+            </a:xfrm>
+            <a:prstGeom prst="rect">
+              <a:avLst/>
+            </a:prstGeom>
+          </p:spPr>
+          <p:txBody>
+            <a:bodyPr anchor="t" rtlCol="false" tIns="0" lIns="0" bIns="0" rIns="0">
+              <a:spAutoFit/>
+            </a:bodyPr>
+            <a:lstStyle/>
+            <a:p>
+              <a:pPr algn="l">
+                <a:lnSpc>
+                  <a:spcPts val="1960"/>
+                </a:lnSpc>
+              </a:pPr>
+              <a:r>
+                <a:rPr lang="en-US" sz="1400" b="true">
+                  <a:solidFill>
+                    <a:srgbClr val="000000"/>
+                  </a:solidFill>
+                  <a:latin typeface="Lora Bold"/>
+                  <a:ea typeface="Lora Bold"/>
+                  <a:cs typeface="Lora Bold"/>
+                  <a:sym typeface="Lora Bold"/>
+                </a:rPr>
+                <a:t>TRAFFIC : 2,000,000 monthly </a:t>
+              </a:r>
+            </a:p>
+          </p:txBody>
+        </p:sp>
+      </p:grpSp>
+      <p:sp>
+        <p:nvSpPr>
+          <p:cNvPr name="TextBox 29" id="29"/>
+          <p:cNvSpPr txBox="true"/>
+          <p:nvPr/>
+        </p:nvSpPr>
+        <p:spPr>
+          <a:xfrm rot="0">
+            <a:off x="261869" y="256540"/>
+            <a:ext cx="7982216" cy="2571115"/>
+          </a:xfrm>
+          <a:prstGeom prst="rect">
+            <a:avLst/>
+          </a:prstGeom>
+        </p:spPr>
+        <p:txBody>
+          <a:bodyPr anchor="t" rtlCol="false" tIns="0" lIns="0" bIns="0" rIns="0">
+            <a:spAutoFit/>
+          </a:bodyPr>
+          <a:lstStyle/>
+          <a:p>
+            <a:pPr algn="l">
+              <a:lnSpc>
+                <a:spcPts val="6860"/>
+              </a:lnSpc>
+            </a:pPr>
+            <a:r>
+              <a:rPr lang="en-US" sz="4900">
+                <a:solidFill>
+                  <a:srgbClr val="000000"/>
+                </a:solidFill>
+                <a:latin typeface="Prata"/>
+                <a:ea typeface="Prata"/>
+                <a:cs typeface="Prata"/>
+                <a:sym typeface="Prata"/>
+              </a:rPr>
+              <a:t>The Downtown Duo Digitals</a:t>
+            </a:r>
+          </a:p>
+          <a:p>
+            <a:pPr algn="l">
+              <a:lnSpc>
+                <a:spcPts val="6860"/>
+              </a:lnSpc>
+            </a:pPr>
+          </a:p>
+        </p:txBody>
+      </p:sp>
+      <p:grpSp>
+        <p:nvGrpSpPr>
+          <p:cNvPr name="Group 30" id="30"/>
+          <p:cNvGrpSpPr/>
+          <p:nvPr/>
+        </p:nvGrpSpPr>
+        <p:grpSpPr>
+          <a:xfrm rot="0">
+            <a:off x="0" y="2469086"/>
+            <a:ext cx="6465193" cy="5056016"/>
+            <a:chOff x="0" y="0"/>
+            <a:chExt cx="8620257" cy="6741354"/>
+          </a:xfrm>
+        </p:grpSpPr>
+        <p:sp>
+          <p:nvSpPr>
+            <p:cNvPr name="TextBox 31" id="31"/>
+            <p:cNvSpPr txBox="true"/>
+            <p:nvPr/>
+          </p:nvSpPr>
+          <p:spPr>
+            <a:xfrm rot="0">
+              <a:off x="0" y="-38100"/>
+              <a:ext cx="4226472" cy="491479"/>
+            </a:xfrm>
+            <a:prstGeom prst="rect">
+              <a:avLst/>
+            </a:prstGeom>
+          </p:spPr>
+          <p:txBody>
+            <a:bodyPr anchor="t" rtlCol="false" tIns="0" lIns="0" bIns="0" rIns="0">
+              <a:spAutoFit/>
+            </a:bodyPr>
+            <a:lstStyle/>
+            <a:p>
+              <a:pPr algn="ctr">
+                <a:lnSpc>
+                  <a:spcPts val="3156"/>
+                </a:lnSpc>
+              </a:pPr>
+              <a:r>
+                <a:rPr lang="en-US" b="true" sz="2254">
+                  <a:solidFill>
+                    <a:srgbClr val="A12C2B"/>
+                  </a:solidFill>
+                  <a:latin typeface="Lora Bold"/>
+                  <a:ea typeface="Lora Bold"/>
+                  <a:cs typeface="Lora Bold"/>
+                  <a:sym typeface="Lora Bold"/>
+                </a:rPr>
+                <a:t>LOCATION </a:t>
+              </a:r>
+            </a:p>
+          </p:txBody>
+        </p:sp>
+        <p:sp>
+          <p:nvSpPr>
+            <p:cNvPr name="TextBox 32" id="32"/>
+            <p:cNvSpPr txBox="true"/>
+            <p:nvPr/>
+          </p:nvSpPr>
+          <p:spPr>
+            <a:xfrm rot="0">
+              <a:off x="1016505" y="2041618"/>
+              <a:ext cx="2049839" cy="967767"/>
+            </a:xfrm>
+            <a:prstGeom prst="rect">
+              <a:avLst/>
+            </a:prstGeom>
+          </p:spPr>
+          <p:txBody>
+            <a:bodyPr anchor="t" rtlCol="false" tIns="0" lIns="0" bIns="0" rIns="0">
+              <a:spAutoFit/>
+            </a:bodyPr>
+            <a:lstStyle/>
+            <a:p>
+              <a:pPr algn="ctr">
+                <a:lnSpc>
+                  <a:spcPts val="2998"/>
+                </a:lnSpc>
+              </a:pPr>
+              <a:r>
+                <a:rPr lang="en-US" b="true" sz="2141">
+                  <a:solidFill>
+                    <a:srgbClr val="A12C2B"/>
+                  </a:solidFill>
+                  <a:latin typeface="Lora Bold"/>
+                  <a:ea typeface="Lora Bold"/>
+                  <a:cs typeface="Lora Bold"/>
+                  <a:sym typeface="Lora Bold"/>
+                </a:rPr>
+                <a:t>VISIBILITY </a:t>
+              </a:r>
+            </a:p>
+          </p:txBody>
+        </p:sp>
+        <p:sp>
+          <p:nvSpPr>
+            <p:cNvPr name="TextBox 33" id="33"/>
+            <p:cNvSpPr txBox="true"/>
+            <p:nvPr/>
+          </p:nvSpPr>
+          <p:spPr>
+            <a:xfrm rot="0">
+              <a:off x="940858" y="4062197"/>
+              <a:ext cx="2283510" cy="466662"/>
+            </a:xfrm>
+            <a:prstGeom prst="rect">
+              <a:avLst/>
+            </a:prstGeom>
+          </p:spPr>
+          <p:txBody>
+            <a:bodyPr anchor="t" rtlCol="false" tIns="0" lIns="0" bIns="0" rIns="0">
+              <a:spAutoFit/>
+            </a:bodyPr>
+            <a:lstStyle/>
+            <a:p>
+              <a:pPr algn="ctr">
+                <a:lnSpc>
+                  <a:spcPts val="2998"/>
+                </a:lnSpc>
+              </a:pPr>
+              <a:r>
+                <a:rPr lang="en-US" b="true" sz="2141">
+                  <a:solidFill>
+                    <a:srgbClr val="A12C2B"/>
+                  </a:solidFill>
+                  <a:latin typeface="Lora Bold"/>
+                  <a:ea typeface="Lora Bold"/>
+                  <a:cs typeface="Lora Bold"/>
+                  <a:sym typeface="Lora Bold"/>
+                </a:rPr>
+                <a:t>AUDIENCE</a:t>
+              </a:r>
+            </a:p>
+          </p:txBody>
+        </p:sp>
+        <p:sp>
+          <p:nvSpPr>
+            <p:cNvPr name="TextBox 34" id="34"/>
+            <p:cNvSpPr txBox="true"/>
+            <p:nvPr/>
+          </p:nvSpPr>
+          <p:spPr>
+            <a:xfrm rot="0">
+              <a:off x="1092619" y="610929"/>
+              <a:ext cx="7375877" cy="1353398"/>
+            </a:xfrm>
+            <a:prstGeom prst="rect">
+              <a:avLst/>
+            </a:prstGeom>
+          </p:spPr>
+          <p:txBody>
+            <a:bodyPr anchor="t" rtlCol="false" tIns="0" lIns="0" bIns="0" rIns="0">
+              <a:spAutoFit/>
+            </a:bodyPr>
+            <a:lstStyle/>
+            <a:p>
+              <a:pPr algn="l">
+                <a:lnSpc>
+                  <a:spcPts val="2051"/>
+                </a:lnSpc>
+              </a:pPr>
+              <a:r>
+                <a:rPr lang="en-US" sz="1465" b="true">
+                  <a:solidFill>
+                    <a:srgbClr val="000000"/>
+                  </a:solidFill>
+                  <a:latin typeface="Canva Sans Bold"/>
+                  <a:ea typeface="Canva Sans Bold"/>
+                  <a:cs typeface="Canva Sans Bold"/>
+                  <a:sym typeface="Canva Sans Bold"/>
+                </a:rPr>
+                <a:t>Positioned in the heart of Downtown Atlanta, this dual digital spectacular is located within one of the city’s busiest commercial and commuter corridors.</a:t>
+              </a:r>
+            </a:p>
+            <a:p>
+              <a:pPr algn="l">
+                <a:lnSpc>
+                  <a:spcPts val="2051"/>
+                </a:lnSpc>
+              </a:pPr>
+            </a:p>
+          </p:txBody>
+        </p:sp>
+        <p:sp>
+          <p:nvSpPr>
+            <p:cNvPr name="TextBox 35" id="35"/>
+            <p:cNvSpPr txBox="true"/>
+            <p:nvPr/>
+          </p:nvSpPr>
+          <p:spPr>
+            <a:xfrm rot="0">
+              <a:off x="1186135" y="2694465"/>
+              <a:ext cx="7375877" cy="1353398"/>
+            </a:xfrm>
+            <a:prstGeom prst="rect">
+              <a:avLst/>
+            </a:prstGeom>
+          </p:spPr>
+          <p:txBody>
+            <a:bodyPr anchor="t" rtlCol="false" tIns="0" lIns="0" bIns="0" rIns="0">
+              <a:spAutoFit/>
+            </a:bodyPr>
+            <a:lstStyle/>
+            <a:p>
+              <a:pPr algn="l">
+                <a:lnSpc>
+                  <a:spcPts val="2051"/>
+                </a:lnSpc>
+              </a:pPr>
+              <a:r>
+                <a:rPr lang="en-US" sz="1465" b="true">
+                  <a:solidFill>
+                    <a:srgbClr val="000000"/>
+                  </a:solidFill>
+                  <a:latin typeface="Canva Sans Bold"/>
+                  <a:ea typeface="Canva Sans Bold"/>
+                  <a:cs typeface="Canva Sans Bold"/>
+                  <a:sym typeface="Canva Sans Bold"/>
+                </a:rPr>
+                <a:t>The large-format digital screens offer dominant visibility at a high-traffic intersection, benefiting from extended dwelltime due to traffic signals and congestion.  recall.</a:t>
+              </a:r>
+            </a:p>
+            <a:p>
+              <a:pPr algn="l">
+                <a:lnSpc>
+                  <a:spcPts val="2051"/>
+                </a:lnSpc>
+              </a:pPr>
+            </a:p>
+          </p:txBody>
+        </p:sp>
+        <p:sp>
+          <p:nvSpPr>
+            <p:cNvPr name="TextBox 36" id="36"/>
+            <p:cNvSpPr txBox="true"/>
+            <p:nvPr/>
+          </p:nvSpPr>
+          <p:spPr>
+            <a:xfrm rot="0">
+              <a:off x="1244380" y="4700727"/>
+              <a:ext cx="7375877" cy="2040628"/>
+            </a:xfrm>
+            <a:prstGeom prst="rect">
+              <a:avLst/>
+            </a:prstGeom>
+          </p:spPr>
+          <p:txBody>
+            <a:bodyPr anchor="t" rtlCol="false" tIns="0" lIns="0" bIns="0" rIns="0">
+              <a:spAutoFit/>
+            </a:bodyPr>
+            <a:lstStyle/>
+            <a:p>
+              <a:pPr algn="l">
+                <a:lnSpc>
+                  <a:spcPts val="2051"/>
+                </a:lnSpc>
+              </a:pPr>
+              <a:r>
+                <a:rPr lang="en-US" sz="1465" b="true">
+                  <a:solidFill>
+                    <a:srgbClr val="000000"/>
+                  </a:solidFill>
+                  <a:latin typeface="Canva Sans Bold"/>
+                  <a:ea typeface="Canva Sans Bold"/>
+                  <a:cs typeface="Canva Sans Bold"/>
+                  <a:sym typeface="Canva Sans Bold"/>
+                </a:rPr>
+                <a:t> High-density flow of ISC professionals, consultants, and international business travelers moving throughAtlanta’s core, many of whom maintain frequent long-haul connections to the Indian Subcontinent and favor premium travel experiences.</a:t>
+              </a:r>
+            </a:p>
+            <a:p>
+              <a:pPr algn="l">
+                <a:lnSpc>
+                  <a:spcPts val="2051"/>
+                </a:lnSpc>
+              </a:pPr>
+            </a:p>
+          </p:txBody>
+        </p:sp>
+        <p:sp>
+          <p:nvSpPr>
+            <p:cNvPr name="TextBox 37" id="37"/>
+            <p:cNvSpPr txBox="true"/>
+            <p:nvPr/>
+          </p:nvSpPr>
+          <p:spPr>
+            <a:xfrm rot="0">
+              <a:off x="3253377" y="-25400"/>
+              <a:ext cx="1297781" cy="395716"/>
+            </a:xfrm>
+            <a:prstGeom prst="rect">
+              <a:avLst/>
+            </a:prstGeom>
+          </p:spPr>
+          <p:txBody>
+            <a:bodyPr anchor="t" rtlCol="false" tIns="0" lIns="0" bIns="0" rIns="0">
+              <a:spAutoFit/>
+            </a:bodyPr>
+            <a:lstStyle/>
+            <a:p>
+              <a:pPr algn="ctr">
+                <a:lnSpc>
+                  <a:spcPts val="2541"/>
+                </a:lnSpc>
+              </a:pPr>
+              <a:r>
+                <a:rPr lang="en-US" b="true" sz="1815" u="sng">
+                  <a:solidFill>
+                    <a:srgbClr val="60605E"/>
+                  </a:solidFill>
+                  <a:latin typeface="Lora Bold"/>
+                  <a:ea typeface="Lora Bold"/>
+                  <a:cs typeface="Lora Bold"/>
+                  <a:sym typeface="Lora Bold"/>
+                  <a:hlinkClick r:id="rId6" tooltip="https://maps.app.goo.gl/8bjmv966vMDHqreV6"/>
+                </a:rPr>
+                <a:t>Map link</a:t>
+              </a:r>
+            </a:p>
+          </p:txBody>
+        </p:sp>
+      </p:grpSp>
+    </p:spTree>
+  </p:cSld>
+  <p:clrMapOvr>
+    <a:masterClrMapping/>
+  </p:clrMapOvr>
+</p:sld>
+</file>
+
+<file path=ppt/slides/slide6.xml><?xml version="1.0" encoding="utf-8"?>
+<p:sld xmlns:p="http://schemas.openxmlformats.org/presentationml/2006/main" xmlns:a="http://schemas.openxmlformats.org/drawingml/2006/main" xmlns:r="http://schemas.openxmlformats.org/officeDocument/2006/relationships">
+  <p:cSld>
+    <p:bg>
+      <p:bgPr>
+        <a:solidFill>
+          <a:srgbClr val="F6F3ED"/>
+        </a:solidFill>
+      </p:bgPr>
+    </p:bg>
+    <p:spTree>
+      <p:nvGrpSpPr>
+        <p:cNvPr id="1" name=""/>
+        <p:cNvGrpSpPr/>
+        <p:nvPr/>
+      </p:nvGrpSpPr>
+      <p:grpSpPr>
+        <a:xfrm>
+          <a:off x="0" y="0"/>
+          <a:ext cx="0" cy="0"/>
+          <a:chOff x="0" y="0"/>
+          <a:chExt cx="0" cy="0"/>
+        </a:xfrm>
+      </p:grpSpPr>
+      <p:sp>
+        <p:nvSpPr>
+          <p:cNvPr name="AutoShape 2" id="2"/>
+          <p:cNvSpPr/>
+          <p:nvPr/>
+        </p:nvSpPr>
+        <p:spPr>
+          <a:xfrm>
+            <a:off x="-322177" y="247015"/>
+            <a:ext cx="18610177" cy="0"/>
+          </a:xfrm>
+          <a:prstGeom prst="line">
+            <a:avLst/>
+          </a:prstGeom>
+          <a:ln cap="flat" w="9525">
+            <a:solidFill>
+              <a:srgbClr val="000000"/>
+            </a:solidFill>
+            <a:prstDash val="solid"/>
+            <a:headEnd type="none" len="sm" w="sm"/>
+            <a:tailEnd type="none" len="sm" w="sm"/>
+          </a:ln>
+        </p:spPr>
+      </p:sp>
+      <p:sp>
+        <p:nvSpPr>
+          <p:cNvPr name="Freeform 3" id="3"/>
+          <p:cNvSpPr/>
+          <p:nvPr/>
+        </p:nvSpPr>
+        <p:spPr>
+          <a:xfrm flipH="true" flipV="false" rot="0">
+            <a:off x="-694355" y="9438672"/>
+            <a:ext cx="19542952" cy="1140581"/>
+          </a:xfrm>
+          <a:custGeom>
+            <a:avLst/>
+            <a:gdLst/>
+            <a:ahLst/>
+            <a:cxnLst/>
+            <a:rect r="r" b="b" t="t" l="l"/>
+            <a:pathLst>
+              <a:path h="1140581" w="19542952">
+                <a:moveTo>
+                  <a:pt x="19542952" y="0"/>
+                </a:moveTo>
+                <a:lnTo>
+                  <a:pt x="0" y="0"/>
+                </a:lnTo>
+                <a:lnTo>
+                  <a:pt x="0" y="1140581"/>
+                </a:lnTo>
+                <a:lnTo>
+                  <a:pt x="19542952" y="1140581"/>
+                </a:lnTo>
+                <a:lnTo>
+                  <a:pt x="19542952" y="0"/>
+                </a:lnTo>
+                <a:close/>
+              </a:path>
+            </a:pathLst>
+          </a:custGeom>
+          <a:blipFill>
+            <a:blip r:embed="rId2"/>
+            <a:stretch>
+              <a:fillRect l="0" t="-863799" r="0" b="0"/>
+            </a:stretch>
+          </a:blipFill>
+        </p:spPr>
+      </p:sp>
+      <p:sp>
+        <p:nvSpPr>
+          <p:cNvPr name="AutoShape 4" id="4"/>
+          <p:cNvSpPr/>
+          <p:nvPr/>
+        </p:nvSpPr>
+        <p:spPr>
+          <a:xfrm flipV="true">
+            <a:off x="2578156" y="8269006"/>
+            <a:ext cx="0" cy="1040620"/>
+          </a:xfrm>
+          <a:prstGeom prst="line">
+            <a:avLst/>
+          </a:prstGeom>
+          <a:ln cap="flat" w="9525">
+            <a:solidFill>
+              <a:srgbClr val="998D89"/>
+            </a:solidFill>
+            <a:prstDash val="solid"/>
+            <a:headEnd type="none" len="sm" w="sm"/>
+            <a:tailEnd type="none" len="sm" w="sm"/>
+          </a:ln>
+        </p:spPr>
+      </p:sp>
+      <p:grpSp>
+        <p:nvGrpSpPr>
+          <p:cNvPr name="Group 5" id="5"/>
+          <p:cNvGrpSpPr/>
+          <p:nvPr/>
+        </p:nvGrpSpPr>
+        <p:grpSpPr>
+          <a:xfrm rot="0">
+            <a:off x="11531521" y="7851818"/>
+            <a:ext cx="7013042" cy="1949680"/>
+            <a:chOff x="0" y="0"/>
+            <a:chExt cx="9350723" cy="2599574"/>
+          </a:xfrm>
+        </p:grpSpPr>
+        <p:sp>
+          <p:nvSpPr>
+            <p:cNvPr name="AutoShape 6" id="6"/>
+            <p:cNvSpPr/>
+            <p:nvPr/>
+          </p:nvSpPr>
+          <p:spPr>
+            <a:xfrm flipH="true" flipV="true">
+              <a:off x="1363517" y="24184"/>
+              <a:ext cx="4634722" cy="11484"/>
+            </a:xfrm>
+            <a:prstGeom prst="line">
+              <a:avLst/>
+            </a:prstGeom>
+            <a:ln cap="flat" w="12700">
+              <a:solidFill>
+                <a:srgbClr val="998D89"/>
+              </a:solidFill>
+              <a:prstDash val="solid"/>
+              <a:headEnd type="none" len="sm" w="sm"/>
+              <a:tailEnd type="none" len="sm" w="sm"/>
+            </a:ln>
+          </p:spPr>
+        </p:sp>
+        <p:sp>
+          <p:nvSpPr>
+            <p:cNvPr name="AutoShape 7" id="7"/>
+            <p:cNvSpPr/>
+            <p:nvPr/>
+          </p:nvSpPr>
+          <p:spPr>
+            <a:xfrm flipH="true" flipV="true">
+              <a:off x="1372021" y="2586874"/>
+              <a:ext cx="4626217" cy="6350"/>
+            </a:xfrm>
+            <a:prstGeom prst="line">
+              <a:avLst/>
+            </a:prstGeom>
+            <a:ln cap="flat" w="12700">
+              <a:solidFill>
+                <a:srgbClr val="998D89"/>
+              </a:solidFill>
+              <a:prstDash val="solid"/>
+              <a:headEnd type="none" len="sm" w="sm"/>
+              <a:tailEnd type="none" len="sm" w="sm"/>
+            </a:ln>
+          </p:spPr>
+        </p:sp>
+        <p:sp>
+          <p:nvSpPr>
+            <p:cNvPr name="TextBox 8" id="8"/>
+            <p:cNvSpPr txBox="true"/>
+            <p:nvPr/>
+          </p:nvSpPr>
+          <p:spPr>
+            <a:xfrm rot="0">
+              <a:off x="0" y="188267"/>
+              <a:ext cx="6171741" cy="333373"/>
+            </a:xfrm>
+            <a:prstGeom prst="rect">
+              <a:avLst/>
+            </a:prstGeom>
+          </p:spPr>
+          <p:txBody>
+            <a:bodyPr anchor="t" rtlCol="false" tIns="0" lIns="0" bIns="0" rIns="0">
+              <a:spAutoFit/>
+            </a:bodyPr>
+            <a:lstStyle/>
+            <a:p>
+              <a:pPr algn="ctr">
+                <a:lnSpc>
+                  <a:spcPts val="2100"/>
+                </a:lnSpc>
+              </a:pPr>
+              <a:r>
+                <a:rPr lang="en-US" sz="1500" b="true">
+                  <a:solidFill>
+                    <a:srgbClr val="A12C2B"/>
+                  </a:solidFill>
+                  <a:latin typeface="Lora Bold"/>
+                  <a:ea typeface="Lora Bold"/>
+                  <a:cs typeface="Lora Bold"/>
+                  <a:sym typeface="Lora Bold"/>
+                </a:rPr>
+                <a:t>NEARBY LANDMARKS </a:t>
+              </a:r>
+            </a:p>
+          </p:txBody>
+        </p:sp>
+        <p:sp>
+          <p:nvSpPr>
+            <p:cNvPr name="TextBox 9" id="9"/>
+            <p:cNvSpPr txBox="true"/>
+            <p:nvPr/>
+          </p:nvSpPr>
+          <p:spPr>
+            <a:xfrm rot="0">
+              <a:off x="2116761" y="1439487"/>
+              <a:ext cx="7233962" cy="311360"/>
+            </a:xfrm>
+            <a:prstGeom prst="rect">
+              <a:avLst/>
+            </a:prstGeom>
+          </p:spPr>
+          <p:txBody>
+            <a:bodyPr anchor="t" rtlCol="false" tIns="0" lIns="0" bIns="0" rIns="0">
+              <a:spAutoFit/>
+            </a:bodyPr>
+            <a:lstStyle/>
+            <a:p>
+              <a:pPr algn="l">
+                <a:lnSpc>
+                  <a:spcPts val="1960"/>
+                </a:lnSpc>
+              </a:pPr>
+              <a:r>
+                <a:rPr lang="en-US" sz="1400" b="true">
+                  <a:solidFill>
+                    <a:srgbClr val="000000"/>
+                  </a:solidFill>
+                  <a:latin typeface="Lora Bold"/>
+                  <a:ea typeface="Lora Bold"/>
+                  <a:cs typeface="Lora Bold"/>
+                  <a:sym typeface="Lora Bold"/>
+                </a:rPr>
+                <a:t>Broadway - 100m </a:t>
+              </a:r>
+            </a:p>
+          </p:txBody>
+        </p:sp>
+        <p:sp>
+          <p:nvSpPr>
+            <p:cNvPr name="AutoShape 10" id="10"/>
+            <p:cNvSpPr/>
+            <p:nvPr/>
+          </p:nvSpPr>
+          <p:spPr>
+            <a:xfrm flipV="true">
+              <a:off x="1390443" y="0"/>
+              <a:ext cx="0" cy="2557555"/>
+            </a:xfrm>
+            <a:prstGeom prst="line">
+              <a:avLst/>
+            </a:prstGeom>
+            <a:ln cap="flat" w="12700">
+              <a:solidFill>
+                <a:srgbClr val="998D89"/>
+              </a:solidFill>
+              <a:prstDash val="solid"/>
+              <a:headEnd type="none" len="sm" w="sm"/>
+              <a:tailEnd type="none" len="sm" w="sm"/>
+            </a:ln>
+          </p:spPr>
+        </p:sp>
+        <p:sp>
+          <p:nvSpPr>
+            <p:cNvPr name="AutoShape 11" id="11"/>
+            <p:cNvSpPr/>
+            <p:nvPr/>
+          </p:nvSpPr>
+          <p:spPr>
+            <a:xfrm flipV="true">
+              <a:off x="5998238" y="35669"/>
+              <a:ext cx="0" cy="2557555"/>
+            </a:xfrm>
+            <a:prstGeom prst="line">
+              <a:avLst/>
+            </a:prstGeom>
+            <a:ln cap="flat" w="12700">
+              <a:solidFill>
+                <a:srgbClr val="998D89"/>
+              </a:solidFill>
+              <a:prstDash val="solid"/>
+              <a:headEnd type="none" len="sm" w="sm"/>
+              <a:tailEnd type="none" len="sm" w="sm"/>
+            </a:ln>
+          </p:spPr>
+        </p:sp>
+        <p:sp>
+          <p:nvSpPr>
+            <p:cNvPr name="Freeform 12" id="12"/>
+            <p:cNvSpPr/>
+            <p:nvPr/>
+          </p:nvSpPr>
+          <p:spPr>
+            <a:xfrm flipH="false" flipV="false" rot="0">
+              <a:off x="1575256" y="801041"/>
+              <a:ext cx="288169" cy="415378"/>
+            </a:xfrm>
+            <a:custGeom>
+              <a:avLst/>
+              <a:gdLst/>
+              <a:ahLst/>
+              <a:cxnLst/>
+              <a:rect r="r" b="b" t="t" l="l"/>
+              <a:pathLst>
+                <a:path h="415378" w="288169">
+                  <a:moveTo>
+                    <a:pt x="0" y="0"/>
+                  </a:moveTo>
+                  <a:lnTo>
+                    <a:pt x="288168" y="0"/>
+                  </a:lnTo>
+                  <a:lnTo>
+                    <a:pt x="288168" y="415378"/>
+                  </a:lnTo>
+                  <a:lnTo>
+                    <a:pt x="0" y="415378"/>
+                  </a:lnTo>
+                  <a:lnTo>
+                    <a:pt x="0" y="0"/>
+                  </a:lnTo>
+                  <a:close/>
+                </a:path>
+              </a:pathLst>
+            </a:custGeom>
+            <a:blipFill>
+              <a:blip r:embed="rId3">
+                <a:extLst>
+                  <a:ext uri="{96DAC541-7B7A-43D3-8B79-37D633B846F1}">
+                    <asvg:svgBlip xmlns:asvg="http://schemas.microsoft.com/office/drawing/2016/SVG/main" r:embed="rId4"/>
+                  </a:ext>
+                </a:extLst>
+              </a:blip>
+              <a:stretch>
+                <a:fillRect l="0" t="0" r="0" b="0"/>
+              </a:stretch>
+            </a:blipFill>
+          </p:spPr>
+        </p:sp>
+        <p:sp>
+          <p:nvSpPr>
+            <p:cNvPr name="Freeform 13" id="13"/>
+            <p:cNvSpPr/>
+            <p:nvPr/>
+          </p:nvSpPr>
+          <p:spPr>
+            <a:xfrm flipH="false" flipV="false" rot="0">
+              <a:off x="1612693" y="1444503"/>
+              <a:ext cx="288169" cy="415378"/>
+            </a:xfrm>
+            <a:custGeom>
+              <a:avLst/>
+              <a:gdLst/>
+              <a:ahLst/>
+              <a:cxnLst/>
+              <a:rect r="r" b="b" t="t" l="l"/>
+              <a:pathLst>
+                <a:path h="415378" w="288169">
+                  <a:moveTo>
+                    <a:pt x="0" y="0"/>
+                  </a:moveTo>
+                  <a:lnTo>
+                    <a:pt x="288168" y="0"/>
+                  </a:lnTo>
+                  <a:lnTo>
+                    <a:pt x="288168" y="415378"/>
+                  </a:lnTo>
+                  <a:lnTo>
+                    <a:pt x="0" y="415378"/>
+                  </a:lnTo>
+                  <a:lnTo>
+                    <a:pt x="0" y="0"/>
+                  </a:lnTo>
+                  <a:close/>
+                </a:path>
+              </a:pathLst>
+            </a:custGeom>
+            <a:blipFill>
+              <a:blip r:embed="rId3">
+                <a:extLst>
+                  <a:ext uri="{96DAC541-7B7A-43D3-8B79-37D633B846F1}">
+                    <asvg:svgBlip xmlns:asvg="http://schemas.microsoft.com/office/drawing/2016/SVG/main" r:embed="rId4"/>
+                  </a:ext>
+                </a:extLst>
+              </a:blip>
+              <a:stretch>
+                <a:fillRect l="0" t="0" r="0" b="0"/>
+              </a:stretch>
+            </a:blipFill>
+          </p:spPr>
+        </p:sp>
+        <p:sp>
+          <p:nvSpPr>
+            <p:cNvPr name="Freeform 14" id="14"/>
+            <p:cNvSpPr/>
+            <p:nvPr/>
+          </p:nvSpPr>
+          <p:spPr>
+            <a:xfrm flipH="false" flipV="false" rot="0">
+              <a:off x="1645106" y="2113366"/>
+              <a:ext cx="288169" cy="415378"/>
+            </a:xfrm>
+            <a:custGeom>
+              <a:avLst/>
+              <a:gdLst/>
+              <a:ahLst/>
+              <a:cxnLst/>
+              <a:rect r="r" b="b" t="t" l="l"/>
+              <a:pathLst>
+                <a:path h="415378" w="288169">
+                  <a:moveTo>
+                    <a:pt x="0" y="0"/>
+                  </a:moveTo>
+                  <a:lnTo>
+                    <a:pt x="288168" y="0"/>
+                  </a:lnTo>
+                  <a:lnTo>
+                    <a:pt x="288168" y="415378"/>
+                  </a:lnTo>
+                  <a:lnTo>
+                    <a:pt x="0" y="415378"/>
+                  </a:lnTo>
+                  <a:lnTo>
+                    <a:pt x="0" y="0"/>
+                  </a:lnTo>
+                  <a:close/>
+                </a:path>
+              </a:pathLst>
+            </a:custGeom>
+            <a:blipFill>
+              <a:blip r:embed="rId3">
+                <a:extLst>
+                  <a:ext uri="{96DAC541-7B7A-43D3-8B79-37D633B846F1}">
+                    <asvg:svgBlip xmlns:asvg="http://schemas.microsoft.com/office/drawing/2016/SVG/main" r:embed="rId4"/>
+                  </a:ext>
+                </a:extLst>
+              </a:blip>
+              <a:stretch>
+                <a:fillRect l="0" t="0" r="0" b="0"/>
+              </a:stretch>
+            </a:blipFill>
+          </p:spPr>
+        </p:sp>
+        <p:sp>
+          <p:nvSpPr>
+            <p:cNvPr name="AutoShape 15" id="15"/>
+            <p:cNvSpPr/>
+            <p:nvPr/>
+          </p:nvSpPr>
+          <p:spPr>
+            <a:xfrm flipH="true">
+              <a:off x="2067299" y="1271784"/>
+              <a:ext cx="3990464" cy="0"/>
+            </a:xfrm>
+            <a:prstGeom prst="line">
+              <a:avLst/>
+            </a:prstGeom>
+            <a:ln cap="flat" w="12700">
+              <a:solidFill>
+                <a:srgbClr val="998D89"/>
+              </a:solidFill>
+              <a:prstDash val="solid"/>
+              <a:headEnd type="none" len="sm" w="sm"/>
+              <a:tailEnd type="none" len="sm" w="sm"/>
+            </a:ln>
+          </p:spPr>
+        </p:sp>
+        <p:sp>
+          <p:nvSpPr>
+            <p:cNvPr name="AutoShape 16" id="16"/>
+            <p:cNvSpPr/>
+            <p:nvPr/>
+          </p:nvSpPr>
+          <p:spPr>
+            <a:xfrm flipH="true" flipV="true">
+              <a:off x="2050685" y="1957003"/>
+              <a:ext cx="3947554" cy="0"/>
+            </a:xfrm>
+            <a:prstGeom prst="line">
+              <a:avLst/>
+            </a:prstGeom>
+            <a:ln cap="flat" w="12700">
+              <a:solidFill>
+                <a:srgbClr val="998D89"/>
+              </a:solidFill>
+              <a:prstDash val="solid"/>
+              <a:headEnd type="none" len="sm" w="sm"/>
+              <a:tailEnd type="none" len="sm" w="sm"/>
+            </a:ln>
+          </p:spPr>
+        </p:sp>
+        <p:sp>
+          <p:nvSpPr>
+            <p:cNvPr name="TextBox 17" id="17"/>
+            <p:cNvSpPr txBox="true"/>
+            <p:nvPr/>
+          </p:nvSpPr>
+          <p:spPr>
+            <a:xfrm rot="0">
+              <a:off x="2067288" y="763666"/>
+              <a:ext cx="5756269" cy="311360"/>
+            </a:xfrm>
+            <a:prstGeom prst="rect">
+              <a:avLst/>
+            </a:prstGeom>
+          </p:spPr>
+          <p:txBody>
+            <a:bodyPr anchor="t" rtlCol="false" tIns="0" lIns="0" bIns="0" rIns="0">
+              <a:spAutoFit/>
+            </a:bodyPr>
+            <a:lstStyle/>
+            <a:p>
+              <a:pPr algn="l">
+                <a:lnSpc>
+                  <a:spcPts val="1960"/>
+                </a:lnSpc>
+              </a:pPr>
+              <a:r>
+                <a:rPr lang="en-US" sz="1400" b="true">
+                  <a:solidFill>
+                    <a:srgbClr val="000000"/>
+                  </a:solidFill>
+                  <a:latin typeface="Lora Bold"/>
+                  <a:ea typeface="Lora Bold"/>
+                  <a:cs typeface="Lora Bold"/>
+                  <a:sym typeface="Lora Bold"/>
+                </a:rPr>
+                <a:t>Broadway - 100m </a:t>
+              </a:r>
+            </a:p>
+          </p:txBody>
+        </p:sp>
+        <p:sp>
+          <p:nvSpPr>
+            <p:cNvPr name="TextBox 18" id="18"/>
+            <p:cNvSpPr txBox="true"/>
+            <p:nvPr/>
+          </p:nvSpPr>
+          <p:spPr>
+            <a:xfrm rot="0">
+              <a:off x="2161874" y="2095339"/>
+              <a:ext cx="6229889" cy="311360"/>
+            </a:xfrm>
+            <a:prstGeom prst="rect">
+              <a:avLst/>
+            </a:prstGeom>
+          </p:spPr>
+          <p:txBody>
+            <a:bodyPr anchor="t" rtlCol="false" tIns="0" lIns="0" bIns="0" rIns="0">
+              <a:spAutoFit/>
+            </a:bodyPr>
+            <a:lstStyle/>
+            <a:p>
+              <a:pPr algn="l">
+                <a:lnSpc>
+                  <a:spcPts val="1960"/>
+                </a:lnSpc>
+              </a:pPr>
+              <a:r>
+                <a:rPr lang="en-US" sz="1400" b="true">
+                  <a:solidFill>
+                    <a:srgbClr val="000000"/>
+                  </a:solidFill>
+                  <a:latin typeface="Lora Bold"/>
+                  <a:ea typeface="Lora Bold"/>
+                  <a:cs typeface="Lora Bold"/>
+                  <a:sym typeface="Lora Bold"/>
+                </a:rPr>
+                <a:t>Broadway - 100 m </a:t>
+              </a:r>
+            </a:p>
+          </p:txBody>
+        </p:sp>
+      </p:grpSp>
+      <p:sp>
+        <p:nvSpPr>
+          <p:cNvPr name="Freeform 19" id="19"/>
+          <p:cNvSpPr/>
+          <p:nvPr/>
+        </p:nvSpPr>
+        <p:spPr>
+          <a:xfrm flipH="false" flipV="false" rot="0">
+            <a:off x="8429758" y="247015"/>
+            <a:ext cx="9858242" cy="7278087"/>
+          </a:xfrm>
+          <a:custGeom>
+            <a:avLst/>
+            <a:gdLst/>
+            <a:ahLst/>
+            <a:cxnLst/>
+            <a:rect r="r" b="b" t="t" l="l"/>
+            <a:pathLst>
+              <a:path h="7278087" w="9858242">
+                <a:moveTo>
+                  <a:pt x="0" y="0"/>
+                </a:moveTo>
+                <a:lnTo>
+                  <a:pt x="9858242" y="0"/>
+                </a:lnTo>
+                <a:lnTo>
+                  <a:pt x="9858242" y="7278087"/>
+                </a:lnTo>
+                <a:lnTo>
+                  <a:pt x="0" y="7278087"/>
+                </a:lnTo>
+                <a:lnTo>
+                  <a:pt x="0" y="0"/>
+                </a:lnTo>
+                <a:close/>
+              </a:path>
+            </a:pathLst>
+          </a:custGeom>
+          <a:blipFill>
+            <a:blip r:embed="rId5"/>
+            <a:stretch>
+              <a:fillRect l="-2572" t="-6139" r="-9139" b="0"/>
+            </a:stretch>
+          </a:blipFill>
+        </p:spPr>
+      </p:sp>
+      <p:sp>
+        <p:nvSpPr>
+          <p:cNvPr name="TextBox 20" id="20"/>
+          <p:cNvSpPr txBox="true"/>
+          <p:nvPr/>
+        </p:nvSpPr>
+        <p:spPr>
+          <a:xfrm rot="0">
+            <a:off x="71369" y="7545114"/>
+            <a:ext cx="4628806" cy="306704"/>
+          </a:xfrm>
+          <a:prstGeom prst="rect">
+            <a:avLst/>
+          </a:prstGeom>
+        </p:spPr>
+        <p:txBody>
+          <a:bodyPr anchor="t" rtlCol="false" tIns="0" lIns="0" bIns="0" rIns="0">
+            <a:spAutoFit/>
+          </a:bodyPr>
+          <a:lstStyle/>
+          <a:p>
+            <a:pPr algn="ctr">
+              <a:lnSpc>
+                <a:spcPts val="2520"/>
+              </a:lnSpc>
+            </a:pPr>
+            <a:r>
+              <a:rPr lang="en-US" b="true" sz="1800">
+                <a:solidFill>
+                  <a:srgbClr val="A12C2B"/>
+                </a:solidFill>
+                <a:latin typeface="Lora Bold"/>
+                <a:ea typeface="Lora Bold"/>
+                <a:cs typeface="Lora Bold"/>
+                <a:sym typeface="Lora Bold"/>
+              </a:rPr>
+              <a:t>TECHNICAL SPECIFICATIONS</a:t>
+            </a:r>
+          </a:p>
+        </p:txBody>
+      </p:sp>
+      <p:grpSp>
+        <p:nvGrpSpPr>
+          <p:cNvPr name="Group 21" id="21"/>
+          <p:cNvGrpSpPr/>
+          <p:nvPr/>
+        </p:nvGrpSpPr>
+        <p:grpSpPr>
+          <a:xfrm rot="0">
+            <a:off x="754572" y="8230306"/>
+            <a:ext cx="1771196" cy="1169666"/>
+            <a:chOff x="0" y="0"/>
+            <a:chExt cx="2361594" cy="1559555"/>
+          </a:xfrm>
+        </p:grpSpPr>
+        <p:sp>
+          <p:nvSpPr>
+            <p:cNvPr name="TextBox 22" id="22"/>
+            <p:cNvSpPr txBox="true"/>
+            <p:nvPr/>
+          </p:nvSpPr>
+          <p:spPr>
+            <a:xfrm rot="0">
+              <a:off x="0" y="-28575"/>
+              <a:ext cx="2256628" cy="311360"/>
+            </a:xfrm>
+            <a:prstGeom prst="rect">
+              <a:avLst/>
+            </a:prstGeom>
+          </p:spPr>
+          <p:txBody>
+            <a:bodyPr anchor="t" rtlCol="false" tIns="0" lIns="0" bIns="0" rIns="0">
+              <a:spAutoFit/>
+            </a:bodyPr>
+            <a:lstStyle/>
+            <a:p>
+              <a:pPr algn="l">
+                <a:lnSpc>
+                  <a:spcPts val="1960"/>
+                </a:lnSpc>
+              </a:pPr>
+              <a:r>
+                <a:rPr lang="en-US" sz="1400" b="true">
+                  <a:solidFill>
+                    <a:srgbClr val="000000"/>
+                  </a:solidFill>
+                  <a:latin typeface="Lora Bold"/>
+                  <a:ea typeface="Lora Bold"/>
+                  <a:cs typeface="Lora Bold"/>
+                  <a:sym typeface="Lora Bold"/>
+                </a:rPr>
+                <a:t>FORMAT : Static  </a:t>
+              </a:r>
+            </a:p>
+          </p:txBody>
+        </p:sp>
+        <p:sp>
+          <p:nvSpPr>
+            <p:cNvPr name="TextBox 23" id="23"/>
+            <p:cNvSpPr txBox="true"/>
+            <p:nvPr/>
+          </p:nvSpPr>
+          <p:spPr>
+            <a:xfrm rot="0">
+              <a:off x="0" y="558210"/>
+              <a:ext cx="2361594" cy="311360"/>
+            </a:xfrm>
+            <a:prstGeom prst="rect">
+              <a:avLst/>
+            </a:prstGeom>
+          </p:spPr>
+          <p:txBody>
+            <a:bodyPr anchor="t" rtlCol="false" tIns="0" lIns="0" bIns="0" rIns="0">
+              <a:spAutoFit/>
+            </a:bodyPr>
+            <a:lstStyle/>
+            <a:p>
+              <a:pPr algn="l">
+                <a:lnSpc>
+                  <a:spcPts val="1960"/>
+                </a:lnSpc>
+              </a:pPr>
+              <a:r>
+                <a:rPr lang="en-US" sz="1400" b="true">
+                  <a:solidFill>
+                    <a:srgbClr val="000000"/>
+                  </a:solidFill>
+                  <a:latin typeface="Lora Bold"/>
+                  <a:ea typeface="Lora Bold"/>
+                  <a:cs typeface="Lora Bold"/>
+                  <a:sym typeface="Lora Bold"/>
+                </a:rPr>
+                <a:t>SIZE : 45 x 135  </a:t>
+              </a:r>
+            </a:p>
+          </p:txBody>
+        </p:sp>
+        <p:sp>
+          <p:nvSpPr>
+            <p:cNvPr name="TextBox 24" id="24"/>
+            <p:cNvSpPr txBox="true"/>
+            <p:nvPr/>
+          </p:nvSpPr>
+          <p:spPr>
+            <a:xfrm rot="0">
+              <a:off x="0" y="1248195"/>
+              <a:ext cx="2221590" cy="311360"/>
+            </a:xfrm>
+            <a:prstGeom prst="rect">
+              <a:avLst/>
+            </a:prstGeom>
+          </p:spPr>
+          <p:txBody>
+            <a:bodyPr anchor="t" rtlCol="false" tIns="0" lIns="0" bIns="0" rIns="0">
+              <a:spAutoFit/>
+            </a:bodyPr>
+            <a:lstStyle/>
+            <a:p>
+              <a:pPr algn="l">
+                <a:lnSpc>
+                  <a:spcPts val="1960"/>
+                </a:lnSpc>
+              </a:pPr>
+              <a:r>
+                <a:rPr lang="en-US" sz="1400" b="true">
+                  <a:solidFill>
+                    <a:srgbClr val="000000"/>
+                  </a:solidFill>
+                  <a:latin typeface="Lora Bold"/>
+                  <a:ea typeface="Lora Bold"/>
+                  <a:cs typeface="Lora Bold"/>
+                  <a:sym typeface="Lora Bold"/>
+                </a:rPr>
+                <a:t>UNITS : 1</a:t>
+              </a:r>
+            </a:p>
+          </p:txBody>
+        </p:sp>
+      </p:grpSp>
+      <p:grpSp>
+        <p:nvGrpSpPr>
+          <p:cNvPr name="Group 25" id="25"/>
+          <p:cNvGrpSpPr/>
+          <p:nvPr/>
+        </p:nvGrpSpPr>
+        <p:grpSpPr>
+          <a:xfrm rot="0">
+            <a:off x="2844997" y="8259550"/>
+            <a:ext cx="3710357" cy="1111178"/>
+            <a:chOff x="0" y="0"/>
+            <a:chExt cx="4947143" cy="1481571"/>
+          </a:xfrm>
+        </p:grpSpPr>
+        <p:sp>
+          <p:nvSpPr>
+            <p:cNvPr name="TextBox 26" id="26"/>
+            <p:cNvSpPr txBox="true"/>
+            <p:nvPr/>
+          </p:nvSpPr>
+          <p:spPr>
+            <a:xfrm rot="0">
+              <a:off x="10044" y="-28575"/>
+              <a:ext cx="4668564" cy="311360"/>
+            </a:xfrm>
+            <a:prstGeom prst="rect">
+              <a:avLst/>
+            </a:prstGeom>
+          </p:spPr>
+          <p:txBody>
+            <a:bodyPr anchor="t" rtlCol="false" tIns="0" lIns="0" bIns="0" rIns="0">
+              <a:spAutoFit/>
+            </a:bodyPr>
+            <a:lstStyle/>
+            <a:p>
+              <a:pPr algn="l">
+                <a:lnSpc>
+                  <a:spcPts val="1960"/>
+                </a:lnSpc>
+              </a:pPr>
+              <a:r>
+                <a:rPr lang="en-US" sz="1400" b="true">
+                  <a:solidFill>
+                    <a:srgbClr val="000000"/>
+                  </a:solidFill>
+                  <a:latin typeface="Lora Bold"/>
+                  <a:ea typeface="Lora Bold"/>
+                  <a:cs typeface="Lora Bold"/>
+                  <a:sym typeface="Lora Bold"/>
+                </a:rPr>
+                <a:t>SPOT LENGTH : 10 seconds </a:t>
+              </a:r>
+            </a:p>
+          </p:txBody>
+        </p:sp>
+        <p:sp>
+          <p:nvSpPr>
+            <p:cNvPr name="TextBox 27" id="27"/>
+            <p:cNvSpPr txBox="true"/>
+            <p:nvPr/>
+          </p:nvSpPr>
+          <p:spPr>
+            <a:xfrm rot="0">
+              <a:off x="0" y="569926"/>
+              <a:ext cx="4688651" cy="311360"/>
+            </a:xfrm>
+            <a:prstGeom prst="rect">
+              <a:avLst/>
+            </a:prstGeom>
+          </p:spPr>
+          <p:txBody>
+            <a:bodyPr anchor="t" rtlCol="false" tIns="0" lIns="0" bIns="0" rIns="0">
+              <a:spAutoFit/>
+            </a:bodyPr>
+            <a:lstStyle/>
+            <a:p>
+              <a:pPr algn="l">
+                <a:lnSpc>
+                  <a:spcPts val="1960"/>
+                </a:lnSpc>
+              </a:pPr>
+              <a:r>
+                <a:rPr lang="en-US" sz="1400" b="true">
+                  <a:solidFill>
+                    <a:srgbClr val="000000"/>
+                  </a:solidFill>
+                  <a:latin typeface="Lora Bold"/>
+                  <a:ea typeface="Lora Bold"/>
+                  <a:cs typeface="Lora Bold"/>
+                  <a:sym typeface="Lora Bold"/>
+                </a:rPr>
+                <a:t>FREQUENCY : 10%</a:t>
+              </a:r>
+            </a:p>
+          </p:txBody>
+        </p:sp>
+        <p:sp>
+          <p:nvSpPr>
+            <p:cNvPr name="TextBox 28" id="28"/>
+            <p:cNvSpPr txBox="true"/>
+            <p:nvPr/>
+          </p:nvSpPr>
+          <p:spPr>
+            <a:xfrm rot="0">
+              <a:off x="0" y="1170211"/>
+              <a:ext cx="4947143" cy="311360"/>
+            </a:xfrm>
+            <a:prstGeom prst="rect">
+              <a:avLst/>
+            </a:prstGeom>
+          </p:spPr>
+          <p:txBody>
+            <a:bodyPr anchor="t" rtlCol="false" tIns="0" lIns="0" bIns="0" rIns="0">
+              <a:spAutoFit/>
+            </a:bodyPr>
+            <a:lstStyle/>
+            <a:p>
+              <a:pPr algn="l">
+                <a:lnSpc>
+                  <a:spcPts val="1960"/>
+                </a:lnSpc>
+              </a:pPr>
+              <a:r>
+                <a:rPr lang="en-US" sz="1400" b="true">
+                  <a:solidFill>
+                    <a:srgbClr val="000000"/>
+                  </a:solidFill>
+                  <a:latin typeface="Lora Bold"/>
+                  <a:ea typeface="Lora Bold"/>
+                  <a:cs typeface="Lora Bold"/>
+                  <a:sym typeface="Lora Bold"/>
+                </a:rPr>
+                <a:t>TRAFFIC : 2,000,000 monthly </a:t>
+              </a:r>
+            </a:p>
+          </p:txBody>
+        </p:sp>
+      </p:grpSp>
+      <p:sp>
+        <p:nvSpPr>
+          <p:cNvPr name="TextBox 29" id="29"/>
+          <p:cNvSpPr txBox="true"/>
+          <p:nvPr/>
+        </p:nvSpPr>
+        <p:spPr>
+          <a:xfrm rot="0">
+            <a:off x="-2203518" y="330406"/>
+            <a:ext cx="10872229" cy="1704340"/>
+          </a:xfrm>
+          <a:prstGeom prst="rect">
+            <a:avLst/>
+          </a:prstGeom>
+        </p:spPr>
+        <p:txBody>
+          <a:bodyPr anchor="t" rtlCol="false" tIns="0" lIns="0" bIns="0" rIns="0">
+            <a:spAutoFit/>
+          </a:bodyPr>
+          <a:lstStyle/>
+          <a:p>
+            <a:pPr algn="ctr">
+              <a:lnSpc>
+                <a:spcPts val="6860"/>
+              </a:lnSpc>
+            </a:pPr>
+            <a:r>
+              <a:rPr lang="en-US" sz="4900">
+                <a:solidFill>
+                  <a:srgbClr val="000000"/>
+                </a:solidFill>
+                <a:latin typeface="Prata"/>
+                <a:ea typeface="Prata"/>
+                <a:cs typeface="Prata"/>
+                <a:sym typeface="Prata"/>
+              </a:rPr>
+              <a:t>EVEREST DIGITAL </a:t>
+            </a:r>
+          </a:p>
+          <a:p>
+            <a:pPr algn="ctr">
+              <a:lnSpc>
+                <a:spcPts val="6860"/>
+              </a:lnSpc>
+            </a:pPr>
+          </a:p>
+        </p:txBody>
+      </p:sp>
+      <p:sp>
+        <p:nvSpPr>
+          <p:cNvPr name="TextBox 30" id="30"/>
+          <p:cNvSpPr txBox="true"/>
+          <p:nvPr/>
+        </p:nvSpPr>
+        <p:spPr>
+          <a:xfrm rot="0">
+            <a:off x="0" y="2641891"/>
+            <a:ext cx="3169854" cy="378134"/>
+          </a:xfrm>
+          <a:prstGeom prst="rect">
+            <a:avLst/>
+          </a:prstGeom>
+        </p:spPr>
+        <p:txBody>
+          <a:bodyPr anchor="t" rtlCol="false" tIns="0" lIns="0" bIns="0" rIns="0">
+            <a:spAutoFit/>
+          </a:bodyPr>
+          <a:lstStyle/>
+          <a:p>
+            <a:pPr algn="ctr">
+              <a:lnSpc>
+                <a:spcPts val="3156"/>
+              </a:lnSpc>
+            </a:pPr>
+            <a:r>
+              <a:rPr lang="en-US" b="true" sz="2254">
                 <a:solidFill>
                   <a:srgbClr val="A12C2B"/>
                 </a:solidFill>
@@ -4177,14 +7355,14 @@
       </p:sp>
       <p:sp>
         <p:nvSpPr>
-          <p:cNvPr name="TextBox 27" id="27"/>
+          <p:cNvPr name="TextBox 31" id="31"/>
           <p:cNvSpPr txBox="true"/>
           <p:nvPr/>
         </p:nvSpPr>
         <p:spPr>
           <a:xfrm rot="0">
-            <a:off x="10106429" y="4153337"/>
-            <a:ext cx="1681629" cy="313689"/>
+            <a:off x="762378" y="4248486"/>
+            <a:ext cx="1537380" cy="735350"/>
           </a:xfrm>
           <a:prstGeom prst="rect">
             <a:avLst/>
@@ -4198,11 +7376,11 @@
           <a:p>
             <a:pPr algn="ctr">
               <a:lnSpc>
-                <a:spcPts val="2660"/>
+                <a:spcPts val="2998"/>
               </a:lnSpc>
             </a:pPr>
             <a:r>
-              <a:rPr lang="en-US" b="true" sz="1900">
+              <a:rPr lang="en-US" b="true" sz="2141">
                 <a:solidFill>
                   <a:srgbClr val="A12C2B"/>
                 </a:solidFill>
@@ -4218,14 +7396,14 @@
       </p:sp>
       <p:sp>
         <p:nvSpPr>
-          <p:cNvPr name="TextBox 28" id="28"/>
+          <p:cNvPr name="TextBox 32" id="32"/>
           <p:cNvSpPr txBox="true"/>
           <p:nvPr/>
         </p:nvSpPr>
         <p:spPr>
           <a:xfrm rot="0">
-            <a:off x="9991531" y="6203125"/>
-            <a:ext cx="1873326" cy="313689"/>
+            <a:off x="705643" y="5763920"/>
+            <a:ext cx="1712632" cy="359522"/>
           </a:xfrm>
           <a:prstGeom prst="rect">
             <a:avLst/>
@@ -4239,11 +7417,11 @@
           <a:p>
             <a:pPr algn="ctr">
               <a:lnSpc>
-                <a:spcPts val="2660"/>
+                <a:spcPts val="2998"/>
               </a:lnSpc>
             </a:pPr>
             <a:r>
-              <a:rPr lang="en-US" b="true" sz="1900">
+              <a:rPr lang="en-US" b="true" sz="2141">
                 <a:solidFill>
                   <a:srgbClr val="A12C2B"/>
                 </a:solidFill>
@@ -4259,14 +7437,14 @@
       </p:sp>
       <p:sp>
         <p:nvSpPr>
-          <p:cNvPr name="TextBox 29" id="29"/>
+          <p:cNvPr name="TextBox 33" id="33"/>
           <p:cNvSpPr txBox="true"/>
           <p:nvPr/>
         </p:nvSpPr>
         <p:spPr>
           <a:xfrm rot="0">
-            <a:off x="-408254" y="8313504"/>
-            <a:ext cx="4628806" cy="264159"/>
+            <a:off x="819464" y="3131044"/>
+            <a:ext cx="6595432" cy="1022193"/>
           </a:xfrm>
           <a:prstGeom prst="rect">
             <a:avLst/>
@@ -4278,13 +7456,850 @@
           </a:bodyPr>
           <a:lstStyle/>
           <a:p>
-            <a:pPr algn="ctr">
+            <a:pPr algn="l">
               <a:lnSpc>
-                <a:spcPts val="2240"/>
+                <a:spcPts val="2051"/>
               </a:lnSpc>
             </a:pPr>
             <a:r>
-              <a:rPr lang="en-US" b="true" sz="1600">
+              <a:rPr lang="en-US" sz="1465" b="true">
+                <a:solidFill>
+                  <a:srgbClr val="000000"/>
+                </a:solidFill>
+                <a:latin typeface="Canva Sans Bold"/>
+                <a:ea typeface="Canva Sans Bold"/>
+                <a:cs typeface="Canva Sans Bold"/>
+                <a:sym typeface="Canva Sans Bold"/>
+              </a:rPr>
+              <a:t>Located in the NoMad district, one of Manhattan’s fastest-growing luxury and hospitality zones, thisunit sits near Virgin Hotels New York City and key avenues connecting Midtown and Flatiron.</a:t>
+            </a:r>
+          </a:p>
+          <a:p>
+            <a:pPr algn="l">
+              <a:lnSpc>
+                <a:spcPts val="2051"/>
+              </a:lnSpc>
+            </a:pPr>
+          </a:p>
+        </p:txBody>
+      </p:sp>
+      <p:sp>
+        <p:nvSpPr>
+          <p:cNvPr name="TextBox 34" id="34"/>
+          <p:cNvSpPr txBox="true"/>
+          <p:nvPr/>
+        </p:nvSpPr>
+        <p:spPr>
+          <a:xfrm rot="0">
+            <a:off x="889601" y="4740502"/>
+            <a:ext cx="6757273" cy="1022193"/>
+          </a:xfrm>
+          <a:prstGeom prst="rect">
+            <a:avLst/>
+          </a:prstGeom>
+        </p:spPr>
+        <p:txBody>
+          <a:bodyPr anchor="t" rtlCol="false" tIns="0" lIns="0" bIns="0" rIns="0">
+            <a:spAutoFit/>
+          </a:bodyPr>
+          <a:lstStyle/>
+          <a:p>
+            <a:pPr algn="l">
+              <a:lnSpc>
+                <a:spcPts val="2051"/>
+              </a:lnSpc>
+            </a:pPr>
+            <a:r>
+              <a:rPr lang="en-US" sz="1465" b="true">
+                <a:solidFill>
+                  <a:srgbClr val="000000"/>
+                </a:solidFill>
+                <a:latin typeface="Canva Sans Bold"/>
+                <a:ea typeface="Canva Sans Bold"/>
+                <a:cs typeface="Canva Sans Bold"/>
+                <a:sym typeface="Canva Sans Bold"/>
+              </a:rPr>
+              <a:t>A high-impact, architecturally integrated digital unit offering premium, eye-level exposure. While not mass-reach like Times Square, it delivers highly targeted visibility within a concentrated, upscaleenvironment.</a:t>
+            </a:r>
+          </a:p>
+          <a:p>
+            <a:pPr algn="l">
+              <a:lnSpc>
+                <a:spcPts val="2051"/>
+              </a:lnSpc>
+            </a:pPr>
+          </a:p>
+        </p:txBody>
+      </p:sp>
+      <p:sp>
+        <p:nvSpPr>
+          <p:cNvPr name="TextBox 35" id="35"/>
+          <p:cNvSpPr txBox="true"/>
+          <p:nvPr/>
+        </p:nvSpPr>
+        <p:spPr>
+          <a:xfrm rot="0">
+            <a:off x="933285" y="6245199"/>
+            <a:ext cx="5531907" cy="1022193"/>
+          </a:xfrm>
+          <a:prstGeom prst="rect">
+            <a:avLst/>
+          </a:prstGeom>
+        </p:spPr>
+        <p:txBody>
+          <a:bodyPr anchor="t" rtlCol="false" tIns="0" lIns="0" bIns="0" rIns="0">
+            <a:spAutoFit/>
+          </a:bodyPr>
+          <a:lstStyle/>
+          <a:p>
+            <a:pPr algn="l">
+              <a:lnSpc>
+                <a:spcPts val="2051"/>
+              </a:lnSpc>
+            </a:pPr>
+            <a:r>
+              <a:rPr lang="en-US" sz="1465" b="true">
+                <a:solidFill>
+                  <a:srgbClr val="000000"/>
+                </a:solidFill>
+                <a:latin typeface="Canva Sans Bold"/>
+                <a:ea typeface="Canva Sans Bold"/>
+                <a:cs typeface="Canva Sans Bold"/>
+                <a:sym typeface="Canva Sans Bold"/>
+              </a:rPr>
+              <a:t>Targets affluent professionals, international travelers, and upscale consumers frequenting luxury hotels, fine dining venues, and corporate offices.</a:t>
+            </a:r>
+          </a:p>
+          <a:p>
+            <a:pPr algn="l">
+              <a:lnSpc>
+                <a:spcPts val="2051"/>
+              </a:lnSpc>
+            </a:pPr>
+          </a:p>
+        </p:txBody>
+      </p:sp>
+      <p:sp>
+        <p:nvSpPr>
+          <p:cNvPr name="TextBox 36" id="36"/>
+          <p:cNvSpPr txBox="true"/>
+          <p:nvPr/>
+        </p:nvSpPr>
+        <p:spPr>
+          <a:xfrm rot="0">
+            <a:off x="2440033" y="2651416"/>
+            <a:ext cx="973336" cy="306312"/>
+          </a:xfrm>
+          <a:prstGeom prst="rect">
+            <a:avLst/>
+          </a:prstGeom>
+        </p:spPr>
+        <p:txBody>
+          <a:bodyPr anchor="t" rtlCol="false" tIns="0" lIns="0" bIns="0" rIns="0">
+            <a:spAutoFit/>
+          </a:bodyPr>
+          <a:lstStyle/>
+          <a:p>
+            <a:pPr algn="ctr">
+              <a:lnSpc>
+                <a:spcPts val="2541"/>
+              </a:lnSpc>
+            </a:pPr>
+            <a:r>
+              <a:rPr lang="en-US" b="true" sz="1815" u="sng">
+                <a:solidFill>
+                  <a:srgbClr val="60605E"/>
+                </a:solidFill>
+                <a:latin typeface="Lora Bold"/>
+                <a:ea typeface="Lora Bold"/>
+                <a:cs typeface="Lora Bold"/>
+                <a:sym typeface="Lora Bold"/>
+                <a:hlinkClick r:id="rId6" tooltip="https://maps.app.goo.gl/8bjmv966vMDHqreV6"/>
+              </a:rPr>
+              <a:t>Map link</a:t>
+            </a:r>
+          </a:p>
+        </p:txBody>
+      </p:sp>
+    </p:spTree>
+  </p:cSld>
+  <p:clrMapOvr>
+    <a:masterClrMapping/>
+  </p:clrMapOvr>
+</p:sld>
+</file>
+
+<file path=ppt/slides/slide7.xml><?xml version="1.0" encoding="utf-8"?>
+<p:sld xmlns:p="http://schemas.openxmlformats.org/presentationml/2006/main" xmlns:a="http://schemas.openxmlformats.org/drawingml/2006/main" xmlns:r="http://schemas.openxmlformats.org/officeDocument/2006/relationships">
+  <p:cSld>
+    <p:bg>
+      <p:bgPr>
+        <a:solidFill>
+          <a:srgbClr val="F6F3ED"/>
+        </a:solidFill>
+      </p:bgPr>
+    </p:bg>
+    <p:spTree>
+      <p:nvGrpSpPr>
+        <p:cNvPr id="1" name=""/>
+        <p:cNvGrpSpPr/>
+        <p:nvPr/>
+      </p:nvGrpSpPr>
+      <p:grpSpPr>
+        <a:xfrm>
+          <a:off x="0" y="0"/>
+          <a:ext cx="0" cy="0"/>
+          <a:chOff x="0" y="0"/>
+          <a:chExt cx="0" cy="0"/>
+        </a:xfrm>
+      </p:grpSpPr>
+      <p:sp>
+        <p:nvSpPr>
+          <p:cNvPr name="AutoShape 2" id="2"/>
+          <p:cNvSpPr/>
+          <p:nvPr/>
+        </p:nvSpPr>
+        <p:spPr>
+          <a:xfrm>
+            <a:off x="-322177" y="247015"/>
+            <a:ext cx="18610177" cy="0"/>
+          </a:xfrm>
+          <a:prstGeom prst="line">
+            <a:avLst/>
+          </a:prstGeom>
+          <a:ln cap="flat" w="9525">
+            <a:solidFill>
+              <a:srgbClr val="000000"/>
+            </a:solidFill>
+            <a:prstDash val="solid"/>
+            <a:headEnd type="none" len="sm" w="sm"/>
+            <a:tailEnd type="none" len="sm" w="sm"/>
+          </a:ln>
+        </p:spPr>
+      </p:sp>
+      <p:sp>
+        <p:nvSpPr>
+          <p:cNvPr name="Freeform 3" id="3"/>
+          <p:cNvSpPr/>
+          <p:nvPr/>
+        </p:nvSpPr>
+        <p:spPr>
+          <a:xfrm flipH="true" flipV="false" rot="0">
+            <a:off x="-694355" y="9438672"/>
+            <a:ext cx="19542952" cy="1140581"/>
+          </a:xfrm>
+          <a:custGeom>
+            <a:avLst/>
+            <a:gdLst/>
+            <a:ahLst/>
+            <a:cxnLst/>
+            <a:rect r="r" b="b" t="t" l="l"/>
+            <a:pathLst>
+              <a:path h="1140581" w="19542952">
+                <a:moveTo>
+                  <a:pt x="19542952" y="0"/>
+                </a:moveTo>
+                <a:lnTo>
+                  <a:pt x="0" y="0"/>
+                </a:lnTo>
+                <a:lnTo>
+                  <a:pt x="0" y="1140581"/>
+                </a:lnTo>
+                <a:lnTo>
+                  <a:pt x="19542952" y="1140581"/>
+                </a:lnTo>
+                <a:lnTo>
+                  <a:pt x="19542952" y="0"/>
+                </a:lnTo>
+                <a:close/>
+              </a:path>
+            </a:pathLst>
+          </a:custGeom>
+          <a:blipFill>
+            <a:blip r:embed="rId2"/>
+            <a:stretch>
+              <a:fillRect l="0" t="-863799" r="0" b="0"/>
+            </a:stretch>
+          </a:blipFill>
+        </p:spPr>
+      </p:sp>
+      <p:sp>
+        <p:nvSpPr>
+          <p:cNvPr name="AutoShape 4" id="4"/>
+          <p:cNvSpPr/>
+          <p:nvPr/>
+        </p:nvSpPr>
+        <p:spPr>
+          <a:xfrm flipV="true">
+            <a:off x="2578156" y="8269006"/>
+            <a:ext cx="0" cy="1040620"/>
+          </a:xfrm>
+          <a:prstGeom prst="line">
+            <a:avLst/>
+          </a:prstGeom>
+          <a:ln cap="flat" w="9525">
+            <a:solidFill>
+              <a:srgbClr val="998D89"/>
+            </a:solidFill>
+            <a:prstDash val="solid"/>
+            <a:headEnd type="none" len="sm" w="sm"/>
+            <a:tailEnd type="none" len="sm" w="sm"/>
+          </a:ln>
+        </p:spPr>
+      </p:sp>
+      <p:grpSp>
+        <p:nvGrpSpPr>
+          <p:cNvPr name="Group 5" id="5"/>
+          <p:cNvGrpSpPr/>
+          <p:nvPr/>
+        </p:nvGrpSpPr>
+        <p:grpSpPr>
+          <a:xfrm rot="0">
+            <a:off x="11531521" y="7851818"/>
+            <a:ext cx="7013042" cy="1949680"/>
+            <a:chOff x="0" y="0"/>
+            <a:chExt cx="9350723" cy="2599574"/>
+          </a:xfrm>
+        </p:grpSpPr>
+        <p:sp>
+          <p:nvSpPr>
+            <p:cNvPr name="AutoShape 6" id="6"/>
+            <p:cNvSpPr/>
+            <p:nvPr/>
+          </p:nvSpPr>
+          <p:spPr>
+            <a:xfrm flipH="true" flipV="true">
+              <a:off x="1363517" y="24184"/>
+              <a:ext cx="4634722" cy="11484"/>
+            </a:xfrm>
+            <a:prstGeom prst="line">
+              <a:avLst/>
+            </a:prstGeom>
+            <a:ln cap="flat" w="12700">
+              <a:solidFill>
+                <a:srgbClr val="998D89"/>
+              </a:solidFill>
+              <a:prstDash val="solid"/>
+              <a:headEnd type="none" len="sm" w="sm"/>
+              <a:tailEnd type="none" len="sm" w="sm"/>
+            </a:ln>
+          </p:spPr>
+        </p:sp>
+        <p:sp>
+          <p:nvSpPr>
+            <p:cNvPr name="AutoShape 7" id="7"/>
+            <p:cNvSpPr/>
+            <p:nvPr/>
+          </p:nvSpPr>
+          <p:spPr>
+            <a:xfrm flipH="true" flipV="true">
+              <a:off x="1372021" y="2586874"/>
+              <a:ext cx="4626217" cy="6350"/>
+            </a:xfrm>
+            <a:prstGeom prst="line">
+              <a:avLst/>
+            </a:prstGeom>
+            <a:ln cap="flat" w="12700">
+              <a:solidFill>
+                <a:srgbClr val="998D89"/>
+              </a:solidFill>
+              <a:prstDash val="solid"/>
+              <a:headEnd type="none" len="sm" w="sm"/>
+              <a:tailEnd type="none" len="sm" w="sm"/>
+            </a:ln>
+          </p:spPr>
+        </p:sp>
+        <p:sp>
+          <p:nvSpPr>
+            <p:cNvPr name="TextBox 8" id="8"/>
+            <p:cNvSpPr txBox="true"/>
+            <p:nvPr/>
+          </p:nvSpPr>
+          <p:spPr>
+            <a:xfrm rot="0">
+              <a:off x="0" y="188267"/>
+              <a:ext cx="6171741" cy="333373"/>
+            </a:xfrm>
+            <a:prstGeom prst="rect">
+              <a:avLst/>
+            </a:prstGeom>
+          </p:spPr>
+          <p:txBody>
+            <a:bodyPr anchor="t" rtlCol="false" tIns="0" lIns="0" bIns="0" rIns="0">
+              <a:spAutoFit/>
+            </a:bodyPr>
+            <a:lstStyle/>
+            <a:p>
+              <a:pPr algn="ctr">
+                <a:lnSpc>
+                  <a:spcPts val="2100"/>
+                </a:lnSpc>
+              </a:pPr>
+              <a:r>
+                <a:rPr lang="en-US" sz="1500" b="true">
+                  <a:solidFill>
+                    <a:srgbClr val="A12C2B"/>
+                  </a:solidFill>
+                  <a:latin typeface="Lora Bold"/>
+                  <a:ea typeface="Lora Bold"/>
+                  <a:cs typeface="Lora Bold"/>
+                  <a:sym typeface="Lora Bold"/>
+                </a:rPr>
+                <a:t>NEARBY LANDMARKS </a:t>
+              </a:r>
+            </a:p>
+          </p:txBody>
+        </p:sp>
+        <p:sp>
+          <p:nvSpPr>
+            <p:cNvPr name="TextBox 9" id="9"/>
+            <p:cNvSpPr txBox="true"/>
+            <p:nvPr/>
+          </p:nvSpPr>
+          <p:spPr>
+            <a:xfrm rot="0">
+              <a:off x="2116761" y="1439487"/>
+              <a:ext cx="7233962" cy="311360"/>
+            </a:xfrm>
+            <a:prstGeom prst="rect">
+              <a:avLst/>
+            </a:prstGeom>
+          </p:spPr>
+          <p:txBody>
+            <a:bodyPr anchor="t" rtlCol="false" tIns="0" lIns="0" bIns="0" rIns="0">
+              <a:spAutoFit/>
+            </a:bodyPr>
+            <a:lstStyle/>
+            <a:p>
+              <a:pPr algn="l">
+                <a:lnSpc>
+                  <a:spcPts val="1960"/>
+                </a:lnSpc>
+              </a:pPr>
+              <a:r>
+                <a:rPr lang="en-US" sz="1400" b="true">
+                  <a:solidFill>
+                    <a:srgbClr val="000000"/>
+                  </a:solidFill>
+                  <a:latin typeface="Lora Bold"/>
+                  <a:ea typeface="Lora Bold"/>
+                  <a:cs typeface="Lora Bold"/>
+                  <a:sym typeface="Lora Bold"/>
+                </a:rPr>
+                <a:t>Broadway - 100m </a:t>
+              </a:r>
+            </a:p>
+          </p:txBody>
+        </p:sp>
+        <p:sp>
+          <p:nvSpPr>
+            <p:cNvPr name="AutoShape 10" id="10"/>
+            <p:cNvSpPr/>
+            <p:nvPr/>
+          </p:nvSpPr>
+          <p:spPr>
+            <a:xfrm flipV="true">
+              <a:off x="1390443" y="0"/>
+              <a:ext cx="0" cy="2557555"/>
+            </a:xfrm>
+            <a:prstGeom prst="line">
+              <a:avLst/>
+            </a:prstGeom>
+            <a:ln cap="flat" w="12700">
+              <a:solidFill>
+                <a:srgbClr val="998D89"/>
+              </a:solidFill>
+              <a:prstDash val="solid"/>
+              <a:headEnd type="none" len="sm" w="sm"/>
+              <a:tailEnd type="none" len="sm" w="sm"/>
+            </a:ln>
+          </p:spPr>
+        </p:sp>
+        <p:sp>
+          <p:nvSpPr>
+            <p:cNvPr name="AutoShape 11" id="11"/>
+            <p:cNvSpPr/>
+            <p:nvPr/>
+          </p:nvSpPr>
+          <p:spPr>
+            <a:xfrm flipV="true">
+              <a:off x="5998238" y="35669"/>
+              <a:ext cx="0" cy="2557555"/>
+            </a:xfrm>
+            <a:prstGeom prst="line">
+              <a:avLst/>
+            </a:prstGeom>
+            <a:ln cap="flat" w="12700">
+              <a:solidFill>
+                <a:srgbClr val="998D89"/>
+              </a:solidFill>
+              <a:prstDash val="solid"/>
+              <a:headEnd type="none" len="sm" w="sm"/>
+              <a:tailEnd type="none" len="sm" w="sm"/>
+            </a:ln>
+          </p:spPr>
+        </p:sp>
+        <p:sp>
+          <p:nvSpPr>
+            <p:cNvPr name="Freeform 12" id="12"/>
+            <p:cNvSpPr/>
+            <p:nvPr/>
+          </p:nvSpPr>
+          <p:spPr>
+            <a:xfrm flipH="false" flipV="false" rot="0">
+              <a:off x="1575256" y="801041"/>
+              <a:ext cx="288169" cy="415378"/>
+            </a:xfrm>
+            <a:custGeom>
+              <a:avLst/>
+              <a:gdLst/>
+              <a:ahLst/>
+              <a:cxnLst/>
+              <a:rect r="r" b="b" t="t" l="l"/>
+              <a:pathLst>
+                <a:path h="415378" w="288169">
+                  <a:moveTo>
+                    <a:pt x="0" y="0"/>
+                  </a:moveTo>
+                  <a:lnTo>
+                    <a:pt x="288168" y="0"/>
+                  </a:lnTo>
+                  <a:lnTo>
+                    <a:pt x="288168" y="415378"/>
+                  </a:lnTo>
+                  <a:lnTo>
+                    <a:pt x="0" y="415378"/>
+                  </a:lnTo>
+                  <a:lnTo>
+                    <a:pt x="0" y="0"/>
+                  </a:lnTo>
+                  <a:close/>
+                </a:path>
+              </a:pathLst>
+            </a:custGeom>
+            <a:blipFill>
+              <a:blip r:embed="rId3">
+                <a:extLst>
+                  <a:ext uri="{96DAC541-7B7A-43D3-8B79-37D633B846F1}">
+                    <asvg:svgBlip xmlns:asvg="http://schemas.microsoft.com/office/drawing/2016/SVG/main" r:embed="rId4"/>
+                  </a:ext>
+                </a:extLst>
+              </a:blip>
+              <a:stretch>
+                <a:fillRect l="0" t="0" r="0" b="0"/>
+              </a:stretch>
+            </a:blipFill>
+          </p:spPr>
+        </p:sp>
+        <p:sp>
+          <p:nvSpPr>
+            <p:cNvPr name="Freeform 13" id="13"/>
+            <p:cNvSpPr/>
+            <p:nvPr/>
+          </p:nvSpPr>
+          <p:spPr>
+            <a:xfrm flipH="false" flipV="false" rot="0">
+              <a:off x="1612693" y="1444503"/>
+              <a:ext cx="288169" cy="415378"/>
+            </a:xfrm>
+            <a:custGeom>
+              <a:avLst/>
+              <a:gdLst/>
+              <a:ahLst/>
+              <a:cxnLst/>
+              <a:rect r="r" b="b" t="t" l="l"/>
+              <a:pathLst>
+                <a:path h="415378" w="288169">
+                  <a:moveTo>
+                    <a:pt x="0" y="0"/>
+                  </a:moveTo>
+                  <a:lnTo>
+                    <a:pt x="288168" y="0"/>
+                  </a:lnTo>
+                  <a:lnTo>
+                    <a:pt x="288168" y="415378"/>
+                  </a:lnTo>
+                  <a:lnTo>
+                    <a:pt x="0" y="415378"/>
+                  </a:lnTo>
+                  <a:lnTo>
+                    <a:pt x="0" y="0"/>
+                  </a:lnTo>
+                  <a:close/>
+                </a:path>
+              </a:pathLst>
+            </a:custGeom>
+            <a:blipFill>
+              <a:blip r:embed="rId3">
+                <a:extLst>
+                  <a:ext uri="{96DAC541-7B7A-43D3-8B79-37D633B846F1}">
+                    <asvg:svgBlip xmlns:asvg="http://schemas.microsoft.com/office/drawing/2016/SVG/main" r:embed="rId4"/>
+                  </a:ext>
+                </a:extLst>
+              </a:blip>
+              <a:stretch>
+                <a:fillRect l="0" t="0" r="0" b="0"/>
+              </a:stretch>
+            </a:blipFill>
+          </p:spPr>
+        </p:sp>
+        <p:sp>
+          <p:nvSpPr>
+            <p:cNvPr name="Freeform 14" id="14"/>
+            <p:cNvSpPr/>
+            <p:nvPr/>
+          </p:nvSpPr>
+          <p:spPr>
+            <a:xfrm flipH="false" flipV="false" rot="0">
+              <a:off x="1645106" y="2113366"/>
+              <a:ext cx="288169" cy="415378"/>
+            </a:xfrm>
+            <a:custGeom>
+              <a:avLst/>
+              <a:gdLst/>
+              <a:ahLst/>
+              <a:cxnLst/>
+              <a:rect r="r" b="b" t="t" l="l"/>
+              <a:pathLst>
+                <a:path h="415378" w="288169">
+                  <a:moveTo>
+                    <a:pt x="0" y="0"/>
+                  </a:moveTo>
+                  <a:lnTo>
+                    <a:pt x="288168" y="0"/>
+                  </a:lnTo>
+                  <a:lnTo>
+                    <a:pt x="288168" y="415378"/>
+                  </a:lnTo>
+                  <a:lnTo>
+                    <a:pt x="0" y="415378"/>
+                  </a:lnTo>
+                  <a:lnTo>
+                    <a:pt x="0" y="0"/>
+                  </a:lnTo>
+                  <a:close/>
+                </a:path>
+              </a:pathLst>
+            </a:custGeom>
+            <a:blipFill>
+              <a:blip r:embed="rId3">
+                <a:extLst>
+                  <a:ext uri="{96DAC541-7B7A-43D3-8B79-37D633B846F1}">
+                    <asvg:svgBlip xmlns:asvg="http://schemas.microsoft.com/office/drawing/2016/SVG/main" r:embed="rId4"/>
+                  </a:ext>
+                </a:extLst>
+              </a:blip>
+              <a:stretch>
+                <a:fillRect l="0" t="0" r="0" b="0"/>
+              </a:stretch>
+            </a:blipFill>
+          </p:spPr>
+        </p:sp>
+        <p:sp>
+          <p:nvSpPr>
+            <p:cNvPr name="AutoShape 15" id="15"/>
+            <p:cNvSpPr/>
+            <p:nvPr/>
+          </p:nvSpPr>
+          <p:spPr>
+            <a:xfrm flipH="true">
+              <a:off x="2067299" y="1271784"/>
+              <a:ext cx="3990464" cy="0"/>
+            </a:xfrm>
+            <a:prstGeom prst="line">
+              <a:avLst/>
+            </a:prstGeom>
+            <a:ln cap="flat" w="12700">
+              <a:solidFill>
+                <a:srgbClr val="998D89"/>
+              </a:solidFill>
+              <a:prstDash val="solid"/>
+              <a:headEnd type="none" len="sm" w="sm"/>
+              <a:tailEnd type="none" len="sm" w="sm"/>
+            </a:ln>
+          </p:spPr>
+        </p:sp>
+        <p:sp>
+          <p:nvSpPr>
+            <p:cNvPr name="AutoShape 16" id="16"/>
+            <p:cNvSpPr/>
+            <p:nvPr/>
+          </p:nvSpPr>
+          <p:spPr>
+            <a:xfrm flipH="true" flipV="true">
+              <a:off x="2050685" y="1957003"/>
+              <a:ext cx="3947554" cy="0"/>
+            </a:xfrm>
+            <a:prstGeom prst="line">
+              <a:avLst/>
+            </a:prstGeom>
+            <a:ln cap="flat" w="12700">
+              <a:solidFill>
+                <a:srgbClr val="998D89"/>
+              </a:solidFill>
+              <a:prstDash val="solid"/>
+              <a:headEnd type="none" len="sm" w="sm"/>
+              <a:tailEnd type="none" len="sm" w="sm"/>
+            </a:ln>
+          </p:spPr>
+        </p:sp>
+        <p:sp>
+          <p:nvSpPr>
+            <p:cNvPr name="TextBox 17" id="17"/>
+            <p:cNvSpPr txBox="true"/>
+            <p:nvPr/>
+          </p:nvSpPr>
+          <p:spPr>
+            <a:xfrm rot="0">
+              <a:off x="2067288" y="763666"/>
+              <a:ext cx="5756269" cy="311360"/>
+            </a:xfrm>
+            <a:prstGeom prst="rect">
+              <a:avLst/>
+            </a:prstGeom>
+          </p:spPr>
+          <p:txBody>
+            <a:bodyPr anchor="t" rtlCol="false" tIns="0" lIns="0" bIns="0" rIns="0">
+              <a:spAutoFit/>
+            </a:bodyPr>
+            <a:lstStyle/>
+            <a:p>
+              <a:pPr algn="l">
+                <a:lnSpc>
+                  <a:spcPts val="1960"/>
+                </a:lnSpc>
+              </a:pPr>
+              <a:r>
+                <a:rPr lang="en-US" sz="1400" b="true">
+                  <a:solidFill>
+                    <a:srgbClr val="000000"/>
+                  </a:solidFill>
+                  <a:latin typeface="Lora Bold"/>
+                  <a:ea typeface="Lora Bold"/>
+                  <a:cs typeface="Lora Bold"/>
+                  <a:sym typeface="Lora Bold"/>
+                </a:rPr>
+                <a:t>Broadway - 100m </a:t>
+              </a:r>
+            </a:p>
+          </p:txBody>
+        </p:sp>
+        <p:sp>
+          <p:nvSpPr>
+            <p:cNvPr name="TextBox 18" id="18"/>
+            <p:cNvSpPr txBox="true"/>
+            <p:nvPr/>
+          </p:nvSpPr>
+          <p:spPr>
+            <a:xfrm rot="0">
+              <a:off x="2161874" y="2095339"/>
+              <a:ext cx="6229889" cy="311360"/>
+            </a:xfrm>
+            <a:prstGeom prst="rect">
+              <a:avLst/>
+            </a:prstGeom>
+          </p:spPr>
+          <p:txBody>
+            <a:bodyPr anchor="t" rtlCol="false" tIns="0" lIns="0" bIns="0" rIns="0">
+              <a:spAutoFit/>
+            </a:bodyPr>
+            <a:lstStyle/>
+            <a:p>
+              <a:pPr algn="l">
+                <a:lnSpc>
+                  <a:spcPts val="1960"/>
+                </a:lnSpc>
+              </a:pPr>
+              <a:r>
+                <a:rPr lang="en-US" sz="1400" b="true">
+                  <a:solidFill>
+                    <a:srgbClr val="000000"/>
+                  </a:solidFill>
+                  <a:latin typeface="Lora Bold"/>
+                  <a:ea typeface="Lora Bold"/>
+                  <a:cs typeface="Lora Bold"/>
+                  <a:sym typeface="Lora Bold"/>
+                </a:rPr>
+                <a:t>Broadway - 100 m </a:t>
+              </a:r>
+            </a:p>
+          </p:txBody>
+        </p:sp>
+      </p:grpSp>
+      <p:sp>
+        <p:nvSpPr>
+          <p:cNvPr name="Freeform 19" id="19"/>
+          <p:cNvSpPr/>
+          <p:nvPr/>
+        </p:nvSpPr>
+        <p:spPr>
+          <a:xfrm flipH="false" flipV="false" rot="0">
+            <a:off x="8475999" y="302850"/>
+            <a:ext cx="9812001" cy="7280364"/>
+          </a:xfrm>
+          <a:custGeom>
+            <a:avLst/>
+            <a:gdLst/>
+            <a:ahLst/>
+            <a:cxnLst/>
+            <a:rect r="r" b="b" t="t" l="l"/>
+            <a:pathLst>
+              <a:path h="7280364" w="9812001">
+                <a:moveTo>
+                  <a:pt x="0" y="0"/>
+                </a:moveTo>
+                <a:lnTo>
+                  <a:pt x="9812001" y="0"/>
+                </a:lnTo>
+                <a:lnTo>
+                  <a:pt x="9812001" y="7280364"/>
+                </a:lnTo>
+                <a:lnTo>
+                  <a:pt x="0" y="7280364"/>
+                </a:lnTo>
+                <a:lnTo>
+                  <a:pt x="0" y="0"/>
+                </a:lnTo>
+                <a:close/>
+              </a:path>
+            </a:pathLst>
+          </a:custGeom>
+          <a:blipFill>
+            <a:blip r:embed="rId5"/>
+            <a:stretch>
+              <a:fillRect l="-2286" t="-7454" r="-8412" b="0"/>
+            </a:stretch>
+          </a:blipFill>
+        </p:spPr>
+      </p:sp>
+      <p:sp>
+        <p:nvSpPr>
+          <p:cNvPr name="TextBox 20" id="20"/>
+          <p:cNvSpPr txBox="true"/>
+          <p:nvPr/>
+        </p:nvSpPr>
+        <p:spPr>
+          <a:xfrm rot="0">
+            <a:off x="71369" y="7545114"/>
+            <a:ext cx="4628806" cy="306704"/>
+          </a:xfrm>
+          <a:prstGeom prst="rect">
+            <a:avLst/>
+          </a:prstGeom>
+        </p:spPr>
+        <p:txBody>
+          <a:bodyPr anchor="t" rtlCol="false" tIns="0" lIns="0" bIns="0" rIns="0">
+            <a:spAutoFit/>
+          </a:bodyPr>
+          <a:lstStyle/>
+          <a:p>
+            <a:pPr algn="ctr">
+              <a:lnSpc>
+                <a:spcPts val="2520"/>
+              </a:lnSpc>
+            </a:pPr>
+            <a:r>
+              <a:rPr lang="en-US" b="true" sz="1800">
                 <a:solidFill>
                   <a:srgbClr val="A12C2B"/>
                 </a:solidFill>
@@ -4298,16 +8313,292 @@
           </a:p>
         </p:txBody>
       </p:sp>
-      <p:sp>
-        <p:nvSpPr>
-          <p:cNvPr name="TextBox 30" id="30"/>
+      <p:grpSp>
+        <p:nvGrpSpPr>
+          <p:cNvPr name="Group 21" id="21"/>
+          <p:cNvGrpSpPr/>
+          <p:nvPr/>
+        </p:nvGrpSpPr>
+        <p:grpSpPr>
+          <a:xfrm rot="0">
+            <a:off x="754572" y="8230306"/>
+            <a:ext cx="1771196" cy="1169666"/>
+            <a:chOff x="0" y="0"/>
+            <a:chExt cx="2361594" cy="1559555"/>
+          </a:xfrm>
+        </p:grpSpPr>
+        <p:sp>
+          <p:nvSpPr>
+            <p:cNvPr name="TextBox 22" id="22"/>
+            <p:cNvSpPr txBox="true"/>
+            <p:nvPr/>
+          </p:nvSpPr>
+          <p:spPr>
+            <a:xfrm rot="0">
+              <a:off x="0" y="-28575"/>
+              <a:ext cx="2256628" cy="311360"/>
+            </a:xfrm>
+            <a:prstGeom prst="rect">
+              <a:avLst/>
+            </a:prstGeom>
+          </p:spPr>
+          <p:txBody>
+            <a:bodyPr anchor="t" rtlCol="false" tIns="0" lIns="0" bIns="0" rIns="0">
+              <a:spAutoFit/>
+            </a:bodyPr>
+            <a:lstStyle/>
+            <a:p>
+              <a:pPr algn="l">
+                <a:lnSpc>
+                  <a:spcPts val="1960"/>
+                </a:lnSpc>
+              </a:pPr>
+              <a:r>
+                <a:rPr lang="en-US" sz="1400" b="true">
+                  <a:solidFill>
+                    <a:srgbClr val="000000"/>
+                  </a:solidFill>
+                  <a:latin typeface="Lora Bold"/>
+                  <a:ea typeface="Lora Bold"/>
+                  <a:cs typeface="Lora Bold"/>
+                  <a:sym typeface="Lora Bold"/>
+                </a:rPr>
+                <a:t>FORMAT : Static  </a:t>
+              </a:r>
+            </a:p>
+          </p:txBody>
+        </p:sp>
+        <p:sp>
+          <p:nvSpPr>
+            <p:cNvPr name="TextBox 23" id="23"/>
+            <p:cNvSpPr txBox="true"/>
+            <p:nvPr/>
+          </p:nvSpPr>
+          <p:spPr>
+            <a:xfrm rot="0">
+              <a:off x="0" y="558210"/>
+              <a:ext cx="2361594" cy="311360"/>
+            </a:xfrm>
+            <a:prstGeom prst="rect">
+              <a:avLst/>
+            </a:prstGeom>
+          </p:spPr>
+          <p:txBody>
+            <a:bodyPr anchor="t" rtlCol="false" tIns="0" lIns="0" bIns="0" rIns="0">
+              <a:spAutoFit/>
+            </a:bodyPr>
+            <a:lstStyle/>
+            <a:p>
+              <a:pPr algn="l">
+                <a:lnSpc>
+                  <a:spcPts val="1960"/>
+                </a:lnSpc>
+              </a:pPr>
+              <a:r>
+                <a:rPr lang="en-US" sz="1400" b="true">
+                  <a:solidFill>
+                    <a:srgbClr val="000000"/>
+                  </a:solidFill>
+                  <a:latin typeface="Lora Bold"/>
+                  <a:ea typeface="Lora Bold"/>
+                  <a:cs typeface="Lora Bold"/>
+                  <a:sym typeface="Lora Bold"/>
+                </a:rPr>
+                <a:t>SIZE : 28 x 75  </a:t>
+              </a:r>
+            </a:p>
+          </p:txBody>
+        </p:sp>
+        <p:sp>
+          <p:nvSpPr>
+            <p:cNvPr name="TextBox 24" id="24"/>
+            <p:cNvSpPr txBox="true"/>
+            <p:nvPr/>
+          </p:nvSpPr>
+          <p:spPr>
+            <a:xfrm rot="0">
+              <a:off x="0" y="1248195"/>
+              <a:ext cx="2221590" cy="311360"/>
+            </a:xfrm>
+            <a:prstGeom prst="rect">
+              <a:avLst/>
+            </a:prstGeom>
+          </p:spPr>
+          <p:txBody>
+            <a:bodyPr anchor="t" rtlCol="false" tIns="0" lIns="0" bIns="0" rIns="0">
+              <a:spAutoFit/>
+            </a:bodyPr>
+            <a:lstStyle/>
+            <a:p>
+              <a:pPr algn="l">
+                <a:lnSpc>
+                  <a:spcPts val="1960"/>
+                </a:lnSpc>
+              </a:pPr>
+              <a:r>
+                <a:rPr lang="en-US" sz="1400" b="true">
+                  <a:solidFill>
+                    <a:srgbClr val="000000"/>
+                  </a:solidFill>
+                  <a:latin typeface="Lora Bold"/>
+                  <a:ea typeface="Lora Bold"/>
+                  <a:cs typeface="Lora Bold"/>
+                  <a:sym typeface="Lora Bold"/>
+                </a:rPr>
+                <a:t>UNITS : 1</a:t>
+              </a:r>
+            </a:p>
+          </p:txBody>
+        </p:sp>
+      </p:grpSp>
+      <p:grpSp>
+        <p:nvGrpSpPr>
+          <p:cNvPr name="Group 25" id="25"/>
+          <p:cNvGrpSpPr/>
+          <p:nvPr/>
+        </p:nvGrpSpPr>
+        <p:grpSpPr>
+          <a:xfrm rot="0">
+            <a:off x="2844997" y="8259550"/>
+            <a:ext cx="3710357" cy="1111178"/>
+            <a:chOff x="0" y="0"/>
+            <a:chExt cx="4947143" cy="1481571"/>
+          </a:xfrm>
+        </p:grpSpPr>
+        <p:sp>
+          <p:nvSpPr>
+            <p:cNvPr name="TextBox 26" id="26"/>
+            <p:cNvSpPr txBox="true"/>
+            <p:nvPr/>
+          </p:nvSpPr>
+          <p:spPr>
+            <a:xfrm rot="0">
+              <a:off x="10044" y="-28575"/>
+              <a:ext cx="4668564" cy="311360"/>
+            </a:xfrm>
+            <a:prstGeom prst="rect">
+              <a:avLst/>
+            </a:prstGeom>
+          </p:spPr>
+          <p:txBody>
+            <a:bodyPr anchor="t" rtlCol="false" tIns="0" lIns="0" bIns="0" rIns="0">
+              <a:spAutoFit/>
+            </a:bodyPr>
+            <a:lstStyle/>
+            <a:p>
+              <a:pPr algn="l">
+                <a:lnSpc>
+                  <a:spcPts val="1960"/>
+                </a:lnSpc>
+              </a:pPr>
+              <a:r>
+                <a:rPr lang="en-US" sz="1400" b="true">
+                  <a:solidFill>
+                    <a:srgbClr val="000000"/>
+                  </a:solidFill>
+                  <a:latin typeface="Lora Bold"/>
+                  <a:ea typeface="Lora Bold"/>
+                  <a:cs typeface="Lora Bold"/>
+                  <a:sym typeface="Lora Bold"/>
+                </a:rPr>
+                <a:t>SPOT LENGTH : 10 seconds </a:t>
+              </a:r>
+            </a:p>
+          </p:txBody>
+        </p:sp>
+        <p:sp>
+          <p:nvSpPr>
+            <p:cNvPr name="TextBox 27" id="27"/>
+            <p:cNvSpPr txBox="true"/>
+            <p:nvPr/>
+          </p:nvSpPr>
+          <p:spPr>
+            <a:xfrm rot="0">
+              <a:off x="0" y="569926"/>
+              <a:ext cx="4688651" cy="311360"/>
+            </a:xfrm>
+            <a:prstGeom prst="rect">
+              <a:avLst/>
+            </a:prstGeom>
+          </p:spPr>
+          <p:txBody>
+            <a:bodyPr anchor="t" rtlCol="false" tIns="0" lIns="0" bIns="0" rIns="0">
+              <a:spAutoFit/>
+            </a:bodyPr>
+            <a:lstStyle/>
+            <a:p>
+              <a:pPr algn="l">
+                <a:lnSpc>
+                  <a:spcPts val="1960"/>
+                </a:lnSpc>
+              </a:pPr>
+              <a:r>
+                <a:rPr lang="en-US" sz="1400" b="true">
+                  <a:solidFill>
+                    <a:srgbClr val="000000"/>
+                  </a:solidFill>
+                  <a:latin typeface="Lora Bold"/>
+                  <a:ea typeface="Lora Bold"/>
+                  <a:cs typeface="Lora Bold"/>
+                  <a:sym typeface="Lora Bold"/>
+                </a:rPr>
+                <a:t>FREQUENCY : 10%</a:t>
+              </a:r>
+            </a:p>
+          </p:txBody>
+        </p:sp>
+        <p:sp>
+          <p:nvSpPr>
+            <p:cNvPr name="TextBox 28" id="28"/>
+            <p:cNvSpPr txBox="true"/>
+            <p:nvPr/>
+          </p:nvSpPr>
+          <p:spPr>
+            <a:xfrm rot="0">
+              <a:off x="0" y="1170211"/>
+              <a:ext cx="4947143" cy="311360"/>
+            </a:xfrm>
+            <a:prstGeom prst="rect">
+              <a:avLst/>
+            </a:prstGeom>
+          </p:spPr>
+          <p:txBody>
+            <a:bodyPr anchor="t" rtlCol="false" tIns="0" lIns="0" bIns="0" rIns="0">
+              <a:spAutoFit/>
+            </a:bodyPr>
+            <a:lstStyle/>
+            <a:p>
+              <a:pPr algn="l">
+                <a:lnSpc>
+                  <a:spcPts val="1960"/>
+                </a:lnSpc>
+              </a:pPr>
+              <a:r>
+                <a:rPr lang="en-US" sz="1400" b="true">
+                  <a:solidFill>
+                    <a:srgbClr val="000000"/>
+                  </a:solidFill>
+                  <a:latin typeface="Lora Bold"/>
+                  <a:ea typeface="Lora Bold"/>
+                  <a:cs typeface="Lora Bold"/>
+                  <a:sym typeface="Lora Bold"/>
+                </a:rPr>
+                <a:t>TRAFFIC : 2,000,000 monthly </a:t>
+              </a:r>
+            </a:p>
+          </p:txBody>
+        </p:sp>
+      </p:grpSp>
+      <p:sp>
+        <p:nvSpPr>
+          <p:cNvPr name="TextBox 29" id="29"/>
           <p:cNvSpPr txBox="true"/>
           <p:nvPr/>
         </p:nvSpPr>
         <p:spPr>
           <a:xfrm rot="0">
-            <a:off x="437674" y="8813278"/>
-            <a:ext cx="3958615" cy="240664"/>
+            <a:off x="-2390085" y="330406"/>
+            <a:ext cx="10872229" cy="1704340"/>
           </a:xfrm>
           <a:prstGeom prst="rect">
             <a:avLst/>
@@ -4319,36 +8610,43 @@
           </a:bodyPr>
           <a:lstStyle/>
           <a:p>
-            <a:pPr algn="l">
+            <a:pPr algn="ctr">
               <a:lnSpc>
-                <a:spcPts val="1960"/>
+                <a:spcPts val="6860"/>
               </a:lnSpc>
             </a:pPr>
             <a:r>
-              <a:rPr lang="en-US" sz="1400" b="true">
+              <a:rPr lang="en-US" sz="4900">
                 <a:solidFill>
                   <a:srgbClr val="000000"/>
                 </a:solidFill>
-                <a:latin typeface="Lora Bold"/>
-                <a:ea typeface="Lora Bold"/>
-                <a:cs typeface="Lora Bold"/>
-                <a:sym typeface="Lora Bold"/>
+                <a:latin typeface="Prata"/>
+                <a:ea typeface="Prata"/>
+                <a:cs typeface="Prata"/>
+                <a:sym typeface="Prata"/>
               </a:rPr>
-              <a:t>FORMAT : Digital </a:t>
+              <a:t>Bryant Park Digital</a:t>
             </a:r>
           </a:p>
+          <a:p>
+            <a:pPr algn="ctr">
+              <a:lnSpc>
+                <a:spcPts val="6860"/>
+              </a:lnSpc>
+            </a:pPr>
+          </a:p>
         </p:txBody>
       </p:sp>
       <p:sp>
         <p:nvSpPr>
-          <p:cNvPr name="TextBox 31" id="31"/>
+          <p:cNvPr name="TextBox 30" id="30"/>
           <p:cNvSpPr txBox="true"/>
           <p:nvPr/>
         </p:nvSpPr>
         <p:spPr>
           <a:xfrm rot="0">
-            <a:off x="437674" y="9253367"/>
-            <a:ext cx="4142749" cy="240664"/>
+            <a:off x="0" y="2641891"/>
+            <a:ext cx="3169854" cy="378134"/>
           </a:xfrm>
           <a:prstGeom prst="rect">
             <a:avLst/>
@@ -4360,36 +8658,36 @@
           </a:bodyPr>
           <a:lstStyle/>
           <a:p>
-            <a:pPr algn="l">
+            <a:pPr algn="ctr">
               <a:lnSpc>
-                <a:spcPts val="1960"/>
+                <a:spcPts val="3156"/>
               </a:lnSpc>
             </a:pPr>
             <a:r>
-              <a:rPr lang="en-US" sz="1400" b="true">
+              <a:rPr lang="en-US" b="true" sz="2254">
                 <a:solidFill>
-                  <a:srgbClr val="000000"/>
+                  <a:srgbClr val="A12C2B"/>
                 </a:solidFill>
                 <a:latin typeface="Lora Bold"/>
                 <a:ea typeface="Lora Bold"/>
                 <a:cs typeface="Lora Bold"/>
                 <a:sym typeface="Lora Bold"/>
               </a:rPr>
-              <a:t>SIZE : 8 x 4 m </a:t>
+              <a:t>LOCATION </a:t>
             </a:r>
           </a:p>
         </p:txBody>
       </p:sp>
       <p:sp>
         <p:nvSpPr>
-          <p:cNvPr name="TextBox 32" id="32"/>
+          <p:cNvPr name="TextBox 31" id="31"/>
           <p:cNvSpPr txBox="true"/>
           <p:nvPr/>
         </p:nvSpPr>
         <p:spPr>
           <a:xfrm rot="0">
-            <a:off x="437674" y="9770856"/>
-            <a:ext cx="3897151" cy="240664"/>
+            <a:off x="762378" y="4248486"/>
+            <a:ext cx="1537380" cy="735350"/>
           </a:xfrm>
           <a:prstGeom prst="rect">
             <a:avLst/>
@@ -4401,36 +8699,36 @@
           </a:bodyPr>
           <a:lstStyle/>
           <a:p>
-            <a:pPr algn="l">
+            <a:pPr algn="ctr">
               <a:lnSpc>
-                <a:spcPts val="1960"/>
+                <a:spcPts val="2998"/>
               </a:lnSpc>
             </a:pPr>
             <a:r>
-              <a:rPr lang="en-US" sz="1400" b="true">
+              <a:rPr lang="en-US" b="true" sz="2141">
                 <a:solidFill>
-                  <a:srgbClr val="000000"/>
+                  <a:srgbClr val="A12C2B"/>
                 </a:solidFill>
                 <a:latin typeface="Lora Bold"/>
                 <a:ea typeface="Lora Bold"/>
                 <a:cs typeface="Lora Bold"/>
                 <a:sym typeface="Lora Bold"/>
               </a:rPr>
-              <a:t>UNITS : 4 </a:t>
+              <a:t>VISIBILITY </a:t>
             </a:r>
           </a:p>
         </p:txBody>
       </p:sp>
       <p:sp>
         <p:nvSpPr>
-          <p:cNvPr name="TextBox 33" id="33"/>
+          <p:cNvPr name="TextBox 32" id="32"/>
           <p:cNvSpPr txBox="true"/>
           <p:nvPr/>
         </p:nvSpPr>
         <p:spPr>
           <a:xfrm rot="0">
-            <a:off x="4455309" y="8871766"/>
-            <a:ext cx="3501423" cy="240664"/>
+            <a:off x="705643" y="5763920"/>
+            <a:ext cx="1712632" cy="359522"/>
           </a:xfrm>
           <a:prstGeom prst="rect">
             <a:avLst/>
@@ -4442,36 +8740,36 @@
           </a:bodyPr>
           <a:lstStyle/>
           <a:p>
-            <a:pPr algn="l">
+            <a:pPr algn="ctr">
               <a:lnSpc>
-                <a:spcPts val="1960"/>
+                <a:spcPts val="2998"/>
               </a:lnSpc>
             </a:pPr>
             <a:r>
-              <a:rPr lang="en-US" sz="1400" b="true">
+              <a:rPr lang="en-US" b="true" sz="2141">
                 <a:solidFill>
-                  <a:srgbClr val="000000"/>
+                  <a:srgbClr val="A12C2B"/>
                 </a:solidFill>
                 <a:latin typeface="Lora Bold"/>
                 <a:ea typeface="Lora Bold"/>
                 <a:cs typeface="Lora Bold"/>
                 <a:sym typeface="Lora Bold"/>
               </a:rPr>
-              <a:t>SPOT LENGTH : 10 seconds </a:t>
+              <a:t>AUDIENCE</a:t>
             </a:r>
           </a:p>
         </p:txBody>
       </p:sp>
       <p:sp>
         <p:nvSpPr>
-          <p:cNvPr name="TextBox 34" id="34"/>
+          <p:cNvPr name="TextBox 33" id="33"/>
           <p:cNvSpPr txBox="true"/>
           <p:nvPr/>
         </p:nvSpPr>
         <p:spPr>
           <a:xfrm rot="0">
-            <a:off x="4447776" y="9320642"/>
-            <a:ext cx="3516488" cy="240664"/>
+            <a:off x="819464" y="3131044"/>
+            <a:ext cx="6595432" cy="1022193"/>
           </a:xfrm>
           <a:prstGeom prst="rect">
             <a:avLst/>
@@ -4485,34 +8783,41 @@
           <a:p>
             <a:pPr algn="l">
               <a:lnSpc>
-                <a:spcPts val="1960"/>
+                <a:spcPts val="2051"/>
               </a:lnSpc>
             </a:pPr>
             <a:r>
-              <a:rPr lang="en-US" sz="1400" b="true">
+              <a:rPr lang="en-US" sz="1465" b="true">
                 <a:solidFill>
                   <a:srgbClr val="000000"/>
                 </a:solidFill>
-                <a:latin typeface="Lora Bold"/>
-                <a:ea typeface="Lora Bold"/>
-                <a:cs typeface="Lora Bold"/>
-                <a:sym typeface="Lora Bold"/>
+                <a:latin typeface="Canva Sans Bold"/>
+                <a:ea typeface="Canva Sans Bold"/>
+                <a:cs typeface="Canva Sans Bold"/>
+                <a:sym typeface="Canva Sans Bold"/>
               </a:rPr>
-              <a:t>FREQUENCY : 20%</a:t>
+              <a:t>Overlooking Bryant Park in Midtown Manhattan, this unit sits within a prime commercial and leisuredistrict surrounded by offices, retail, and cultural attractions.</a:t>
             </a:r>
           </a:p>
+          <a:p>
+            <a:pPr algn="l">
+              <a:lnSpc>
+                <a:spcPts val="2051"/>
+              </a:lnSpc>
+            </a:pPr>
+          </a:p>
         </p:txBody>
       </p:sp>
       <p:sp>
         <p:nvSpPr>
-          <p:cNvPr name="TextBox 35" id="35"/>
+          <p:cNvPr name="TextBox 34" id="34"/>
           <p:cNvSpPr txBox="true"/>
           <p:nvPr/>
         </p:nvSpPr>
         <p:spPr>
           <a:xfrm rot="0">
-            <a:off x="4447776" y="9770856"/>
-            <a:ext cx="3710357" cy="240664"/>
+            <a:off x="889601" y="4740502"/>
+            <a:ext cx="6757273" cy="1022193"/>
           </a:xfrm>
           <a:prstGeom prst="rect">
             <a:avLst/>
@@ -4526,34 +8831,41 @@
           <a:p>
             <a:pPr algn="l">
               <a:lnSpc>
-                <a:spcPts val="1960"/>
+                <a:spcPts val="2051"/>
               </a:lnSpc>
             </a:pPr>
             <a:r>
-              <a:rPr lang="en-US" sz="1400" b="true">
+              <a:rPr lang="en-US" sz="1465" b="true">
                 <a:solidFill>
                   <a:srgbClr val="000000"/>
                 </a:solidFill>
-                <a:latin typeface="Lora Bold"/>
-                <a:ea typeface="Lora Bold"/>
-                <a:cs typeface="Lora Bold"/>
-                <a:sym typeface="Lora Bold"/>
+                <a:latin typeface="Canva Sans Bold"/>
+                <a:ea typeface="Canva Sans Bold"/>
+                <a:cs typeface="Canva Sans Bold"/>
+                <a:sym typeface="Canva Sans Bold"/>
               </a:rPr>
-              <a:t>TRAFFIC : 2,000,000 monthly </a:t>
+              <a:t>High-quality digital placement with extended dwell time driven by park visitors, office workers, and nearby pedestrian traffic. The environment enhances attention and engagement.</a:t>
             </a:r>
           </a:p>
+          <a:p>
+            <a:pPr algn="l">
+              <a:lnSpc>
+                <a:spcPts val="2051"/>
+              </a:lnSpc>
+            </a:pPr>
+          </a:p>
         </p:txBody>
       </p:sp>
       <p:sp>
         <p:nvSpPr>
-          <p:cNvPr name="TextBox 36" id="36"/>
+          <p:cNvPr name="TextBox 35" id="35"/>
           <p:cNvSpPr txBox="true"/>
           <p:nvPr/>
         </p:nvSpPr>
         <p:spPr>
           <a:xfrm rot="0">
-            <a:off x="9944314" y="8765722"/>
-            <a:ext cx="4317202" cy="240664"/>
+            <a:off x="933285" y="6245199"/>
+            <a:ext cx="5531907" cy="764482"/>
           </a:xfrm>
           <a:prstGeom prst="rect">
             <a:avLst/>
@@ -4567,34 +8879,41 @@
           <a:p>
             <a:pPr algn="l">
               <a:lnSpc>
-                <a:spcPts val="1960"/>
+                <a:spcPts val="2051"/>
               </a:lnSpc>
             </a:pPr>
             <a:r>
-              <a:rPr lang="en-US" sz="1400" b="true">
+              <a:rPr lang="en-US" sz="1465" b="true">
                 <a:solidFill>
                   <a:srgbClr val="000000"/>
                 </a:solidFill>
-                <a:latin typeface="Lora Bold"/>
-                <a:ea typeface="Lora Bold"/>
-                <a:cs typeface="Lora Bold"/>
-                <a:sym typeface="Lora Bold"/>
+                <a:latin typeface="Canva Sans Bold"/>
+                <a:ea typeface="Canva Sans Bold"/>
+                <a:cs typeface="Canva Sans Bold"/>
+                <a:sym typeface="Canva Sans Bold"/>
               </a:rPr>
-              <a:t>Broadway - 100m </a:t>
+              <a:t>Reaches a premium mix of office professionals, tourists, and leisure visitors, with strong daytime and lunchtime traffic.</a:t>
             </a:r>
           </a:p>
+          <a:p>
+            <a:pPr algn="l">
+              <a:lnSpc>
+                <a:spcPts val="2051"/>
+              </a:lnSpc>
+            </a:pPr>
+          </a:p>
         </p:txBody>
       </p:sp>
       <p:sp>
         <p:nvSpPr>
-          <p:cNvPr name="TextBox 37" id="37"/>
+          <p:cNvPr name="TextBox 36" id="36"/>
           <p:cNvSpPr txBox="true"/>
           <p:nvPr/>
         </p:nvSpPr>
         <p:spPr>
           <a:xfrm rot="0">
-            <a:off x="10015254" y="9764477"/>
-            <a:ext cx="4672416" cy="240664"/>
+            <a:off x="2440033" y="2651416"/>
+            <a:ext cx="973336" cy="306312"/>
           </a:xfrm>
           <a:prstGeom prst="rect">
             <a:avLst/>
@@ -4606,208 +8925,24 @@
           </a:bodyPr>
           <a:lstStyle/>
           <a:p>
-            <a:pPr algn="l">
+            <a:pPr algn="ctr">
               <a:lnSpc>
-                <a:spcPts val="1960"/>
+                <a:spcPts val="2541"/>
               </a:lnSpc>
             </a:pPr>
             <a:r>
-              <a:rPr lang="en-US" sz="1400" b="true">
+              <a:rPr lang="en-US" b="true" sz="1815" u="sng">
                 <a:solidFill>
-                  <a:srgbClr val="000000"/>
+                  <a:srgbClr val="60605E"/>
                 </a:solidFill>
                 <a:latin typeface="Lora Bold"/>
                 <a:ea typeface="Lora Bold"/>
                 <a:cs typeface="Lora Bold"/>
                 <a:sym typeface="Lora Bold"/>
+                <a:hlinkClick r:id="rId6" tooltip="https://maps.app.goo.gl/8bjmv966vMDHqreV6"/>
               </a:rPr>
-              <a:t>Broadway - 100 m </a:t>
+              <a:t>Map link</a:t>
             </a:r>
-          </a:p>
-        </p:txBody>
-      </p:sp>
-      <p:sp>
-        <p:nvSpPr>
-          <p:cNvPr name="TextBox 38" id="38"/>
-          <p:cNvSpPr txBox="true"/>
-          <p:nvPr/>
-        </p:nvSpPr>
-        <p:spPr>
-          <a:xfrm rot="0">
-            <a:off x="7797073" y="767398"/>
-            <a:ext cx="6050956" cy="462279"/>
-          </a:xfrm>
-          <a:prstGeom prst="rect">
-            <a:avLst/>
-          </a:prstGeom>
-        </p:spPr>
-        <p:txBody>
-          <a:bodyPr anchor="t" rtlCol="false" tIns="0" lIns="0" bIns="0" rIns="0">
-            <a:spAutoFit/>
-          </a:bodyPr>
-          <a:lstStyle/>
-          <a:p>
-            <a:pPr algn="l">
-              <a:lnSpc>
-                <a:spcPts val="1820"/>
-              </a:lnSpc>
-            </a:pPr>
-            <a:r>
-              <a:rPr lang="en-US" sz="1300" b="true">
-                <a:solidFill>
-                  <a:srgbClr val="000000"/>
-                </a:solidFill>
-                <a:latin typeface="Canva Sans Bold"/>
-                <a:ea typeface="Canva Sans Bold"/>
-                <a:cs typeface="Canva Sans Bold"/>
-                <a:sym typeface="Canva Sans Bold"/>
-              </a:rPr>
-              <a:t>It reaches the target audience that Etihad Airways is looking for, includes diverse high - value audience </a:t>
-            </a:r>
-          </a:p>
-        </p:txBody>
-      </p:sp>
-      <p:sp>
-        <p:nvSpPr>
-          <p:cNvPr name="TextBox 39" id="39"/>
-          <p:cNvSpPr txBox="true"/>
-          <p:nvPr/>
-        </p:nvSpPr>
-        <p:spPr>
-          <a:xfrm rot="0">
-            <a:off x="10194587" y="2505512"/>
-            <a:ext cx="6050956" cy="1376679"/>
-          </a:xfrm>
-          <a:prstGeom prst="rect">
-            <a:avLst/>
-          </a:prstGeom>
-        </p:spPr>
-        <p:txBody>
-          <a:bodyPr anchor="t" rtlCol="false" tIns="0" lIns="0" bIns="0" rIns="0">
-            <a:spAutoFit/>
-          </a:bodyPr>
-          <a:lstStyle/>
-          <a:p>
-            <a:pPr algn="l">
-              <a:lnSpc>
-                <a:spcPts val="1820"/>
-              </a:lnSpc>
-            </a:pPr>
-            <a:r>
-              <a:rPr lang="en-US" sz="1300" b="true">
-                <a:solidFill>
-                  <a:srgbClr val="000000"/>
-                </a:solidFill>
-                <a:latin typeface="Canva Sans Bold"/>
-                <a:ea typeface="Canva Sans Bold"/>
-                <a:cs typeface="Canva Sans Bold"/>
-                <a:sym typeface="Canva Sans Bold"/>
-              </a:rPr>
-              <a:t>Positioned in the heart of Downtown Atlanta, this dual digital spectacular is located within one of the city’s busiestcommercial and commuter corridors, surrounded by office towers, retail spaces, and major intersections that generatecontinuous vehicular and pedestrian movement throughout the day.</a:t>
-            </a:r>
-          </a:p>
-          <a:p>
-            <a:pPr algn="l">
-              <a:lnSpc>
-                <a:spcPts val="1820"/>
-              </a:lnSpc>
-            </a:pPr>
-          </a:p>
-        </p:txBody>
-      </p:sp>
-      <p:sp>
-        <p:nvSpPr>
-          <p:cNvPr name="TextBox 40" id="40"/>
-          <p:cNvSpPr txBox="true"/>
-          <p:nvPr/>
-        </p:nvSpPr>
-        <p:spPr>
-          <a:xfrm rot="0">
-            <a:off x="10261420" y="4571801"/>
-            <a:ext cx="6050956" cy="1148079"/>
-          </a:xfrm>
-          <a:prstGeom prst="rect">
-            <a:avLst/>
-          </a:prstGeom>
-        </p:spPr>
-        <p:txBody>
-          <a:bodyPr anchor="t" rtlCol="false" tIns="0" lIns="0" bIns="0" rIns="0">
-            <a:spAutoFit/>
-          </a:bodyPr>
-          <a:lstStyle/>
-          <a:p>
-            <a:pPr algn="l">
-              <a:lnSpc>
-                <a:spcPts val="1820"/>
-              </a:lnSpc>
-            </a:pPr>
-            <a:r>
-              <a:rPr lang="en-US" sz="1300" b="true">
-                <a:solidFill>
-                  <a:srgbClr val="000000"/>
-                </a:solidFill>
-                <a:latin typeface="Canva Sans Bold"/>
-                <a:ea typeface="Canva Sans Bold"/>
-                <a:cs typeface="Canva Sans Bold"/>
-                <a:sym typeface="Canva Sans Bold"/>
-              </a:rPr>
-              <a:t>The large-format digital screens offer dominant visibility at a high-traffic intersection, benefiting from extended dwelltime due to traffic signals and congestion. Full-motion capability combined with repeated exposure (10% SOV within a 6-minute loop) ensures strong and consistent brand recall.</a:t>
-            </a:r>
-          </a:p>
-          <a:p>
-            <a:pPr algn="l">
-              <a:lnSpc>
-                <a:spcPts val="1820"/>
-              </a:lnSpc>
-            </a:pPr>
-          </a:p>
-        </p:txBody>
-      </p:sp>
-      <p:sp>
-        <p:nvSpPr>
-          <p:cNvPr name="TextBox 41" id="41"/>
-          <p:cNvSpPr txBox="true"/>
-          <p:nvPr/>
-        </p:nvSpPr>
-        <p:spPr>
-          <a:xfrm rot="0">
-            <a:off x="10309203" y="6612064"/>
-            <a:ext cx="6050956" cy="1148079"/>
-          </a:xfrm>
-          <a:prstGeom prst="rect">
-            <a:avLst/>
-          </a:prstGeom>
-        </p:spPr>
-        <p:txBody>
-          <a:bodyPr anchor="t" rtlCol="false" tIns="0" lIns="0" bIns="0" rIns="0">
-            <a:spAutoFit/>
-          </a:bodyPr>
-          <a:lstStyle/>
-          <a:p>
-            <a:pPr algn="l">
-              <a:lnSpc>
-                <a:spcPts val="1820"/>
-              </a:lnSpc>
-            </a:pPr>
-            <a:r>
-              <a:rPr lang="en-US" sz="1300" b="true">
-                <a:solidFill>
-                  <a:srgbClr val="000000"/>
-                </a:solidFill>
-                <a:latin typeface="Canva Sans Bold"/>
-                <a:ea typeface="Canva Sans Bold"/>
-                <a:cs typeface="Canva Sans Bold"/>
-                <a:sym typeface="Canva Sans Bold"/>
-              </a:rPr>
-              <a:t>Engages a high-density flow of ISC professionals, consultants, and international business travelers moving throughAtlanta’s core, many of whom maintain frequent long-haul connections to the Indian Subcontinent and favor premium travel experiences.</a:t>
-            </a:r>
-          </a:p>
-          <a:p>
-            <a:pPr algn="l">
-              <a:lnSpc>
-                <a:spcPts val="1820"/>
-              </a:lnSpc>
-            </a:pPr>
           </a:p>
         </p:txBody>
       </p:sp>
